--- a/deck-v2.pptx
+++ b/deck-v2.pptx
@@ -1,31 +1,32 @@
 
 <file path=ppt/presentation.xml><?xml version="1.0" encoding="utf-8"?>
-<p:presentation xmlns:a="http://schemas.openxmlformats.org/drawingml/2006/main" xmlns:r="http://schemas.openxmlformats.org/officeDocument/2006/relationships" xmlns:mc="http://schemas.openxmlformats.org/markup-compatibility/2006" xmlns:mv="urn:schemas-microsoft-com:mac:vml" xmlns:p="http://schemas.openxmlformats.org/presentationml/2006/main" xmlns:c="http://schemas.openxmlformats.org/drawingml/2006/chart" xmlns:dgm="http://schemas.openxmlformats.org/drawingml/2006/diagram" xmlns:o="urn:schemas-microsoft-com:office:office" xmlns:v="urn:schemas-microsoft-com:vml" xmlns:pvml="urn:schemas-microsoft-com:office:powerpoint" xmlns:com="http://schemas.openxmlformats.org/drawingml/2006/compatibility" xmlns:p14="http://schemas.microsoft.com/office/powerpoint/2010/main" xmlns:p15="http://schemas.microsoft.com/office/powerpoint/2012/main" xmlns:ahyp="http://schemas.microsoft.com/office/drawing/2018/hyperlinkcolor" autoCompressPictures="0" embedTrueTypeFonts="1" strictFirstAndLastChars="0" saveSubsetFonts="1">
+<p:presentation xmlns:a="http://schemas.openxmlformats.org/drawingml/2006/main" xmlns:r="http://schemas.openxmlformats.org/officeDocument/2006/relationships" xmlns:p="http://schemas.openxmlformats.org/presentationml/2006/main" strictFirstAndLastChars="0" embedTrueTypeFonts="1" saveSubsetFonts="1" autoCompressPictures="0">
   <p:sldMasterIdLst>
-    <p:sldMasterId id="2147483648" r:id="rId4"/>
+    <p:sldMasterId id="2147483648" r:id="rId1"/>
   </p:sldMasterIdLst>
   <p:notesMasterIdLst>
-    <p:notesMasterId r:id="rId5"/>
+    <p:notesMasterId r:id="rId4"/>
   </p:notesMasterIdLst>
   <p:sldIdLst>
-    <p:sldId id="256" r:id="rId6"/>
-    <p:sldId id="257" r:id="rId7"/>
-    <p:sldId id="258" r:id="rId8"/>
-    <p:sldId id="259" r:id="rId9"/>
+    <p:sldId id="256" r:id="rId3"/>
+    <p:sldId id="257" r:id="rId5"/>
+    <p:sldId id="258" r:id="rId6"/>
+    <p:sldId id="259" r:id="rId7"/>
   </p:sldIdLst>
-  <p:sldSz cy="6858000" cx="9144000"/>
+  <p:sldSz cx="9144000" cy="6858000"/>
   <p:notesSz cx="6858000" cy="9144000"/>
   <p:embeddedFontLst>
     <p:embeddedFont>
-      <p:font typeface="Proxima Nova"/>
-      <p:regular r:id="rId10"/>
-      <p:bold r:id="rId11"/>
-      <p:italic r:id="rId12"/>
-      <p:boldItalic r:id="rId13"/>
+      <p:font typeface="Proxima Nova" panose="02000506030000020004"/>
+      <p:regular r:id="rId11"/>
+    </p:embeddedFont>
+    <p:embeddedFont>
+      <p:font typeface="Calibri" panose="020F0502020204030204"/>
+      <p:regular r:id="rId12"/>
     </p:embeddedFont>
   </p:embeddedFontLst>
   <p:defaultTextStyle>
-    <a:defPPr lvl="0" marR="0" rtl="0" algn="l">
+    <a:defPPr marR="0" lvl="0" algn="l" rtl="0">
       <a:lnSpc>
         <a:spcPct val="100000"/>
       </a:lnSpc>
@@ -36,7 +37,7 @@
         <a:spcPts val="0"/>
       </a:spcAft>
     </a:defPPr>
-    <a:lvl1pPr lvl="0" marR="0" rtl="0" algn="l">
+    <a:lvl1pPr marR="0" lvl="0" algn="l" rtl="0">
       <a:lnSpc>
         <a:spcPct val="100000"/>
       </a:lnSpc>
@@ -49,18 +50,18 @@
       <a:buClr>
         <a:srgbClr val="000000"/>
       </a:buClr>
-      <a:buFont typeface="Arial"/>
-      <a:defRPr b="0" i="0" sz="1400" u="none" cap="none" strike="noStrike">
+      <a:buFont typeface="Arial" panose="020B0604020202090204"/>
+      <a:defRPr sz="1400" b="0" i="0" u="none" strike="noStrike" cap="none">
         <a:solidFill>
           <a:srgbClr val="000000"/>
         </a:solidFill>
-        <a:latin typeface="Arial"/>
-        <a:ea typeface="Arial"/>
-        <a:cs typeface="Arial"/>
-        <a:sym typeface="Arial"/>
+        <a:latin typeface="Arial" panose="020B0604020202090204"/>
+        <a:ea typeface="Arial" panose="020B0604020202090204"/>
+        <a:cs typeface="Arial" panose="020B0604020202090204"/>
+        <a:sym typeface="Arial" panose="020B0604020202090204"/>
       </a:defRPr>
     </a:lvl1pPr>
-    <a:lvl2pPr lvl="1" marR="0" rtl="0" algn="l">
+    <a:lvl2pPr marR="0" lvl="1" algn="l" rtl="0">
       <a:lnSpc>
         <a:spcPct val="100000"/>
       </a:lnSpc>
@@ -73,18 +74,18 @@
       <a:buClr>
         <a:srgbClr val="000000"/>
       </a:buClr>
-      <a:buFont typeface="Arial"/>
-      <a:defRPr b="0" i="0" sz="1400" u="none" cap="none" strike="noStrike">
+      <a:buFont typeface="Arial" panose="020B0604020202090204"/>
+      <a:defRPr sz="1400" b="0" i="0" u="none" strike="noStrike" cap="none">
         <a:solidFill>
           <a:srgbClr val="000000"/>
         </a:solidFill>
-        <a:latin typeface="Arial"/>
-        <a:ea typeface="Arial"/>
-        <a:cs typeface="Arial"/>
-        <a:sym typeface="Arial"/>
+        <a:latin typeface="Arial" panose="020B0604020202090204"/>
+        <a:ea typeface="Arial" panose="020B0604020202090204"/>
+        <a:cs typeface="Arial" panose="020B0604020202090204"/>
+        <a:sym typeface="Arial" panose="020B0604020202090204"/>
       </a:defRPr>
     </a:lvl2pPr>
-    <a:lvl3pPr lvl="2" marR="0" rtl="0" algn="l">
+    <a:lvl3pPr marR="0" lvl="2" algn="l" rtl="0">
       <a:lnSpc>
         <a:spcPct val="100000"/>
       </a:lnSpc>
@@ -97,18 +98,18 @@
       <a:buClr>
         <a:srgbClr val="000000"/>
       </a:buClr>
-      <a:buFont typeface="Arial"/>
-      <a:defRPr b="0" i="0" sz="1400" u="none" cap="none" strike="noStrike">
+      <a:buFont typeface="Arial" panose="020B0604020202090204"/>
+      <a:defRPr sz="1400" b="0" i="0" u="none" strike="noStrike" cap="none">
         <a:solidFill>
           <a:srgbClr val="000000"/>
         </a:solidFill>
-        <a:latin typeface="Arial"/>
-        <a:ea typeface="Arial"/>
-        <a:cs typeface="Arial"/>
-        <a:sym typeface="Arial"/>
+        <a:latin typeface="Arial" panose="020B0604020202090204"/>
+        <a:ea typeface="Arial" panose="020B0604020202090204"/>
+        <a:cs typeface="Arial" panose="020B0604020202090204"/>
+        <a:sym typeface="Arial" panose="020B0604020202090204"/>
       </a:defRPr>
     </a:lvl3pPr>
-    <a:lvl4pPr lvl="3" marR="0" rtl="0" algn="l">
+    <a:lvl4pPr marR="0" lvl="3" algn="l" rtl="0">
       <a:lnSpc>
         <a:spcPct val="100000"/>
       </a:lnSpc>
@@ -121,18 +122,18 @@
       <a:buClr>
         <a:srgbClr val="000000"/>
       </a:buClr>
-      <a:buFont typeface="Arial"/>
-      <a:defRPr b="0" i="0" sz="1400" u="none" cap="none" strike="noStrike">
+      <a:buFont typeface="Arial" panose="020B0604020202090204"/>
+      <a:defRPr sz="1400" b="0" i="0" u="none" strike="noStrike" cap="none">
         <a:solidFill>
           <a:srgbClr val="000000"/>
         </a:solidFill>
-        <a:latin typeface="Arial"/>
-        <a:ea typeface="Arial"/>
-        <a:cs typeface="Arial"/>
-        <a:sym typeface="Arial"/>
+        <a:latin typeface="Arial" panose="020B0604020202090204"/>
+        <a:ea typeface="Arial" panose="020B0604020202090204"/>
+        <a:cs typeface="Arial" panose="020B0604020202090204"/>
+        <a:sym typeface="Arial" panose="020B0604020202090204"/>
       </a:defRPr>
     </a:lvl4pPr>
-    <a:lvl5pPr lvl="4" marR="0" rtl="0" algn="l">
+    <a:lvl5pPr marR="0" lvl="4" algn="l" rtl="0">
       <a:lnSpc>
         <a:spcPct val="100000"/>
       </a:lnSpc>
@@ -145,18 +146,18 @@
       <a:buClr>
         <a:srgbClr val="000000"/>
       </a:buClr>
-      <a:buFont typeface="Arial"/>
-      <a:defRPr b="0" i="0" sz="1400" u="none" cap="none" strike="noStrike">
+      <a:buFont typeface="Arial" panose="020B0604020202090204"/>
+      <a:defRPr sz="1400" b="0" i="0" u="none" strike="noStrike" cap="none">
         <a:solidFill>
           <a:srgbClr val="000000"/>
         </a:solidFill>
-        <a:latin typeface="Arial"/>
-        <a:ea typeface="Arial"/>
-        <a:cs typeface="Arial"/>
-        <a:sym typeface="Arial"/>
+        <a:latin typeface="Arial" panose="020B0604020202090204"/>
+        <a:ea typeface="Arial" panose="020B0604020202090204"/>
+        <a:cs typeface="Arial" panose="020B0604020202090204"/>
+        <a:sym typeface="Arial" panose="020B0604020202090204"/>
       </a:defRPr>
     </a:lvl5pPr>
-    <a:lvl6pPr lvl="5" marR="0" rtl="0" algn="l">
+    <a:lvl6pPr marR="0" lvl="5" algn="l" rtl="0">
       <a:lnSpc>
         <a:spcPct val="100000"/>
       </a:lnSpc>
@@ -169,18 +170,18 @@
       <a:buClr>
         <a:srgbClr val="000000"/>
       </a:buClr>
-      <a:buFont typeface="Arial"/>
-      <a:defRPr b="0" i="0" sz="1400" u="none" cap="none" strike="noStrike">
+      <a:buFont typeface="Arial" panose="020B0604020202090204"/>
+      <a:defRPr sz="1400" b="0" i="0" u="none" strike="noStrike" cap="none">
         <a:solidFill>
           <a:srgbClr val="000000"/>
         </a:solidFill>
-        <a:latin typeface="Arial"/>
-        <a:ea typeface="Arial"/>
-        <a:cs typeface="Arial"/>
-        <a:sym typeface="Arial"/>
+        <a:latin typeface="Arial" panose="020B0604020202090204"/>
+        <a:ea typeface="Arial" panose="020B0604020202090204"/>
+        <a:cs typeface="Arial" panose="020B0604020202090204"/>
+        <a:sym typeface="Arial" panose="020B0604020202090204"/>
       </a:defRPr>
     </a:lvl6pPr>
-    <a:lvl7pPr lvl="6" marR="0" rtl="0" algn="l">
+    <a:lvl7pPr marR="0" lvl="6" algn="l" rtl="0">
       <a:lnSpc>
         <a:spcPct val="100000"/>
       </a:lnSpc>
@@ -193,18 +194,18 @@
       <a:buClr>
         <a:srgbClr val="000000"/>
       </a:buClr>
-      <a:buFont typeface="Arial"/>
-      <a:defRPr b="0" i="0" sz="1400" u="none" cap="none" strike="noStrike">
+      <a:buFont typeface="Arial" panose="020B0604020202090204"/>
+      <a:defRPr sz="1400" b="0" i="0" u="none" strike="noStrike" cap="none">
         <a:solidFill>
           <a:srgbClr val="000000"/>
         </a:solidFill>
-        <a:latin typeface="Arial"/>
-        <a:ea typeface="Arial"/>
-        <a:cs typeface="Arial"/>
-        <a:sym typeface="Arial"/>
+        <a:latin typeface="Arial" panose="020B0604020202090204"/>
+        <a:ea typeface="Arial" panose="020B0604020202090204"/>
+        <a:cs typeface="Arial" panose="020B0604020202090204"/>
+        <a:sym typeface="Arial" panose="020B0604020202090204"/>
       </a:defRPr>
     </a:lvl7pPr>
-    <a:lvl8pPr lvl="7" marR="0" rtl="0" algn="l">
+    <a:lvl8pPr marR="0" lvl="7" algn="l" rtl="0">
       <a:lnSpc>
         <a:spcPct val="100000"/>
       </a:lnSpc>
@@ -217,18 +218,18 @@
       <a:buClr>
         <a:srgbClr val="000000"/>
       </a:buClr>
-      <a:buFont typeface="Arial"/>
-      <a:defRPr b="0" i="0" sz="1400" u="none" cap="none" strike="noStrike">
+      <a:buFont typeface="Arial" panose="020B0604020202090204"/>
+      <a:defRPr sz="1400" b="0" i="0" u="none" strike="noStrike" cap="none">
         <a:solidFill>
           <a:srgbClr val="000000"/>
         </a:solidFill>
-        <a:latin typeface="Arial"/>
-        <a:ea typeface="Arial"/>
-        <a:cs typeface="Arial"/>
-        <a:sym typeface="Arial"/>
+        <a:latin typeface="Arial" panose="020B0604020202090204"/>
+        <a:ea typeface="Arial" panose="020B0604020202090204"/>
+        <a:cs typeface="Arial" panose="020B0604020202090204"/>
+        <a:sym typeface="Arial" panose="020B0604020202090204"/>
       </a:defRPr>
     </a:lvl8pPr>
-    <a:lvl9pPr lvl="8" marR="0" rtl="0" algn="l">
+    <a:lvl9pPr marR="0" lvl="8" algn="l" rtl="0">
       <a:lnSpc>
         <a:spcPct val="100000"/>
       </a:lnSpc>
@@ -241,43 +242,45 @@
       <a:buClr>
         <a:srgbClr val="000000"/>
       </a:buClr>
-      <a:buFont typeface="Arial"/>
-      <a:defRPr b="0" i="0" sz="1400" u="none" cap="none" strike="noStrike">
+      <a:buFont typeface="Arial" panose="020B0604020202090204"/>
+      <a:defRPr sz="1400" b="0" i="0" u="none" strike="noStrike" cap="none">
         <a:solidFill>
           <a:srgbClr val="000000"/>
         </a:solidFill>
-        <a:latin typeface="Arial"/>
-        <a:ea typeface="Arial"/>
-        <a:cs typeface="Arial"/>
-        <a:sym typeface="Arial"/>
+        <a:latin typeface="Arial" panose="020B0604020202090204"/>
+        <a:ea typeface="Arial" panose="020B0604020202090204"/>
+        <a:cs typeface="Arial" panose="020B0604020202090204"/>
+        <a:sym typeface="Arial" panose="020B0604020202090204"/>
       </a:defRPr>
     </a:lvl9pPr>
   </p:defaultTextStyle>
   <p:extLst>
     <p:ext uri="{EFAFB233-063F-42B5-8137-9DF3F51BA10A}">
-      <p15:sldGuideLst>
-        <p15:guide id="1" orient="horz" pos="2160">
+      <p15:sldGuideLst xmlns:p15="http://schemas.microsoft.com/office/powerpoint/2012/main">
+        <p15:guide id="1" orient="horz" pos="2160" userDrawn="1">
           <p15:clr>
             <a:srgbClr val="000000"/>
           </p15:clr>
         </p15:guide>
-        <p15:guide id="2" pos="2880">
+        <p15:guide id="2" pos="2880" userDrawn="1">
           <p15:clr>
             <a:srgbClr val="000000"/>
           </p15:clr>
         </p15:guide>
       </p15:sldGuideLst>
     </p:ext>
-    <p:ext uri="GoogleSlidesCustomDataVersion2">
-      <go:slidesCustomData xmlns:go="http://customooxmlschemas.google.com/" r:id="rId14" roundtripDataSignature="AMtx7miunvx21uq3TyruOs6ZsogdrEeHjg=="/>
-    </p:ext>
   </p:extLst>
 </p:presentation>
 </file>
 
 <file path=ppt/notesMasters/notesMaster1.xml><?xml version="1.0" encoding="utf-8"?>
-<p:notesMaster xmlns:a="http://schemas.openxmlformats.org/drawingml/2006/main" xmlns:r="http://schemas.openxmlformats.org/officeDocument/2006/relationships" xmlns:mc="http://schemas.openxmlformats.org/markup-compatibility/2006" xmlns:mv="urn:schemas-microsoft-com:mac:vml" xmlns:p="http://schemas.openxmlformats.org/presentationml/2006/main" xmlns:c="http://schemas.openxmlformats.org/drawingml/2006/chart" xmlns:dgm="http://schemas.openxmlformats.org/drawingml/2006/diagram" xmlns:o="urn:schemas-microsoft-com:office:office" xmlns:v="urn:schemas-microsoft-com:vml" xmlns:pvml="urn:schemas-microsoft-com:office:powerpoint" xmlns:com="http://schemas.openxmlformats.org/drawingml/2006/compatibility" xmlns:p14="http://schemas.microsoft.com/office/powerpoint/2010/main" xmlns:p15="http://schemas.microsoft.com/office/powerpoint/2012/main" xmlns:ahyp="http://schemas.microsoft.com/office/drawing/2018/hyperlinkcolor">
+<p:notesMaster xmlns:a="http://schemas.openxmlformats.org/drawingml/2006/main" xmlns:r="http://schemas.openxmlformats.org/officeDocument/2006/relationships" xmlns:p="http://schemas.openxmlformats.org/presentationml/2006/main">
   <p:cSld>
+    <p:bg>
+      <p:bgRef idx="1001">
+        <a:schemeClr val="bg1"/>
+      </p:bgRef>
+    </p:bg>
     <p:spTree>
       <p:nvGrpSpPr>
         <p:cNvPr id="2" name="Shape 2"/>
@@ -297,7 +300,7 @@
           <p:cNvPr id="3" name="Google Shape;3;n"/>
           <p:cNvSpPr/>
           <p:nvPr>
-            <p:ph idx="2" type="sldImg"/>
+            <p:ph type="sldImg" idx="2"/>
           </p:nvPr>
         </p:nvSpPr>
         <p:spPr>
@@ -306,9 +309,13 @@
             <a:ext cx="4572225" cy="3429000"/>
           </a:xfrm>
           <a:custGeom>
-            <a:rect b="b" l="l" r="r" t="t"/>
+            <a:avLst/>
+            <a:gdLst/>
+            <a:ahLst/>
+            <a:cxnLst/>
+            <a:rect l="l" t="t" r="r" b="b"/>
             <a:pathLst>
-              <a:path extrusionOk="0" h="120000" w="120000">
+              <a:path w="120000" h="120000" extrusionOk="0">
                 <a:moveTo>
                   <a:pt x="0" y="0"/>
                 </a:moveTo>
@@ -326,14 +333,14 @@
             </a:pathLst>
           </a:custGeom>
           <a:noFill/>
-          <a:ln cap="flat" cmpd="sng" w="9525">
+          <a:ln w="9525" cap="flat" cmpd="sng">
             <a:solidFill>
               <a:srgbClr val="000000"/>
             </a:solidFill>
             <a:prstDash val="solid"/>
             <a:round/>
-            <a:headEnd len="sm" w="sm" type="none"/>
-            <a:tailEnd len="sm" w="sm" type="none"/>
+            <a:headEnd type="none" w="sm" len="sm"/>
+            <a:tailEnd type="none" w="sm" len="sm"/>
           </a:ln>
         </p:spPr>
       </p:sp>
@@ -342,7 +349,7 @@
           <p:cNvPr id="4" name="Google Shape;4;n"/>
           <p:cNvSpPr txBox="1"/>
           <p:nvPr>
-            <p:ph idx="1" type="body"/>
+            <p:ph type="body" idx="1"/>
           </p:nvPr>
         </p:nvSpPr>
         <p:spPr>
@@ -359,11 +366,11 @@
           </a:ln>
         </p:spPr>
         <p:txBody>
-          <a:bodyPr anchorCtr="0" anchor="t" bIns="91425" lIns="91425" spcFirstLastPara="1" rIns="91425" wrap="square" tIns="91425">
+          <a:bodyPr spcFirstLastPara="1" wrap="square" lIns="91425" tIns="91425" rIns="91425" bIns="91425" anchor="t" anchorCtr="0">
             <a:noAutofit/>
           </a:bodyPr>
           <a:lstStyle>
-            <a:lvl1pPr indent="-298450" lvl="0" marL="457200">
+            <a:lvl1pPr marL="457200" lvl="0" indent="-298450">
               <a:spcBef>
                 <a:spcPts val="0"/>
               </a:spcBef>
@@ -374,7 +381,7 @@
               <a:buChar char="●"/>
               <a:defRPr sz="1100"/>
             </a:lvl1pPr>
-            <a:lvl2pPr indent="-298450" lvl="1" marL="914400">
+            <a:lvl2pPr marL="914400" lvl="1" indent="-298450">
               <a:spcBef>
                 <a:spcPts val="0"/>
               </a:spcBef>
@@ -385,7 +392,7 @@
               <a:buChar char="○"/>
               <a:defRPr sz="1100"/>
             </a:lvl2pPr>
-            <a:lvl3pPr indent="-298450" lvl="2" marL="1371600">
+            <a:lvl3pPr marL="1371600" lvl="2" indent="-298450">
               <a:spcBef>
                 <a:spcPts val="0"/>
               </a:spcBef>
@@ -396,7 +403,7 @@
               <a:buChar char="■"/>
               <a:defRPr sz="1100"/>
             </a:lvl3pPr>
-            <a:lvl4pPr indent="-298450" lvl="3" marL="1828800">
+            <a:lvl4pPr marL="1828800" lvl="3" indent="-298450">
               <a:spcBef>
                 <a:spcPts val="0"/>
               </a:spcBef>
@@ -407,7 +414,7 @@
               <a:buChar char="●"/>
               <a:defRPr sz="1100"/>
             </a:lvl4pPr>
-            <a:lvl5pPr indent="-298450" lvl="4" marL="2286000">
+            <a:lvl5pPr marL="2286000" lvl="4" indent="-298450">
               <a:spcBef>
                 <a:spcPts val="0"/>
               </a:spcBef>
@@ -418,7 +425,7 @@
               <a:buChar char="○"/>
               <a:defRPr sz="1100"/>
             </a:lvl5pPr>
-            <a:lvl6pPr indent="-298450" lvl="5" marL="2743200">
+            <a:lvl6pPr marL="2743200" lvl="5" indent="-298450">
               <a:spcBef>
                 <a:spcPts val="0"/>
               </a:spcBef>
@@ -429,7 +436,7 @@
               <a:buChar char="■"/>
               <a:defRPr sz="1100"/>
             </a:lvl6pPr>
-            <a:lvl7pPr indent="-298450" lvl="6" marL="3200400">
+            <a:lvl7pPr marL="3200400" lvl="6" indent="-298450">
               <a:spcBef>
                 <a:spcPts val="0"/>
               </a:spcBef>
@@ -440,7 +447,7 @@
               <a:buChar char="●"/>
               <a:defRPr sz="1100"/>
             </a:lvl7pPr>
-            <a:lvl8pPr indent="-298450" lvl="7" marL="3657600">
+            <a:lvl8pPr marL="3657600" lvl="7" indent="-298450">
               <a:spcBef>
                 <a:spcPts val="0"/>
               </a:spcBef>
@@ -451,7 +458,7 @@
               <a:buChar char="○"/>
               <a:defRPr sz="1100"/>
             </a:lvl8pPr>
-            <a:lvl9pPr indent="-298450" lvl="8" marL="4114800">
+            <a:lvl9pPr marL="4114800" lvl="8" indent="-298450">
               <a:spcBef>
                 <a:spcPts val="0"/>
               </a:spcBef>
@@ -468,9 +475,9 @@
       </p:sp>
     </p:spTree>
   </p:cSld>
-  <p:clrMap accent1="accent1" accent2="accent2" accent3="accent3" accent4="accent4" accent5="accent5" accent6="accent6" bg1="lt1" bg2="dk2" tx1="dk1" tx2="lt2" folHlink="folHlink" hlink="hlink"/>
+  <p:clrMap bg1="lt1" tx1="dk1" bg2="dk2" tx2="lt2" accent1="accent1" accent2="accent2" accent3="accent3" accent4="accent4" accent5="accent5" accent6="accent6" hlink="hlink" folHlink="folHlink"/>
   <p:notesStyle>
-    <a:defPPr lvl="0" marR="0" rtl="0" algn="l">
+    <a:defPPr marR="0" lvl="0" algn="l" rtl="0">
       <a:lnSpc>
         <a:spcPct val="100000"/>
       </a:lnSpc>
@@ -481,7 +488,7 @@
         <a:spcPts val="0"/>
       </a:spcAft>
     </a:defPPr>
-    <a:lvl1pPr lvl="0" marR="0" rtl="0" algn="l">
+    <a:lvl1pPr marR="0" lvl="0" algn="l" rtl="0">
       <a:lnSpc>
         <a:spcPct val="100000"/>
       </a:lnSpc>
@@ -494,18 +501,18 @@
       <a:buClr>
         <a:srgbClr val="000000"/>
       </a:buClr>
-      <a:buFont typeface="Arial"/>
-      <a:defRPr b="0" i="0" sz="1400" u="none" cap="none" strike="noStrike">
+      <a:buFont typeface="Arial" panose="020B0604020202090204"/>
+      <a:defRPr sz="1400" b="0" i="0" u="none" strike="noStrike" cap="none">
         <a:solidFill>
           <a:srgbClr val="000000"/>
         </a:solidFill>
-        <a:latin typeface="Arial"/>
-        <a:ea typeface="Arial"/>
-        <a:cs typeface="Arial"/>
-        <a:sym typeface="Arial"/>
+        <a:latin typeface="Arial" panose="020B0604020202090204"/>
+        <a:ea typeface="Arial" panose="020B0604020202090204"/>
+        <a:cs typeface="Arial" panose="020B0604020202090204"/>
+        <a:sym typeface="Arial" panose="020B0604020202090204"/>
       </a:defRPr>
     </a:lvl1pPr>
-    <a:lvl2pPr lvl="1" marR="0" rtl="0" algn="l">
+    <a:lvl2pPr marR="0" lvl="1" algn="l" rtl="0">
       <a:lnSpc>
         <a:spcPct val="100000"/>
       </a:lnSpc>
@@ -518,18 +525,18 @@
       <a:buClr>
         <a:srgbClr val="000000"/>
       </a:buClr>
-      <a:buFont typeface="Arial"/>
-      <a:defRPr b="0" i="0" sz="1400" u="none" cap="none" strike="noStrike">
+      <a:buFont typeface="Arial" panose="020B0604020202090204"/>
+      <a:defRPr sz="1400" b="0" i="0" u="none" strike="noStrike" cap="none">
         <a:solidFill>
           <a:srgbClr val="000000"/>
         </a:solidFill>
-        <a:latin typeface="Arial"/>
-        <a:ea typeface="Arial"/>
-        <a:cs typeface="Arial"/>
-        <a:sym typeface="Arial"/>
+        <a:latin typeface="Arial" panose="020B0604020202090204"/>
+        <a:ea typeface="Arial" panose="020B0604020202090204"/>
+        <a:cs typeface="Arial" panose="020B0604020202090204"/>
+        <a:sym typeface="Arial" panose="020B0604020202090204"/>
       </a:defRPr>
     </a:lvl2pPr>
-    <a:lvl3pPr lvl="2" marR="0" rtl="0" algn="l">
+    <a:lvl3pPr marR="0" lvl="2" algn="l" rtl="0">
       <a:lnSpc>
         <a:spcPct val="100000"/>
       </a:lnSpc>
@@ -542,18 +549,18 @@
       <a:buClr>
         <a:srgbClr val="000000"/>
       </a:buClr>
-      <a:buFont typeface="Arial"/>
-      <a:defRPr b="0" i="0" sz="1400" u="none" cap="none" strike="noStrike">
+      <a:buFont typeface="Arial" panose="020B0604020202090204"/>
+      <a:defRPr sz="1400" b="0" i="0" u="none" strike="noStrike" cap="none">
         <a:solidFill>
           <a:srgbClr val="000000"/>
         </a:solidFill>
-        <a:latin typeface="Arial"/>
-        <a:ea typeface="Arial"/>
-        <a:cs typeface="Arial"/>
-        <a:sym typeface="Arial"/>
+        <a:latin typeface="Arial" panose="020B0604020202090204"/>
+        <a:ea typeface="Arial" panose="020B0604020202090204"/>
+        <a:cs typeface="Arial" panose="020B0604020202090204"/>
+        <a:sym typeface="Arial" panose="020B0604020202090204"/>
       </a:defRPr>
     </a:lvl3pPr>
-    <a:lvl4pPr lvl="3" marR="0" rtl="0" algn="l">
+    <a:lvl4pPr marR="0" lvl="3" algn="l" rtl="0">
       <a:lnSpc>
         <a:spcPct val="100000"/>
       </a:lnSpc>
@@ -566,18 +573,18 @@
       <a:buClr>
         <a:srgbClr val="000000"/>
       </a:buClr>
-      <a:buFont typeface="Arial"/>
-      <a:defRPr b="0" i="0" sz="1400" u="none" cap="none" strike="noStrike">
+      <a:buFont typeface="Arial" panose="020B0604020202090204"/>
+      <a:defRPr sz="1400" b="0" i="0" u="none" strike="noStrike" cap="none">
         <a:solidFill>
           <a:srgbClr val="000000"/>
         </a:solidFill>
-        <a:latin typeface="Arial"/>
-        <a:ea typeface="Arial"/>
-        <a:cs typeface="Arial"/>
-        <a:sym typeface="Arial"/>
+        <a:latin typeface="Arial" panose="020B0604020202090204"/>
+        <a:ea typeface="Arial" panose="020B0604020202090204"/>
+        <a:cs typeface="Arial" panose="020B0604020202090204"/>
+        <a:sym typeface="Arial" panose="020B0604020202090204"/>
       </a:defRPr>
     </a:lvl4pPr>
-    <a:lvl5pPr lvl="4" marR="0" rtl="0" algn="l">
+    <a:lvl5pPr marR="0" lvl="4" algn="l" rtl="0">
       <a:lnSpc>
         <a:spcPct val="100000"/>
       </a:lnSpc>
@@ -590,18 +597,18 @@
       <a:buClr>
         <a:srgbClr val="000000"/>
       </a:buClr>
-      <a:buFont typeface="Arial"/>
-      <a:defRPr b="0" i="0" sz="1400" u="none" cap="none" strike="noStrike">
+      <a:buFont typeface="Arial" panose="020B0604020202090204"/>
+      <a:defRPr sz="1400" b="0" i="0" u="none" strike="noStrike" cap="none">
         <a:solidFill>
           <a:srgbClr val="000000"/>
         </a:solidFill>
-        <a:latin typeface="Arial"/>
-        <a:ea typeface="Arial"/>
-        <a:cs typeface="Arial"/>
-        <a:sym typeface="Arial"/>
+        <a:latin typeface="Arial" panose="020B0604020202090204"/>
+        <a:ea typeface="Arial" panose="020B0604020202090204"/>
+        <a:cs typeface="Arial" panose="020B0604020202090204"/>
+        <a:sym typeface="Arial" panose="020B0604020202090204"/>
       </a:defRPr>
     </a:lvl5pPr>
-    <a:lvl6pPr lvl="5" marR="0" rtl="0" algn="l">
+    <a:lvl6pPr marR="0" lvl="5" algn="l" rtl="0">
       <a:lnSpc>
         <a:spcPct val="100000"/>
       </a:lnSpc>
@@ -614,18 +621,18 @@
       <a:buClr>
         <a:srgbClr val="000000"/>
       </a:buClr>
-      <a:buFont typeface="Arial"/>
-      <a:defRPr b="0" i="0" sz="1400" u="none" cap="none" strike="noStrike">
+      <a:buFont typeface="Arial" panose="020B0604020202090204"/>
+      <a:defRPr sz="1400" b="0" i="0" u="none" strike="noStrike" cap="none">
         <a:solidFill>
           <a:srgbClr val="000000"/>
         </a:solidFill>
-        <a:latin typeface="Arial"/>
-        <a:ea typeface="Arial"/>
-        <a:cs typeface="Arial"/>
-        <a:sym typeface="Arial"/>
+        <a:latin typeface="Arial" panose="020B0604020202090204"/>
+        <a:ea typeface="Arial" panose="020B0604020202090204"/>
+        <a:cs typeface="Arial" panose="020B0604020202090204"/>
+        <a:sym typeface="Arial" panose="020B0604020202090204"/>
       </a:defRPr>
     </a:lvl6pPr>
-    <a:lvl7pPr lvl="6" marR="0" rtl="0" algn="l">
+    <a:lvl7pPr marR="0" lvl="6" algn="l" rtl="0">
       <a:lnSpc>
         <a:spcPct val="100000"/>
       </a:lnSpc>
@@ -638,18 +645,18 @@
       <a:buClr>
         <a:srgbClr val="000000"/>
       </a:buClr>
-      <a:buFont typeface="Arial"/>
-      <a:defRPr b="0" i="0" sz="1400" u="none" cap="none" strike="noStrike">
+      <a:buFont typeface="Arial" panose="020B0604020202090204"/>
+      <a:defRPr sz="1400" b="0" i="0" u="none" strike="noStrike" cap="none">
         <a:solidFill>
           <a:srgbClr val="000000"/>
         </a:solidFill>
-        <a:latin typeface="Arial"/>
-        <a:ea typeface="Arial"/>
-        <a:cs typeface="Arial"/>
-        <a:sym typeface="Arial"/>
+        <a:latin typeface="Arial" panose="020B0604020202090204"/>
+        <a:ea typeface="Arial" panose="020B0604020202090204"/>
+        <a:cs typeface="Arial" panose="020B0604020202090204"/>
+        <a:sym typeface="Arial" panose="020B0604020202090204"/>
       </a:defRPr>
     </a:lvl7pPr>
-    <a:lvl8pPr lvl="7" marR="0" rtl="0" algn="l">
+    <a:lvl8pPr marR="0" lvl="7" algn="l" rtl="0">
       <a:lnSpc>
         <a:spcPct val="100000"/>
       </a:lnSpc>
@@ -662,18 +669,18 @@
       <a:buClr>
         <a:srgbClr val="000000"/>
       </a:buClr>
-      <a:buFont typeface="Arial"/>
-      <a:defRPr b="0" i="0" sz="1400" u="none" cap="none" strike="noStrike">
+      <a:buFont typeface="Arial" panose="020B0604020202090204"/>
+      <a:defRPr sz="1400" b="0" i="0" u="none" strike="noStrike" cap="none">
         <a:solidFill>
           <a:srgbClr val="000000"/>
         </a:solidFill>
-        <a:latin typeface="Arial"/>
-        <a:ea typeface="Arial"/>
-        <a:cs typeface="Arial"/>
-        <a:sym typeface="Arial"/>
+        <a:latin typeface="Arial" panose="020B0604020202090204"/>
+        <a:ea typeface="Arial" panose="020B0604020202090204"/>
+        <a:cs typeface="Arial" panose="020B0604020202090204"/>
+        <a:sym typeface="Arial" panose="020B0604020202090204"/>
       </a:defRPr>
     </a:lvl8pPr>
-    <a:lvl9pPr lvl="8" marR="0" rtl="0" algn="l">
+    <a:lvl9pPr marR="0" lvl="8" algn="l" rtl="0">
       <a:lnSpc>
         <a:spcPct val="100000"/>
       </a:lnSpc>
@@ -686,15 +693,15 @@
       <a:buClr>
         <a:srgbClr val="000000"/>
       </a:buClr>
-      <a:buFont typeface="Arial"/>
-      <a:defRPr b="0" i="0" sz="1400" u="none" cap="none" strike="noStrike">
+      <a:buFont typeface="Arial" panose="020B0604020202090204"/>
+      <a:defRPr sz="1400" b="0" i="0" u="none" strike="noStrike" cap="none">
         <a:solidFill>
           <a:srgbClr val="000000"/>
         </a:solidFill>
-        <a:latin typeface="Arial"/>
-        <a:ea typeface="Arial"/>
-        <a:cs typeface="Arial"/>
-        <a:sym typeface="Arial"/>
+        <a:latin typeface="Arial" panose="020B0604020202090204"/>
+        <a:ea typeface="Arial" panose="020B0604020202090204"/>
+        <a:cs typeface="Arial" panose="020B0604020202090204"/>
+        <a:sym typeface="Arial" panose="020B0604020202090204"/>
       </a:defRPr>
     </a:lvl9pPr>
   </p:notesStyle>
@@ -702,7 +709,7 @@
 </file>
 
 <file path=ppt/notesSlides/notesSlide1.xml><?xml version="1.0" encoding="utf-8"?>
-<p:notes xmlns:a="http://schemas.openxmlformats.org/drawingml/2006/main" xmlns:r="http://schemas.openxmlformats.org/officeDocument/2006/relationships" xmlns:mc="http://schemas.openxmlformats.org/markup-compatibility/2006" xmlns:mv="urn:schemas-microsoft-com:mac:vml" xmlns:p="http://schemas.openxmlformats.org/presentationml/2006/main" xmlns:c="http://schemas.openxmlformats.org/drawingml/2006/chart" xmlns:dgm="http://schemas.openxmlformats.org/drawingml/2006/diagram" xmlns:o="urn:schemas-microsoft-com:office:office" xmlns:v="urn:schemas-microsoft-com:vml" xmlns:pvml="urn:schemas-microsoft-com:office:powerpoint" xmlns:com="http://schemas.openxmlformats.org/drawingml/2006/compatibility" xmlns:p14="http://schemas.microsoft.com/office/powerpoint/2010/main" xmlns:p15="http://schemas.microsoft.com/office/powerpoint/2012/main" xmlns:ahyp="http://schemas.microsoft.com/office/drawing/2018/hyperlinkcolor" showMasterPhAnim="0" showMasterSp="0">
+<p:notes xmlns:a="http://schemas.openxmlformats.org/drawingml/2006/main" xmlns:r="http://schemas.openxmlformats.org/officeDocument/2006/relationships" xmlns:p="http://schemas.openxmlformats.org/presentationml/2006/main" showMasterPhAnim="0" showMasterSp="0">
   <p:cSld>
     <p:spTree>
       <p:nvGrpSpPr>
@@ -723,7 +730,7 @@
           <p:cNvPr id="56" name="Google Shape;56;p1:notes"/>
           <p:cNvSpPr txBox="1"/>
           <p:nvPr>
-            <p:ph idx="1" type="body"/>
+            <p:ph type="body" idx="1"/>
           </p:nvPr>
         </p:nvSpPr>
         <p:spPr>
@@ -736,12 +743,12 @@
           </a:prstGeom>
         </p:spPr>
         <p:txBody>
-          <a:bodyPr anchorCtr="0" anchor="t" bIns="91425" lIns="91425" spcFirstLastPara="1" rIns="91425" wrap="square" tIns="91425">
+          <a:bodyPr spcFirstLastPara="1" wrap="square" lIns="91425" tIns="91425" rIns="91425" bIns="91425" anchor="t" anchorCtr="0">
             <a:noAutofit/>
           </a:bodyPr>
           <a:lstStyle/>
           <a:p>
-            <a:pPr indent="0" lvl="0" marL="0" rtl="0" algn="l">
+            <a:pPr marL="0" lvl="0" indent="0" algn="l" rtl="0">
               <a:spcBef>
                 <a:spcPts val="0"/>
               </a:spcBef>
@@ -750,10 +757,6 @@
               </a:spcAft>
               <a:buNone/>
             </a:pPr>
-            <a:r>
-              <a:t/>
-            </a:r>
-            <a:endParaRPr/>
           </a:p>
         </p:txBody>
       </p:sp>
@@ -762,7 +765,7 @@
           <p:cNvPr id="57" name="Google Shape;57;p1:notes"/>
           <p:cNvSpPr/>
           <p:nvPr>
-            <p:ph idx="2" type="sldImg"/>
+            <p:ph type="sldImg" idx="2"/>
           </p:nvPr>
         </p:nvSpPr>
         <p:spPr>
@@ -771,9 +774,13 @@
             <a:ext cx="4572225" cy="3429000"/>
           </a:xfrm>
           <a:custGeom>
-            <a:rect b="b" l="l" r="r" t="t"/>
+            <a:avLst/>
+            <a:gdLst/>
+            <a:ahLst/>
+            <a:cxnLst/>
+            <a:rect l="l" t="t" r="r" b="b"/>
             <a:pathLst>
-              <a:path extrusionOk="0" h="120000" w="120000">
+              <a:path w="120000" h="120000" extrusionOk="0">
                 <a:moveTo>
                   <a:pt x="0" y="0"/>
                 </a:moveTo>
@@ -801,7 +808,7 @@
 </file>
 
 <file path=ppt/notesSlides/notesSlide2.xml><?xml version="1.0" encoding="utf-8"?>
-<p:notes xmlns:a="http://schemas.openxmlformats.org/drawingml/2006/main" xmlns:r="http://schemas.openxmlformats.org/officeDocument/2006/relationships" xmlns:mc="http://schemas.openxmlformats.org/markup-compatibility/2006" xmlns:mv="urn:schemas-microsoft-com:mac:vml" xmlns:p="http://schemas.openxmlformats.org/presentationml/2006/main" xmlns:c="http://schemas.openxmlformats.org/drawingml/2006/chart" xmlns:dgm="http://schemas.openxmlformats.org/drawingml/2006/diagram" xmlns:o="urn:schemas-microsoft-com:office:office" xmlns:v="urn:schemas-microsoft-com:vml" xmlns:pvml="urn:schemas-microsoft-com:office:powerpoint" xmlns:com="http://schemas.openxmlformats.org/drawingml/2006/compatibility" xmlns:p14="http://schemas.microsoft.com/office/powerpoint/2010/main" xmlns:p15="http://schemas.microsoft.com/office/powerpoint/2012/main" xmlns:ahyp="http://schemas.microsoft.com/office/drawing/2018/hyperlinkcolor" showMasterPhAnim="0" showMasterSp="0">
+<p:notes xmlns:a="http://schemas.openxmlformats.org/drawingml/2006/main" xmlns:r="http://schemas.openxmlformats.org/officeDocument/2006/relationships" xmlns:p="http://schemas.openxmlformats.org/presentationml/2006/main" showMasterPhAnim="0" showMasterSp="0">
   <p:cSld>
     <p:spTree>
       <p:nvGrpSpPr>
@@ -822,7 +829,7 @@
           <p:cNvPr id="63" name="Google Shape;63;p2:notes"/>
           <p:cNvSpPr txBox="1"/>
           <p:nvPr>
-            <p:ph idx="1" type="body"/>
+            <p:ph type="body" idx="1"/>
           </p:nvPr>
         </p:nvSpPr>
         <p:spPr>
@@ -835,12 +842,12 @@
           </a:prstGeom>
         </p:spPr>
         <p:txBody>
-          <a:bodyPr anchorCtr="0" anchor="t" bIns="91425" lIns="91425" spcFirstLastPara="1" rIns="91425" wrap="square" tIns="91425">
+          <a:bodyPr spcFirstLastPara="1" wrap="square" lIns="91425" tIns="91425" rIns="91425" bIns="91425" anchor="t" anchorCtr="0">
             <a:noAutofit/>
           </a:bodyPr>
           <a:lstStyle/>
           <a:p>
-            <a:pPr indent="0" lvl="0" marL="0" rtl="0" algn="l">
+            <a:pPr marL="0" lvl="0" indent="0" algn="l" rtl="0">
               <a:spcBef>
                 <a:spcPts val="0"/>
               </a:spcBef>
@@ -849,10 +856,6 @@
               </a:spcAft>
               <a:buNone/>
             </a:pPr>
-            <a:r>
-              <a:t/>
-            </a:r>
-            <a:endParaRPr/>
           </a:p>
         </p:txBody>
       </p:sp>
@@ -861,7 +864,7 @@
           <p:cNvPr id="64" name="Google Shape;64;p2:notes"/>
           <p:cNvSpPr/>
           <p:nvPr>
-            <p:ph idx="2" type="sldImg"/>
+            <p:ph type="sldImg" idx="2"/>
           </p:nvPr>
         </p:nvSpPr>
         <p:spPr>
@@ -870,9 +873,13 @@
             <a:ext cx="4572225" cy="3429000"/>
           </a:xfrm>
           <a:custGeom>
-            <a:rect b="b" l="l" r="r" t="t"/>
+            <a:avLst/>
+            <a:gdLst/>
+            <a:ahLst/>
+            <a:cxnLst/>
+            <a:rect l="l" t="t" r="r" b="b"/>
             <a:pathLst>
-              <a:path extrusionOk="0" h="120000" w="120000">
+              <a:path w="120000" h="120000" extrusionOk="0">
                 <a:moveTo>
                   <a:pt x="0" y="0"/>
                 </a:moveTo>
@@ -900,7 +907,7 @@
 </file>
 
 <file path=ppt/notesSlides/notesSlide3.xml><?xml version="1.0" encoding="utf-8"?>
-<p:notes xmlns:a="http://schemas.openxmlformats.org/drawingml/2006/main" xmlns:r="http://schemas.openxmlformats.org/officeDocument/2006/relationships" xmlns:mc="http://schemas.openxmlformats.org/markup-compatibility/2006" xmlns:mv="urn:schemas-microsoft-com:mac:vml" xmlns:p="http://schemas.openxmlformats.org/presentationml/2006/main" xmlns:c="http://schemas.openxmlformats.org/drawingml/2006/chart" xmlns:dgm="http://schemas.openxmlformats.org/drawingml/2006/diagram" xmlns:o="urn:schemas-microsoft-com:office:office" xmlns:v="urn:schemas-microsoft-com:vml" xmlns:pvml="urn:schemas-microsoft-com:office:powerpoint" xmlns:com="http://schemas.openxmlformats.org/drawingml/2006/compatibility" xmlns:p14="http://schemas.microsoft.com/office/powerpoint/2010/main" xmlns:p15="http://schemas.microsoft.com/office/powerpoint/2012/main" xmlns:ahyp="http://schemas.microsoft.com/office/drawing/2018/hyperlinkcolor" showMasterPhAnim="0" showMasterSp="0">
+<p:notes xmlns:a="http://schemas.openxmlformats.org/drawingml/2006/main" xmlns:r="http://schemas.openxmlformats.org/officeDocument/2006/relationships" xmlns:p="http://schemas.openxmlformats.org/presentationml/2006/main" showMasterPhAnim="0" showMasterSp="0">
   <p:cSld>
     <p:spTree>
       <p:nvGrpSpPr>
@@ -921,7 +928,7 @@
           <p:cNvPr id="74" name="Google Shape;74;p3:notes"/>
           <p:cNvSpPr txBox="1"/>
           <p:nvPr>
-            <p:ph idx="1" type="body"/>
+            <p:ph type="body" idx="1"/>
           </p:nvPr>
         </p:nvSpPr>
         <p:spPr>
@@ -934,12 +941,12 @@
           </a:prstGeom>
         </p:spPr>
         <p:txBody>
-          <a:bodyPr anchorCtr="0" anchor="t" bIns="91425" lIns="91425" spcFirstLastPara="1" rIns="91425" wrap="square" tIns="91425">
+          <a:bodyPr spcFirstLastPara="1" wrap="square" lIns="91425" tIns="91425" rIns="91425" bIns="91425" anchor="t" anchorCtr="0">
             <a:noAutofit/>
           </a:bodyPr>
           <a:lstStyle/>
           <a:p>
-            <a:pPr indent="0" lvl="0" marL="0" rtl="0" algn="l">
+            <a:pPr marL="0" lvl="0" indent="0" algn="l" rtl="0">
               <a:spcBef>
                 <a:spcPts val="0"/>
               </a:spcBef>
@@ -948,10 +955,6 @@
               </a:spcAft>
               <a:buNone/>
             </a:pPr>
-            <a:r>
-              <a:t/>
-            </a:r>
-            <a:endParaRPr/>
           </a:p>
         </p:txBody>
       </p:sp>
@@ -960,7 +963,7 @@
           <p:cNvPr id="75" name="Google Shape;75;p3:notes"/>
           <p:cNvSpPr/>
           <p:nvPr>
-            <p:ph idx="2" type="sldImg"/>
+            <p:ph type="sldImg" idx="2"/>
           </p:nvPr>
         </p:nvSpPr>
         <p:spPr>
@@ -969,9 +972,13 @@
             <a:ext cx="4572225" cy="3429000"/>
           </a:xfrm>
           <a:custGeom>
-            <a:rect b="b" l="l" r="r" t="t"/>
+            <a:avLst/>
+            <a:gdLst/>
+            <a:ahLst/>
+            <a:cxnLst/>
+            <a:rect l="l" t="t" r="r" b="b"/>
             <a:pathLst>
-              <a:path extrusionOk="0" h="120000" w="120000">
+              <a:path w="120000" h="120000" extrusionOk="0">
                 <a:moveTo>
                   <a:pt x="0" y="0"/>
                 </a:moveTo>
@@ -999,7 +1006,7 @@
 </file>
 
 <file path=ppt/notesSlides/notesSlide4.xml><?xml version="1.0" encoding="utf-8"?>
-<p:notes xmlns:a="http://schemas.openxmlformats.org/drawingml/2006/main" xmlns:r="http://schemas.openxmlformats.org/officeDocument/2006/relationships" xmlns:mc="http://schemas.openxmlformats.org/markup-compatibility/2006" xmlns:mv="urn:schemas-microsoft-com:mac:vml" xmlns:p="http://schemas.openxmlformats.org/presentationml/2006/main" xmlns:c="http://schemas.openxmlformats.org/drawingml/2006/chart" xmlns:dgm="http://schemas.openxmlformats.org/drawingml/2006/diagram" xmlns:o="urn:schemas-microsoft-com:office:office" xmlns:v="urn:schemas-microsoft-com:vml" xmlns:pvml="urn:schemas-microsoft-com:office:powerpoint" xmlns:com="http://schemas.openxmlformats.org/drawingml/2006/compatibility" xmlns:p14="http://schemas.microsoft.com/office/powerpoint/2010/main" xmlns:p15="http://schemas.microsoft.com/office/powerpoint/2012/main" xmlns:ahyp="http://schemas.microsoft.com/office/drawing/2018/hyperlinkcolor" showMasterPhAnim="0" showMasterSp="0">
+<p:notes xmlns:a="http://schemas.openxmlformats.org/drawingml/2006/main" xmlns:r="http://schemas.openxmlformats.org/officeDocument/2006/relationships" xmlns:p="http://schemas.openxmlformats.org/presentationml/2006/main" showMasterPhAnim="0" showMasterSp="0">
   <p:cSld>
     <p:spTree>
       <p:nvGrpSpPr>
@@ -1020,7 +1027,7 @@
           <p:cNvPr id="92" name="Google Shape;92;p4:notes"/>
           <p:cNvSpPr txBox="1"/>
           <p:nvPr>
-            <p:ph idx="1" type="body"/>
+            <p:ph type="body" idx="1"/>
           </p:nvPr>
         </p:nvSpPr>
         <p:spPr>
@@ -1033,12 +1040,12 @@
           </a:prstGeom>
         </p:spPr>
         <p:txBody>
-          <a:bodyPr anchorCtr="0" anchor="t" bIns="91425" lIns="91425" spcFirstLastPara="1" rIns="91425" wrap="square" tIns="91425">
+          <a:bodyPr spcFirstLastPara="1" wrap="square" lIns="91425" tIns="91425" rIns="91425" bIns="91425" anchor="t" anchorCtr="0">
             <a:noAutofit/>
           </a:bodyPr>
           <a:lstStyle/>
           <a:p>
-            <a:pPr indent="0" lvl="0" marL="0" rtl="0" algn="l">
+            <a:pPr marL="0" lvl="0" indent="0" algn="l" rtl="0">
               <a:spcBef>
                 <a:spcPts val="0"/>
               </a:spcBef>
@@ -1047,10 +1054,6 @@
               </a:spcAft>
               <a:buNone/>
             </a:pPr>
-            <a:r>
-              <a:t/>
-            </a:r>
-            <a:endParaRPr/>
           </a:p>
         </p:txBody>
       </p:sp>
@@ -1059,7 +1062,7 @@
           <p:cNvPr id="93" name="Google Shape;93;p4:notes"/>
           <p:cNvSpPr/>
           <p:nvPr>
-            <p:ph idx="2" type="sldImg"/>
+            <p:ph type="sldImg" idx="2"/>
           </p:nvPr>
         </p:nvSpPr>
         <p:spPr>
@@ -1068,9 +1071,13 @@
             <a:ext cx="4572225" cy="3429000"/>
           </a:xfrm>
           <a:custGeom>
-            <a:rect b="b" l="l" r="r" t="t"/>
+            <a:avLst/>
+            <a:gdLst/>
+            <a:ahLst/>
+            <a:cxnLst/>
+            <a:rect l="l" t="t" r="r" b="b"/>
             <a:pathLst>
-              <a:path extrusionOk="0" h="120000" w="120000">
+              <a:path w="120000" h="120000" extrusionOk="0">
                 <a:moveTo>
                   <a:pt x="0" y="0"/>
                 </a:moveTo>
@@ -1098,13 +1105,14 @@
 </file>
 
 <file path=ppt/slideLayouts/slideLayout1.xml><?xml version="1.0" encoding="utf-8"?>
-<p:sldLayout xmlns:a="http://schemas.openxmlformats.org/drawingml/2006/main" xmlns:r="http://schemas.openxmlformats.org/officeDocument/2006/relationships" xmlns:mc="http://schemas.openxmlformats.org/markup-compatibility/2006" xmlns:mv="urn:schemas-microsoft-com:mac:vml" xmlns:p="http://schemas.openxmlformats.org/presentationml/2006/main" xmlns:c="http://schemas.openxmlformats.org/drawingml/2006/chart" xmlns:dgm="http://schemas.openxmlformats.org/drawingml/2006/diagram" xmlns:o="urn:schemas-microsoft-com:office:office" xmlns:v="urn:schemas-microsoft-com:vml" xmlns:pvml="urn:schemas-microsoft-com:office:powerpoint" xmlns:com="http://schemas.openxmlformats.org/drawingml/2006/compatibility" xmlns:p14="http://schemas.microsoft.com/office/powerpoint/2010/main" xmlns:p15="http://schemas.microsoft.com/office/powerpoint/2012/main" xmlns:ahyp="http://schemas.microsoft.com/office/drawing/2018/hyperlinkcolor" matchingName="Title slide" type="title">
+<p:sldLayout xmlns:a="http://schemas.openxmlformats.org/drawingml/2006/main" xmlns:r="http://schemas.openxmlformats.org/officeDocument/2006/relationships" xmlns:p="http://schemas.openxmlformats.org/presentationml/2006/main" type="title" matchingName="Title slide">
   <p:cSld name="TITLE">
     <p:bg>
       <p:bgPr>
         <a:solidFill>
           <a:schemeClr val="dk1"/>
         </a:solidFill>
+        <a:effectLst/>
       </p:bgPr>
     </p:bg>
     <p:spTree>
@@ -1136,14 +1144,14 @@
             <a:avLst/>
           </a:prstGeom>
           <a:noFill/>
-          <a:ln cap="flat" cmpd="sng" w="19050">
+          <a:ln w="19050" cap="flat" cmpd="sng">
             <a:solidFill>
               <a:schemeClr val="lt2"/>
             </a:solidFill>
             <a:prstDash val="solid"/>
             <a:round/>
-            <a:headEnd len="sm" w="sm" type="none"/>
-            <a:tailEnd len="sm" w="sm" type="none"/>
+            <a:headEnd type="none" w="sm" len="sm"/>
+            <a:tailEnd type="none" w="sm" len="sm"/>
           </a:ln>
         </p:spPr>
       </p:cxnSp>
@@ -1165,7 +1173,7 @@
           </a:prstGeom>
         </p:spPr>
         <p:txBody>
-          <a:bodyPr anchorCtr="0" anchor="b" bIns="91425" lIns="91425" spcFirstLastPara="1" rIns="91425" wrap="square" tIns="91425">
+          <a:bodyPr spcFirstLastPara="1" wrap="square" lIns="91425" tIns="91425" rIns="91425" bIns="91425" anchor="b" anchorCtr="0">
             <a:normAutofit/>
           </a:bodyPr>
           <a:lstStyle>
@@ -1340,7 +1348,7 @@
           <p:cNvPr id="12" name="Google Shape;12;g395d4a1ce48_0_456"/>
           <p:cNvSpPr txBox="1"/>
           <p:nvPr>
-            <p:ph idx="1" type="subTitle"/>
+            <p:ph type="subTitle" idx="1"/>
           </p:nvPr>
         </p:nvSpPr>
         <p:spPr>
@@ -1353,7 +1361,7 @@
           </a:prstGeom>
         </p:spPr>
         <p:txBody>
-          <a:bodyPr anchorCtr="0" anchor="t" bIns="91425" lIns="91425" spcFirstLastPara="1" rIns="91425" wrap="square" tIns="91425">
+          <a:bodyPr spcFirstLastPara="1" wrap="square" lIns="91425" tIns="91425" rIns="91425" bIns="91425" anchor="t" anchorCtr="0">
             <a:normAutofit/>
           </a:bodyPr>
           <a:lstStyle>
@@ -1555,7 +1563,7 @@
           <p:cNvPr id="13" name="Google Shape;13;g395d4a1ce48_0_456"/>
           <p:cNvSpPr txBox="1"/>
           <p:nvPr>
-            <p:ph idx="12" type="sldNum"/>
+            <p:ph type="sldNum" idx="12"/>
           </p:nvPr>
         </p:nvSpPr>
         <p:spPr>
@@ -1568,7 +1576,7 @@
           </a:prstGeom>
         </p:spPr>
         <p:txBody>
-          <a:bodyPr anchorCtr="0" anchor="ctr" bIns="91425" lIns="91425" spcFirstLastPara="1" rIns="91425" wrap="square" tIns="91425">
+          <a:bodyPr spcFirstLastPara="1" wrap="square" lIns="91425" tIns="91425" rIns="91425" bIns="91425" anchor="ctr" anchorCtr="0">
             <a:normAutofit/>
           </a:bodyPr>
           <a:lstStyle>
@@ -1646,7 +1654,7 @@
             </a:lvl9pPr>
           </a:lstStyle>
           <a:p>
-            <a:pPr indent="0" lvl="0" marL="0" rtl="0" algn="r">
+            <a:pPr marL="0" lvl="0" indent="0" algn="r" rtl="0">
               <a:spcBef>
                 <a:spcPts val="0"/>
               </a:spcBef>
@@ -1657,9 +1665,8 @@
             </a:pPr>
             <a:fld id="{00000000-1234-1234-1234-123412341234}" type="slidenum">
               <a:rPr lang="en-US"/>
-              <a:t>‹#›</a:t>
             </a:fld>
-            <a:endParaRPr/>
+            <a:endParaRPr lang="en-US"/>
           </a:p>
         </p:txBody>
       </p:sp>
@@ -1672,7 +1679,7 @@
 </file>
 
 <file path=ppt/slideLayouts/slideLayout10.xml><?xml version="1.0" encoding="utf-8"?>
-<p:sldLayout xmlns:a="http://schemas.openxmlformats.org/drawingml/2006/main" xmlns:r="http://schemas.openxmlformats.org/officeDocument/2006/relationships" xmlns:mc="http://schemas.openxmlformats.org/markup-compatibility/2006" xmlns:mv="urn:schemas-microsoft-com:mac:vml" xmlns:p="http://schemas.openxmlformats.org/presentationml/2006/main" xmlns:c="http://schemas.openxmlformats.org/drawingml/2006/chart" xmlns:dgm="http://schemas.openxmlformats.org/drawingml/2006/diagram" xmlns:o="urn:schemas-microsoft-com:office:office" xmlns:v="urn:schemas-microsoft-com:vml" xmlns:pvml="urn:schemas-microsoft-com:office:powerpoint" xmlns:com="http://schemas.openxmlformats.org/drawingml/2006/compatibility" xmlns:p14="http://schemas.microsoft.com/office/powerpoint/2010/main" xmlns:p15="http://schemas.microsoft.com/office/powerpoint/2012/main" xmlns:ahyp="http://schemas.microsoft.com/office/drawing/2018/hyperlinkcolor" matchingName="Big number">
+<p:sldLayout xmlns:a="http://schemas.openxmlformats.org/drawingml/2006/main" xmlns:r="http://schemas.openxmlformats.org/officeDocument/2006/relationships" xmlns:p="http://schemas.openxmlformats.org/presentationml/2006/main" matchingName="Big number">
   <p:cSld name="BIG_NUMBER">
     <p:spTree>
       <p:nvGrpSpPr>
@@ -1710,12 +1717,12 @@
           </a:ln>
         </p:spPr>
         <p:txBody>
-          <a:bodyPr anchorCtr="0" anchor="ctr" bIns="91425" lIns="91425" spcFirstLastPara="1" rIns="91425" wrap="square" tIns="91425">
+          <a:bodyPr spcFirstLastPara="1" wrap="square" lIns="91425" tIns="91425" rIns="91425" bIns="91425" anchor="ctr" anchorCtr="0">
             <a:noAutofit/>
           </a:bodyPr>
           <a:lstStyle/>
           <a:p>
-            <a:pPr indent="0" lvl="0" marL="0" rtl="0" algn="l">
+            <a:pPr marL="0" lvl="0" indent="0" algn="l" rtl="0">
               <a:spcBef>
                 <a:spcPts val="0"/>
               </a:spcBef>
@@ -1724,10 +1731,6 @@
               </a:spcAft>
               <a:buNone/>
             </a:pPr>
-            <a:r>
-              <a:t/>
-            </a:r>
-            <a:endParaRPr/>
           </a:p>
         </p:txBody>
       </p:sp>
@@ -1736,7 +1739,7 @@
           <p:cNvPr id="50" name="Google Shape;50;g395d4a1ce48_0_495"/>
           <p:cNvSpPr txBox="1"/>
           <p:nvPr>
-            <p:ph hasCustomPrompt="1" type="title"/>
+            <p:ph type="title" hasCustomPrompt="1"/>
           </p:nvPr>
         </p:nvSpPr>
         <p:spPr>
@@ -1749,7 +1752,7 @@
           </a:prstGeom>
         </p:spPr>
         <p:txBody>
-          <a:bodyPr anchorCtr="0" anchor="ctr" bIns="91425" lIns="91425" spcFirstLastPara="1" rIns="91425" wrap="square" tIns="91425">
+          <a:bodyPr spcFirstLastPara="1" wrap="square" lIns="91425" tIns="91425" rIns="91425" bIns="91425" anchor="ctr" anchorCtr="0">
             <a:normAutofit/>
           </a:bodyPr>
           <a:lstStyle>
@@ -1762,7 +1765,7 @@
               </a:spcAft>
               <a:buSzPts val="14000"/>
               <a:buNone/>
-              <a:defRPr b="1" sz="14000"/>
+              <a:defRPr sz="14000" b="1"/>
             </a:lvl1pPr>
             <a:lvl2pPr lvl="1" algn="ctr">
               <a:spcBef>
@@ -1773,7 +1776,7 @@
               </a:spcAft>
               <a:buSzPts val="14000"/>
               <a:buNone/>
-              <a:defRPr b="1" sz="14000"/>
+              <a:defRPr sz="14000" b="1"/>
             </a:lvl2pPr>
             <a:lvl3pPr lvl="2" algn="ctr">
               <a:spcBef>
@@ -1784,7 +1787,7 @@
               </a:spcAft>
               <a:buSzPts val="14000"/>
               <a:buNone/>
-              <a:defRPr b="1" sz="14000"/>
+              <a:defRPr sz="14000" b="1"/>
             </a:lvl3pPr>
             <a:lvl4pPr lvl="3" algn="ctr">
               <a:spcBef>
@@ -1795,7 +1798,7 @@
               </a:spcAft>
               <a:buSzPts val="14000"/>
               <a:buNone/>
-              <a:defRPr b="1" sz="14000"/>
+              <a:defRPr sz="14000" b="1"/>
             </a:lvl4pPr>
             <a:lvl5pPr lvl="4" algn="ctr">
               <a:spcBef>
@@ -1806,7 +1809,7 @@
               </a:spcAft>
               <a:buSzPts val="14000"/>
               <a:buNone/>
-              <a:defRPr b="1" sz="14000"/>
+              <a:defRPr sz="14000" b="1"/>
             </a:lvl5pPr>
             <a:lvl6pPr lvl="5" algn="ctr">
               <a:spcBef>
@@ -1817,7 +1820,7 @@
               </a:spcAft>
               <a:buSzPts val="14000"/>
               <a:buNone/>
-              <a:defRPr b="1" sz="14000"/>
+              <a:defRPr sz="14000" b="1"/>
             </a:lvl6pPr>
             <a:lvl7pPr lvl="6" algn="ctr">
               <a:spcBef>
@@ -1828,7 +1831,7 @@
               </a:spcAft>
               <a:buSzPts val="14000"/>
               <a:buNone/>
-              <a:defRPr b="1" sz="14000"/>
+              <a:defRPr sz="14000" b="1"/>
             </a:lvl7pPr>
             <a:lvl8pPr lvl="7" algn="ctr">
               <a:spcBef>
@@ -1839,7 +1842,7 @@
               </a:spcAft>
               <a:buSzPts val="14000"/>
               <a:buNone/>
-              <a:defRPr b="1" sz="14000"/>
+              <a:defRPr sz="14000" b="1"/>
             </a:lvl8pPr>
             <a:lvl9pPr lvl="8" algn="ctr">
               <a:spcBef>
@@ -1850,7 +1853,7 @@
               </a:spcAft>
               <a:buSzPts val="14000"/>
               <a:buNone/>
-              <a:defRPr b="1" sz="14000"/>
+              <a:defRPr sz="14000" b="1"/>
             </a:lvl9pPr>
           </a:lstStyle>
           <a:p>
@@ -1865,7 +1868,7 @@
           <p:cNvPr id="51" name="Google Shape;51;g395d4a1ce48_0_495"/>
           <p:cNvSpPr txBox="1"/>
           <p:nvPr>
-            <p:ph idx="1" type="body"/>
+            <p:ph type="body" idx="1"/>
           </p:nvPr>
         </p:nvSpPr>
         <p:spPr>
@@ -1878,11 +1881,11 @@
           </a:prstGeom>
         </p:spPr>
         <p:txBody>
-          <a:bodyPr anchorCtr="0" anchor="t" bIns="91425" lIns="91425" spcFirstLastPara="1" rIns="91425" wrap="square" tIns="91425">
+          <a:bodyPr spcFirstLastPara="1" wrap="square" lIns="91425" tIns="91425" rIns="91425" bIns="91425" anchor="t" anchorCtr="0">
             <a:normAutofit/>
           </a:bodyPr>
           <a:lstStyle>
-            <a:lvl1pPr indent="-342900" lvl="0" marL="457200" algn="ctr">
+            <a:lvl1pPr marL="457200" lvl="0" indent="-342900" algn="ctr">
               <a:spcBef>
                 <a:spcPts val="0"/>
               </a:spcBef>
@@ -1893,7 +1896,7 @@
               <a:buChar char="●"/>
               <a:defRPr/>
             </a:lvl1pPr>
-            <a:lvl2pPr indent="-317500" lvl="1" marL="914400" algn="ctr">
+            <a:lvl2pPr marL="914400" lvl="1" indent="-317500" algn="ctr">
               <a:spcBef>
                 <a:spcPts val="0"/>
               </a:spcBef>
@@ -1904,7 +1907,7 @@
               <a:buChar char="○"/>
               <a:defRPr/>
             </a:lvl2pPr>
-            <a:lvl3pPr indent="-317500" lvl="2" marL="1371600" algn="ctr">
+            <a:lvl3pPr marL="1371600" lvl="2" indent="-317500" algn="ctr">
               <a:spcBef>
                 <a:spcPts val="0"/>
               </a:spcBef>
@@ -1915,7 +1918,7 @@
               <a:buChar char="■"/>
               <a:defRPr/>
             </a:lvl3pPr>
-            <a:lvl4pPr indent="-317500" lvl="3" marL="1828800" algn="ctr">
+            <a:lvl4pPr marL="1828800" lvl="3" indent="-317500" algn="ctr">
               <a:spcBef>
                 <a:spcPts val="0"/>
               </a:spcBef>
@@ -1926,7 +1929,7 @@
               <a:buChar char="●"/>
               <a:defRPr/>
             </a:lvl4pPr>
-            <a:lvl5pPr indent="-317500" lvl="4" marL="2286000" algn="ctr">
+            <a:lvl5pPr marL="2286000" lvl="4" indent="-317500" algn="ctr">
               <a:spcBef>
                 <a:spcPts val="0"/>
               </a:spcBef>
@@ -1937,7 +1940,7 @@
               <a:buChar char="○"/>
               <a:defRPr/>
             </a:lvl5pPr>
-            <a:lvl6pPr indent="-317500" lvl="5" marL="2743200" algn="ctr">
+            <a:lvl6pPr marL="2743200" lvl="5" indent="-317500" algn="ctr">
               <a:spcBef>
                 <a:spcPts val="0"/>
               </a:spcBef>
@@ -1948,7 +1951,7 @@
               <a:buChar char="■"/>
               <a:defRPr/>
             </a:lvl6pPr>
-            <a:lvl7pPr indent="-317500" lvl="6" marL="3200400" algn="ctr">
+            <a:lvl7pPr marL="3200400" lvl="6" indent="-317500" algn="ctr">
               <a:spcBef>
                 <a:spcPts val="0"/>
               </a:spcBef>
@@ -1959,7 +1962,7 @@
               <a:buChar char="●"/>
               <a:defRPr/>
             </a:lvl7pPr>
-            <a:lvl8pPr indent="-317500" lvl="7" marL="3657600" algn="ctr">
+            <a:lvl8pPr marL="3657600" lvl="7" indent="-317500" algn="ctr">
               <a:spcBef>
                 <a:spcPts val="0"/>
               </a:spcBef>
@@ -1970,7 +1973,7 @@
               <a:buChar char="○"/>
               <a:defRPr/>
             </a:lvl8pPr>
-            <a:lvl9pPr indent="-317500" lvl="8" marL="4114800" algn="ctr">
+            <a:lvl9pPr marL="4114800" lvl="8" indent="-317500" algn="ctr">
               <a:spcBef>
                 <a:spcPts val="0"/>
               </a:spcBef>
@@ -1990,7 +1993,7 @@
           <p:cNvPr id="52" name="Google Shape;52;g395d4a1ce48_0_495"/>
           <p:cNvSpPr txBox="1"/>
           <p:nvPr>
-            <p:ph idx="12" type="sldNum"/>
+            <p:ph type="sldNum" idx="12"/>
           </p:nvPr>
         </p:nvSpPr>
         <p:spPr>
@@ -2003,7 +2006,7 @@
           </a:prstGeom>
         </p:spPr>
         <p:txBody>
-          <a:bodyPr anchorCtr="0" anchor="ctr" bIns="91425" lIns="91425" spcFirstLastPara="1" rIns="91425" wrap="square" tIns="91425">
+          <a:bodyPr spcFirstLastPara="1" wrap="square" lIns="91425" tIns="91425" rIns="91425" bIns="91425" anchor="ctr" anchorCtr="0">
             <a:normAutofit/>
           </a:bodyPr>
           <a:lstStyle>
@@ -2045,7 +2048,7 @@
             </a:lvl9pPr>
           </a:lstStyle>
           <a:p>
-            <a:pPr indent="0" lvl="0" marL="0" rtl="0" algn="r">
+            <a:pPr marL="0" lvl="0" indent="0" algn="r" rtl="0">
               <a:spcBef>
                 <a:spcPts val="0"/>
               </a:spcBef>
@@ -2056,9 +2059,8 @@
             </a:pPr>
             <a:fld id="{00000000-1234-1234-1234-123412341234}" type="slidenum">
               <a:rPr lang="en-US"/>
-              <a:t>‹#›</a:t>
             </a:fld>
-            <a:endParaRPr/>
+            <a:endParaRPr lang="en-US"/>
           </a:p>
         </p:txBody>
       </p:sp>
@@ -2071,7 +2073,7 @@
 </file>
 
 <file path=ppt/slideLayouts/slideLayout11.xml><?xml version="1.0" encoding="utf-8"?>
-<p:sldLayout xmlns:a="http://schemas.openxmlformats.org/drawingml/2006/main" xmlns:r="http://schemas.openxmlformats.org/officeDocument/2006/relationships" xmlns:mc="http://schemas.openxmlformats.org/markup-compatibility/2006" xmlns:mv="urn:schemas-microsoft-com:mac:vml" xmlns:p="http://schemas.openxmlformats.org/presentationml/2006/main" xmlns:c="http://schemas.openxmlformats.org/drawingml/2006/chart" xmlns:dgm="http://schemas.openxmlformats.org/drawingml/2006/diagram" xmlns:o="urn:schemas-microsoft-com:office:office" xmlns:v="urn:schemas-microsoft-com:vml" xmlns:pvml="urn:schemas-microsoft-com:office:powerpoint" xmlns:com="http://schemas.openxmlformats.org/drawingml/2006/compatibility" xmlns:p14="http://schemas.microsoft.com/office/powerpoint/2010/main" xmlns:p15="http://schemas.microsoft.com/office/powerpoint/2012/main" xmlns:ahyp="http://schemas.microsoft.com/office/drawing/2018/hyperlinkcolor" matchingName="Blank" type="blank">
+<p:sldLayout xmlns:a="http://schemas.openxmlformats.org/drawingml/2006/main" xmlns:r="http://schemas.openxmlformats.org/officeDocument/2006/relationships" xmlns:p="http://schemas.openxmlformats.org/presentationml/2006/main" type="blank" matchingName="Blank">
   <p:cSld name="BLANK">
     <p:spTree>
       <p:nvGrpSpPr>
@@ -2092,7 +2094,7 @@
           <p:cNvPr id="54" name="Google Shape;54;g395d4a1ce48_0_500"/>
           <p:cNvSpPr txBox="1"/>
           <p:nvPr>
-            <p:ph idx="12" type="sldNum"/>
+            <p:ph type="sldNum" idx="12"/>
           </p:nvPr>
         </p:nvSpPr>
         <p:spPr>
@@ -2105,7 +2107,7 @@
           </a:prstGeom>
         </p:spPr>
         <p:txBody>
-          <a:bodyPr anchorCtr="0" anchor="ctr" bIns="91425" lIns="91425" spcFirstLastPara="1" rIns="91425" wrap="square" tIns="91425">
+          <a:bodyPr spcFirstLastPara="1" wrap="square" lIns="91425" tIns="91425" rIns="91425" bIns="91425" anchor="ctr" anchorCtr="0">
             <a:normAutofit/>
           </a:bodyPr>
           <a:lstStyle>
@@ -2147,7 +2149,7 @@
             </a:lvl9pPr>
           </a:lstStyle>
           <a:p>
-            <a:pPr indent="0" lvl="0" marL="0" rtl="0" algn="r">
+            <a:pPr marL="0" lvl="0" indent="0" algn="r" rtl="0">
               <a:spcBef>
                 <a:spcPts val="0"/>
               </a:spcBef>
@@ -2158,9 +2160,8 @@
             </a:pPr>
             <a:fld id="{00000000-1234-1234-1234-123412341234}" type="slidenum">
               <a:rPr lang="en-US"/>
-              <a:t>‹#›</a:t>
             </a:fld>
-            <a:endParaRPr/>
+            <a:endParaRPr lang="en-US"/>
           </a:p>
         </p:txBody>
       </p:sp>
@@ -2173,13 +2174,14 @@
 </file>
 
 <file path=ppt/slideLayouts/slideLayout2.xml><?xml version="1.0" encoding="utf-8"?>
-<p:sldLayout xmlns:a="http://schemas.openxmlformats.org/drawingml/2006/main" xmlns:r="http://schemas.openxmlformats.org/officeDocument/2006/relationships" xmlns:mc="http://schemas.openxmlformats.org/markup-compatibility/2006" xmlns:mv="urn:schemas-microsoft-com:mac:vml" xmlns:p="http://schemas.openxmlformats.org/presentationml/2006/main" xmlns:c="http://schemas.openxmlformats.org/drawingml/2006/chart" xmlns:dgm="http://schemas.openxmlformats.org/drawingml/2006/diagram" xmlns:o="urn:schemas-microsoft-com:office:office" xmlns:v="urn:schemas-microsoft-com:vml" xmlns:pvml="urn:schemas-microsoft-com:office:powerpoint" xmlns:com="http://schemas.openxmlformats.org/drawingml/2006/compatibility" xmlns:p14="http://schemas.microsoft.com/office/powerpoint/2010/main" xmlns:p15="http://schemas.microsoft.com/office/powerpoint/2012/main" xmlns:ahyp="http://schemas.microsoft.com/office/drawing/2018/hyperlinkcolor" matchingName="Section header" type="secHead">
+<p:sldLayout xmlns:a="http://schemas.openxmlformats.org/drawingml/2006/main" xmlns:r="http://schemas.openxmlformats.org/officeDocument/2006/relationships" xmlns:p="http://schemas.openxmlformats.org/presentationml/2006/main" type="secHead" matchingName="Section header">
   <p:cSld name="SECTION_HEADER">
     <p:bg>
       <p:bgPr>
         <a:solidFill>
           <a:schemeClr val="dk1"/>
         </a:solidFill>
+        <a:effectLst/>
       </p:bgPr>
     </p:bg>
     <p:spTree>
@@ -2211,14 +2213,14 @@
             <a:avLst/>
           </a:prstGeom>
           <a:noFill/>
-          <a:ln cap="flat" cmpd="sng" w="19050">
+          <a:ln w="19050" cap="flat" cmpd="sng">
             <a:solidFill>
               <a:schemeClr val="lt2"/>
             </a:solidFill>
             <a:prstDash val="solid"/>
             <a:round/>
-            <a:headEnd len="sm" w="sm" type="none"/>
-            <a:tailEnd len="sm" w="sm" type="none"/>
+            <a:headEnd type="none" w="sm" len="sm"/>
+            <a:tailEnd type="none" w="sm" len="sm"/>
           </a:ln>
         </p:spPr>
       </p:cxnSp>
@@ -2240,7 +2242,7 @@
           </a:prstGeom>
         </p:spPr>
         <p:txBody>
-          <a:bodyPr anchorCtr="0" anchor="b" bIns="91425" lIns="91425" spcFirstLastPara="1" rIns="91425" wrap="square" tIns="91425">
+          <a:bodyPr spcFirstLastPara="1" wrap="square" lIns="91425" tIns="91425" rIns="91425" bIns="91425" anchor="b" anchorCtr="0">
             <a:normAutofit/>
           </a:bodyPr>
           <a:lstStyle>
@@ -2415,7 +2417,7 @@
           <p:cNvPr id="17" name="Google Shape;17;g395d4a1ce48_0_461"/>
           <p:cNvSpPr txBox="1"/>
           <p:nvPr>
-            <p:ph idx="12" type="sldNum"/>
+            <p:ph type="sldNum" idx="12"/>
           </p:nvPr>
         </p:nvSpPr>
         <p:spPr>
@@ -2428,7 +2430,7 @@
           </a:prstGeom>
         </p:spPr>
         <p:txBody>
-          <a:bodyPr anchorCtr="0" anchor="ctr" bIns="91425" lIns="91425" spcFirstLastPara="1" rIns="91425" wrap="square" tIns="91425">
+          <a:bodyPr spcFirstLastPara="1" wrap="square" lIns="91425" tIns="91425" rIns="91425" bIns="91425" anchor="ctr" anchorCtr="0">
             <a:normAutofit/>
           </a:bodyPr>
           <a:lstStyle>
@@ -2506,7 +2508,7 @@
             </a:lvl9pPr>
           </a:lstStyle>
           <a:p>
-            <a:pPr indent="0" lvl="0" marL="0" rtl="0" algn="r">
+            <a:pPr marL="0" lvl="0" indent="0" algn="r" rtl="0">
               <a:spcBef>
                 <a:spcPts val="0"/>
               </a:spcBef>
@@ -2517,9 +2519,8 @@
             </a:pPr>
             <a:fld id="{00000000-1234-1234-1234-123412341234}" type="slidenum">
               <a:rPr lang="en-US"/>
-              <a:t>‹#›</a:t>
             </a:fld>
-            <a:endParaRPr/>
+            <a:endParaRPr lang="en-US"/>
           </a:p>
         </p:txBody>
       </p:sp>
@@ -2532,7 +2533,7 @@
 </file>
 
 <file path=ppt/slideLayouts/slideLayout3.xml><?xml version="1.0" encoding="utf-8"?>
-<p:sldLayout xmlns:a="http://schemas.openxmlformats.org/drawingml/2006/main" xmlns:r="http://schemas.openxmlformats.org/officeDocument/2006/relationships" xmlns:mc="http://schemas.openxmlformats.org/markup-compatibility/2006" xmlns:mv="urn:schemas-microsoft-com:mac:vml" xmlns:p="http://schemas.openxmlformats.org/presentationml/2006/main" xmlns:c="http://schemas.openxmlformats.org/drawingml/2006/chart" xmlns:dgm="http://schemas.openxmlformats.org/drawingml/2006/diagram" xmlns:o="urn:schemas-microsoft-com:office:office" xmlns:v="urn:schemas-microsoft-com:vml" xmlns:pvml="urn:schemas-microsoft-com:office:powerpoint" xmlns:com="http://schemas.openxmlformats.org/drawingml/2006/compatibility" xmlns:p14="http://schemas.microsoft.com/office/powerpoint/2010/main" xmlns:p15="http://schemas.microsoft.com/office/powerpoint/2012/main" xmlns:ahyp="http://schemas.microsoft.com/office/drawing/2018/hyperlinkcolor" matchingName="Title and body" type="tx">
+<p:sldLayout xmlns:a="http://schemas.openxmlformats.org/drawingml/2006/main" xmlns:r="http://schemas.openxmlformats.org/officeDocument/2006/relationships" xmlns:p="http://schemas.openxmlformats.org/presentationml/2006/main" type="tx" matchingName="Title and body">
   <p:cSld name="TITLE_AND_BODY">
     <p:spTree>
       <p:nvGrpSpPr>
@@ -2570,12 +2571,12 @@
           </a:ln>
         </p:spPr>
         <p:txBody>
-          <a:bodyPr anchorCtr="0" anchor="ctr" bIns="91425" lIns="91425" spcFirstLastPara="1" rIns="91425" wrap="square" tIns="91425">
+          <a:bodyPr spcFirstLastPara="1" wrap="square" lIns="91425" tIns="91425" rIns="91425" bIns="91425" anchor="ctr" anchorCtr="0">
             <a:noAutofit/>
           </a:bodyPr>
           <a:lstStyle/>
           <a:p>
-            <a:pPr indent="0" lvl="0" marL="0" rtl="0" algn="l">
+            <a:pPr marL="0" lvl="0" indent="0" algn="l" rtl="0">
               <a:spcBef>
                 <a:spcPts val="0"/>
               </a:spcBef>
@@ -2584,10 +2585,6 @@
               </a:spcAft>
               <a:buNone/>
             </a:pPr>
-            <a:r>
-              <a:t/>
-            </a:r>
-            <a:endParaRPr/>
           </a:p>
         </p:txBody>
       </p:sp>
@@ -2609,7 +2606,7 @@
           </a:prstGeom>
         </p:spPr>
         <p:txBody>
-          <a:bodyPr anchorCtr="0" anchor="t" bIns="91425" lIns="91425" spcFirstLastPara="1" rIns="91425" wrap="square" tIns="91425">
+          <a:bodyPr spcFirstLastPara="1" wrap="square" lIns="91425" tIns="91425" rIns="91425" bIns="91425" anchor="t" anchorCtr="0">
             <a:normAutofit/>
           </a:bodyPr>
           <a:lstStyle>
@@ -2721,7 +2718,7 @@
           <p:cNvPr id="21" name="Google Shape;21;g395d4a1ce48_0_465"/>
           <p:cNvSpPr txBox="1"/>
           <p:nvPr>
-            <p:ph idx="1" type="body"/>
+            <p:ph type="body" idx="1"/>
           </p:nvPr>
         </p:nvSpPr>
         <p:spPr>
@@ -2734,11 +2731,11 @@
           </a:prstGeom>
         </p:spPr>
         <p:txBody>
-          <a:bodyPr anchorCtr="0" anchor="t" bIns="91425" lIns="91425" spcFirstLastPara="1" rIns="91425" wrap="square" tIns="91425">
+          <a:bodyPr spcFirstLastPara="1" wrap="square" lIns="91425" tIns="91425" rIns="91425" bIns="91425" anchor="t" anchorCtr="0">
             <a:normAutofit/>
           </a:bodyPr>
           <a:lstStyle>
-            <a:lvl1pPr indent="-342900" lvl="0" marL="457200">
+            <a:lvl1pPr marL="457200" lvl="0" indent="-342900">
               <a:spcBef>
                 <a:spcPts val="0"/>
               </a:spcBef>
@@ -2749,7 +2746,7 @@
               <a:buChar char="●"/>
               <a:defRPr/>
             </a:lvl1pPr>
-            <a:lvl2pPr indent="-317500" lvl="1" marL="914400">
+            <a:lvl2pPr marL="914400" lvl="1" indent="-317500">
               <a:spcBef>
                 <a:spcPts val="0"/>
               </a:spcBef>
@@ -2760,7 +2757,7 @@
               <a:buChar char="○"/>
               <a:defRPr/>
             </a:lvl2pPr>
-            <a:lvl3pPr indent="-317500" lvl="2" marL="1371600">
+            <a:lvl3pPr marL="1371600" lvl="2" indent="-317500">
               <a:spcBef>
                 <a:spcPts val="0"/>
               </a:spcBef>
@@ -2771,7 +2768,7 @@
               <a:buChar char="■"/>
               <a:defRPr/>
             </a:lvl3pPr>
-            <a:lvl4pPr indent="-317500" lvl="3" marL="1828800">
+            <a:lvl4pPr marL="1828800" lvl="3" indent="-317500">
               <a:spcBef>
                 <a:spcPts val="0"/>
               </a:spcBef>
@@ -2782,7 +2779,7 @@
               <a:buChar char="●"/>
               <a:defRPr/>
             </a:lvl4pPr>
-            <a:lvl5pPr indent="-317500" lvl="4" marL="2286000">
+            <a:lvl5pPr marL="2286000" lvl="4" indent="-317500">
               <a:spcBef>
                 <a:spcPts val="0"/>
               </a:spcBef>
@@ -2793,7 +2790,7 @@
               <a:buChar char="○"/>
               <a:defRPr/>
             </a:lvl5pPr>
-            <a:lvl6pPr indent="-317500" lvl="5" marL="2743200">
+            <a:lvl6pPr marL="2743200" lvl="5" indent="-317500">
               <a:spcBef>
                 <a:spcPts val="0"/>
               </a:spcBef>
@@ -2804,7 +2801,7 @@
               <a:buChar char="■"/>
               <a:defRPr/>
             </a:lvl6pPr>
-            <a:lvl7pPr indent="-317500" lvl="6" marL="3200400">
+            <a:lvl7pPr marL="3200400" lvl="6" indent="-317500">
               <a:spcBef>
                 <a:spcPts val="0"/>
               </a:spcBef>
@@ -2815,7 +2812,7 @@
               <a:buChar char="●"/>
               <a:defRPr/>
             </a:lvl7pPr>
-            <a:lvl8pPr indent="-317500" lvl="7" marL="3657600">
+            <a:lvl8pPr marL="3657600" lvl="7" indent="-317500">
               <a:spcBef>
                 <a:spcPts val="0"/>
               </a:spcBef>
@@ -2826,7 +2823,7 @@
               <a:buChar char="○"/>
               <a:defRPr/>
             </a:lvl8pPr>
-            <a:lvl9pPr indent="-317500" lvl="8" marL="4114800">
+            <a:lvl9pPr marL="4114800" lvl="8" indent="-317500">
               <a:spcBef>
                 <a:spcPts val="0"/>
               </a:spcBef>
@@ -2846,7 +2843,7 @@
           <p:cNvPr id="22" name="Google Shape;22;g395d4a1ce48_0_465"/>
           <p:cNvSpPr txBox="1"/>
           <p:nvPr>
-            <p:ph idx="12" type="sldNum"/>
+            <p:ph type="sldNum" idx="12"/>
           </p:nvPr>
         </p:nvSpPr>
         <p:spPr>
@@ -2859,7 +2856,7 @@
           </a:prstGeom>
         </p:spPr>
         <p:txBody>
-          <a:bodyPr anchorCtr="0" anchor="ctr" bIns="91425" lIns="91425" spcFirstLastPara="1" rIns="91425" wrap="square" tIns="91425">
+          <a:bodyPr spcFirstLastPara="1" wrap="square" lIns="91425" tIns="91425" rIns="91425" bIns="91425" anchor="ctr" anchorCtr="0">
             <a:normAutofit/>
           </a:bodyPr>
           <a:lstStyle>
@@ -2901,7 +2898,7 @@
             </a:lvl9pPr>
           </a:lstStyle>
           <a:p>
-            <a:pPr indent="0" lvl="0" marL="0" rtl="0" algn="r">
+            <a:pPr marL="0" lvl="0" indent="0" algn="r" rtl="0">
               <a:spcBef>
                 <a:spcPts val="0"/>
               </a:spcBef>
@@ -2912,9 +2909,8 @@
             </a:pPr>
             <a:fld id="{00000000-1234-1234-1234-123412341234}" type="slidenum">
               <a:rPr lang="en-US"/>
-              <a:t>‹#›</a:t>
             </a:fld>
-            <a:endParaRPr/>
+            <a:endParaRPr lang="en-US"/>
           </a:p>
         </p:txBody>
       </p:sp>
@@ -2927,7 +2923,7 @@
 </file>
 
 <file path=ppt/slideLayouts/slideLayout4.xml><?xml version="1.0" encoding="utf-8"?>
-<p:sldLayout xmlns:a="http://schemas.openxmlformats.org/drawingml/2006/main" xmlns:r="http://schemas.openxmlformats.org/officeDocument/2006/relationships" xmlns:mc="http://schemas.openxmlformats.org/markup-compatibility/2006" xmlns:mv="urn:schemas-microsoft-com:mac:vml" xmlns:p="http://schemas.openxmlformats.org/presentationml/2006/main" xmlns:c="http://schemas.openxmlformats.org/drawingml/2006/chart" xmlns:dgm="http://schemas.openxmlformats.org/drawingml/2006/diagram" xmlns:o="urn:schemas-microsoft-com:office:office" xmlns:v="urn:schemas-microsoft-com:vml" xmlns:pvml="urn:schemas-microsoft-com:office:powerpoint" xmlns:com="http://schemas.openxmlformats.org/drawingml/2006/compatibility" xmlns:p14="http://schemas.microsoft.com/office/powerpoint/2010/main" xmlns:p15="http://schemas.microsoft.com/office/powerpoint/2012/main" xmlns:ahyp="http://schemas.microsoft.com/office/drawing/2018/hyperlinkcolor" matchingName="Title and two columns" type="twoColTx">
+<p:sldLayout xmlns:a="http://schemas.openxmlformats.org/drawingml/2006/main" xmlns:r="http://schemas.openxmlformats.org/officeDocument/2006/relationships" xmlns:p="http://schemas.openxmlformats.org/presentationml/2006/main" type="twoColTx" matchingName="Title and two columns">
   <p:cSld name="TITLE_AND_TWO_COLUMNS">
     <p:spTree>
       <p:nvGrpSpPr>
@@ -2961,7 +2957,7 @@
           </a:prstGeom>
         </p:spPr>
         <p:txBody>
-          <a:bodyPr anchorCtr="0" anchor="t" bIns="91425" lIns="91425" spcFirstLastPara="1" rIns="91425" wrap="square" tIns="91425">
+          <a:bodyPr spcFirstLastPara="1" wrap="square" lIns="91425" tIns="91425" rIns="91425" bIns="91425" anchor="t" anchorCtr="0">
             <a:normAutofit/>
           </a:bodyPr>
           <a:lstStyle>
@@ -3073,7 +3069,7 @@
           <p:cNvPr id="25" name="Google Shape;25;g395d4a1ce48_0_470"/>
           <p:cNvSpPr txBox="1"/>
           <p:nvPr>
-            <p:ph idx="1" type="body"/>
+            <p:ph type="body" idx="1"/>
           </p:nvPr>
         </p:nvSpPr>
         <p:spPr>
@@ -3086,11 +3082,11 @@
           </a:prstGeom>
         </p:spPr>
         <p:txBody>
-          <a:bodyPr anchorCtr="0" anchor="t" bIns="91425" lIns="91425" spcFirstLastPara="1" rIns="91425" wrap="square" tIns="91425">
+          <a:bodyPr spcFirstLastPara="1" wrap="square" lIns="91425" tIns="91425" rIns="91425" bIns="91425" anchor="t" anchorCtr="0">
             <a:normAutofit/>
           </a:bodyPr>
           <a:lstStyle>
-            <a:lvl1pPr indent="-317500" lvl="0" marL="457200">
+            <a:lvl1pPr marL="457200" lvl="0" indent="-317500">
               <a:spcBef>
                 <a:spcPts val="0"/>
               </a:spcBef>
@@ -3101,7 +3097,7 @@
               <a:buChar char="●"/>
               <a:defRPr sz="1400"/>
             </a:lvl1pPr>
-            <a:lvl2pPr indent="-304800" lvl="1" marL="914400">
+            <a:lvl2pPr marL="914400" lvl="1" indent="-304800">
               <a:spcBef>
                 <a:spcPts val="0"/>
               </a:spcBef>
@@ -3112,7 +3108,7 @@
               <a:buChar char="○"/>
               <a:defRPr sz="1200"/>
             </a:lvl2pPr>
-            <a:lvl3pPr indent="-304800" lvl="2" marL="1371600">
+            <a:lvl3pPr marL="1371600" lvl="2" indent="-304800">
               <a:spcBef>
                 <a:spcPts val="0"/>
               </a:spcBef>
@@ -3123,7 +3119,7 @@
               <a:buChar char="■"/>
               <a:defRPr sz="1200"/>
             </a:lvl3pPr>
-            <a:lvl4pPr indent="-304800" lvl="3" marL="1828800">
+            <a:lvl4pPr marL="1828800" lvl="3" indent="-304800">
               <a:spcBef>
                 <a:spcPts val="0"/>
               </a:spcBef>
@@ -3134,7 +3130,7 @@
               <a:buChar char="●"/>
               <a:defRPr sz="1200"/>
             </a:lvl4pPr>
-            <a:lvl5pPr indent="-304800" lvl="4" marL="2286000">
+            <a:lvl5pPr marL="2286000" lvl="4" indent="-304800">
               <a:spcBef>
                 <a:spcPts val="0"/>
               </a:spcBef>
@@ -3145,7 +3141,7 @@
               <a:buChar char="○"/>
               <a:defRPr sz="1200"/>
             </a:lvl5pPr>
-            <a:lvl6pPr indent="-304800" lvl="5" marL="2743200">
+            <a:lvl6pPr marL="2743200" lvl="5" indent="-304800">
               <a:spcBef>
                 <a:spcPts val="0"/>
               </a:spcBef>
@@ -3156,7 +3152,7 @@
               <a:buChar char="■"/>
               <a:defRPr sz="1200"/>
             </a:lvl6pPr>
-            <a:lvl7pPr indent="-304800" lvl="6" marL="3200400">
+            <a:lvl7pPr marL="3200400" lvl="6" indent="-304800">
               <a:spcBef>
                 <a:spcPts val="0"/>
               </a:spcBef>
@@ -3167,7 +3163,7 @@
               <a:buChar char="●"/>
               <a:defRPr sz="1200"/>
             </a:lvl7pPr>
-            <a:lvl8pPr indent="-304800" lvl="7" marL="3657600">
+            <a:lvl8pPr marL="3657600" lvl="7" indent="-304800">
               <a:spcBef>
                 <a:spcPts val="0"/>
               </a:spcBef>
@@ -3178,7 +3174,7 @@
               <a:buChar char="○"/>
               <a:defRPr sz="1200"/>
             </a:lvl8pPr>
-            <a:lvl9pPr indent="-304800" lvl="8" marL="4114800">
+            <a:lvl9pPr marL="4114800" lvl="8" indent="-304800">
               <a:spcBef>
                 <a:spcPts val="0"/>
               </a:spcBef>
@@ -3198,7 +3194,7 @@
           <p:cNvPr id="26" name="Google Shape;26;g395d4a1ce48_0_470"/>
           <p:cNvSpPr txBox="1"/>
           <p:nvPr>
-            <p:ph idx="2" type="body"/>
+            <p:ph type="body" idx="2"/>
           </p:nvPr>
         </p:nvSpPr>
         <p:spPr>
@@ -3211,11 +3207,11 @@
           </a:prstGeom>
         </p:spPr>
         <p:txBody>
-          <a:bodyPr anchorCtr="0" anchor="t" bIns="91425" lIns="91425" spcFirstLastPara="1" rIns="91425" wrap="square" tIns="91425">
+          <a:bodyPr spcFirstLastPara="1" wrap="square" lIns="91425" tIns="91425" rIns="91425" bIns="91425" anchor="t" anchorCtr="0">
             <a:normAutofit/>
           </a:bodyPr>
           <a:lstStyle>
-            <a:lvl1pPr indent="-317500" lvl="0" marL="457200">
+            <a:lvl1pPr marL="457200" lvl="0" indent="-317500">
               <a:spcBef>
                 <a:spcPts val="0"/>
               </a:spcBef>
@@ -3226,7 +3222,7 @@
               <a:buChar char="●"/>
               <a:defRPr sz="1400"/>
             </a:lvl1pPr>
-            <a:lvl2pPr indent="-304800" lvl="1" marL="914400">
+            <a:lvl2pPr marL="914400" lvl="1" indent="-304800">
               <a:spcBef>
                 <a:spcPts val="0"/>
               </a:spcBef>
@@ -3237,7 +3233,7 @@
               <a:buChar char="○"/>
               <a:defRPr sz="1200"/>
             </a:lvl2pPr>
-            <a:lvl3pPr indent="-304800" lvl="2" marL="1371600">
+            <a:lvl3pPr marL="1371600" lvl="2" indent="-304800">
               <a:spcBef>
                 <a:spcPts val="0"/>
               </a:spcBef>
@@ -3248,7 +3244,7 @@
               <a:buChar char="■"/>
               <a:defRPr sz="1200"/>
             </a:lvl3pPr>
-            <a:lvl4pPr indent="-304800" lvl="3" marL="1828800">
+            <a:lvl4pPr marL="1828800" lvl="3" indent="-304800">
               <a:spcBef>
                 <a:spcPts val="0"/>
               </a:spcBef>
@@ -3259,7 +3255,7 @@
               <a:buChar char="●"/>
               <a:defRPr sz="1200"/>
             </a:lvl4pPr>
-            <a:lvl5pPr indent="-304800" lvl="4" marL="2286000">
+            <a:lvl5pPr marL="2286000" lvl="4" indent="-304800">
               <a:spcBef>
                 <a:spcPts val="0"/>
               </a:spcBef>
@@ -3270,7 +3266,7 @@
               <a:buChar char="○"/>
               <a:defRPr sz="1200"/>
             </a:lvl5pPr>
-            <a:lvl6pPr indent="-304800" lvl="5" marL="2743200">
+            <a:lvl6pPr marL="2743200" lvl="5" indent="-304800">
               <a:spcBef>
                 <a:spcPts val="0"/>
               </a:spcBef>
@@ -3281,7 +3277,7 @@
               <a:buChar char="■"/>
               <a:defRPr sz="1200"/>
             </a:lvl6pPr>
-            <a:lvl7pPr indent="-304800" lvl="6" marL="3200400">
+            <a:lvl7pPr marL="3200400" lvl="6" indent="-304800">
               <a:spcBef>
                 <a:spcPts val="0"/>
               </a:spcBef>
@@ -3292,7 +3288,7 @@
               <a:buChar char="●"/>
               <a:defRPr sz="1200"/>
             </a:lvl7pPr>
-            <a:lvl8pPr indent="-304800" lvl="7" marL="3657600">
+            <a:lvl8pPr marL="3657600" lvl="7" indent="-304800">
               <a:spcBef>
                 <a:spcPts val="0"/>
               </a:spcBef>
@@ -3303,7 +3299,7 @@
               <a:buChar char="○"/>
               <a:defRPr sz="1200"/>
             </a:lvl8pPr>
-            <a:lvl9pPr indent="-304800" lvl="8" marL="4114800">
+            <a:lvl9pPr marL="4114800" lvl="8" indent="-304800">
               <a:spcBef>
                 <a:spcPts val="0"/>
               </a:spcBef>
@@ -3323,7 +3319,7 @@
           <p:cNvPr id="27" name="Google Shape;27;g395d4a1ce48_0_470"/>
           <p:cNvSpPr txBox="1"/>
           <p:nvPr>
-            <p:ph idx="12" type="sldNum"/>
+            <p:ph type="sldNum" idx="12"/>
           </p:nvPr>
         </p:nvSpPr>
         <p:spPr>
@@ -3336,7 +3332,7 @@
           </a:prstGeom>
         </p:spPr>
         <p:txBody>
-          <a:bodyPr anchorCtr="0" anchor="ctr" bIns="91425" lIns="91425" spcFirstLastPara="1" rIns="91425" wrap="square" tIns="91425">
+          <a:bodyPr spcFirstLastPara="1" wrap="square" lIns="91425" tIns="91425" rIns="91425" bIns="91425" anchor="ctr" anchorCtr="0">
             <a:normAutofit/>
           </a:bodyPr>
           <a:lstStyle>
@@ -3378,7 +3374,7 @@
             </a:lvl9pPr>
           </a:lstStyle>
           <a:p>
-            <a:pPr indent="0" lvl="0" marL="0" rtl="0" algn="r">
+            <a:pPr marL="0" lvl="0" indent="0" algn="r" rtl="0">
               <a:spcBef>
                 <a:spcPts val="0"/>
               </a:spcBef>
@@ -3389,9 +3385,8 @@
             </a:pPr>
             <a:fld id="{00000000-1234-1234-1234-123412341234}" type="slidenum">
               <a:rPr lang="en-US"/>
-              <a:t>‹#›</a:t>
             </a:fld>
-            <a:endParaRPr/>
+            <a:endParaRPr lang="en-US"/>
           </a:p>
         </p:txBody>
       </p:sp>
@@ -3404,7 +3399,7 @@
 </file>
 
 <file path=ppt/slideLayouts/slideLayout5.xml><?xml version="1.0" encoding="utf-8"?>
-<p:sldLayout xmlns:a="http://schemas.openxmlformats.org/drawingml/2006/main" xmlns:r="http://schemas.openxmlformats.org/officeDocument/2006/relationships" xmlns:mc="http://schemas.openxmlformats.org/markup-compatibility/2006" xmlns:mv="urn:schemas-microsoft-com:mac:vml" xmlns:p="http://schemas.openxmlformats.org/presentationml/2006/main" xmlns:c="http://schemas.openxmlformats.org/drawingml/2006/chart" xmlns:dgm="http://schemas.openxmlformats.org/drawingml/2006/diagram" xmlns:o="urn:schemas-microsoft-com:office:office" xmlns:v="urn:schemas-microsoft-com:vml" xmlns:pvml="urn:schemas-microsoft-com:office:powerpoint" xmlns:com="http://schemas.openxmlformats.org/drawingml/2006/compatibility" xmlns:p14="http://schemas.microsoft.com/office/powerpoint/2010/main" xmlns:p15="http://schemas.microsoft.com/office/powerpoint/2012/main" xmlns:ahyp="http://schemas.microsoft.com/office/drawing/2018/hyperlinkcolor" matchingName="Title only" type="titleOnly">
+<p:sldLayout xmlns:a="http://schemas.openxmlformats.org/drawingml/2006/main" xmlns:r="http://schemas.openxmlformats.org/officeDocument/2006/relationships" xmlns:p="http://schemas.openxmlformats.org/presentationml/2006/main" type="titleOnly" matchingName="Title only">
   <p:cSld name="TITLE_ONLY">
     <p:spTree>
       <p:nvGrpSpPr>
@@ -3438,7 +3433,7 @@
           </a:prstGeom>
         </p:spPr>
         <p:txBody>
-          <a:bodyPr anchorCtr="0" anchor="t" bIns="91425" lIns="91425" spcFirstLastPara="1" rIns="91425" wrap="square" tIns="91425">
+          <a:bodyPr spcFirstLastPara="1" wrap="square" lIns="91425" tIns="91425" rIns="91425" bIns="91425" anchor="t" anchorCtr="0">
             <a:normAutofit/>
           </a:bodyPr>
           <a:lstStyle>
@@ -3550,7 +3545,7 @@
           <p:cNvPr id="30" name="Google Shape;30;g395d4a1ce48_0_475"/>
           <p:cNvSpPr txBox="1"/>
           <p:nvPr>
-            <p:ph idx="12" type="sldNum"/>
+            <p:ph type="sldNum" idx="12"/>
           </p:nvPr>
         </p:nvSpPr>
         <p:spPr>
@@ -3563,7 +3558,7 @@
           </a:prstGeom>
         </p:spPr>
         <p:txBody>
-          <a:bodyPr anchorCtr="0" anchor="ctr" bIns="91425" lIns="91425" spcFirstLastPara="1" rIns="91425" wrap="square" tIns="91425">
+          <a:bodyPr spcFirstLastPara="1" wrap="square" lIns="91425" tIns="91425" rIns="91425" bIns="91425" anchor="ctr" anchorCtr="0">
             <a:normAutofit/>
           </a:bodyPr>
           <a:lstStyle>
@@ -3605,7 +3600,7 @@
             </a:lvl9pPr>
           </a:lstStyle>
           <a:p>
-            <a:pPr indent="0" lvl="0" marL="0" rtl="0" algn="r">
+            <a:pPr marL="0" lvl="0" indent="0" algn="r" rtl="0">
               <a:spcBef>
                 <a:spcPts val="0"/>
               </a:spcBef>
@@ -3616,9 +3611,8 @@
             </a:pPr>
             <a:fld id="{00000000-1234-1234-1234-123412341234}" type="slidenum">
               <a:rPr lang="en-US"/>
-              <a:t>‹#›</a:t>
             </a:fld>
-            <a:endParaRPr/>
+            <a:endParaRPr lang="en-US"/>
           </a:p>
         </p:txBody>
       </p:sp>
@@ -3631,7 +3625,7 @@
 </file>
 
 <file path=ppt/slideLayouts/slideLayout6.xml><?xml version="1.0" encoding="utf-8"?>
-<p:sldLayout xmlns:a="http://schemas.openxmlformats.org/drawingml/2006/main" xmlns:r="http://schemas.openxmlformats.org/officeDocument/2006/relationships" xmlns:mc="http://schemas.openxmlformats.org/markup-compatibility/2006" xmlns:mv="urn:schemas-microsoft-com:mac:vml" xmlns:p="http://schemas.openxmlformats.org/presentationml/2006/main" xmlns:c="http://schemas.openxmlformats.org/drawingml/2006/chart" xmlns:dgm="http://schemas.openxmlformats.org/drawingml/2006/diagram" xmlns:o="urn:schemas-microsoft-com:office:office" xmlns:v="urn:schemas-microsoft-com:vml" xmlns:pvml="urn:schemas-microsoft-com:office:powerpoint" xmlns:com="http://schemas.openxmlformats.org/drawingml/2006/compatibility" xmlns:p14="http://schemas.microsoft.com/office/powerpoint/2010/main" xmlns:p15="http://schemas.microsoft.com/office/powerpoint/2012/main" xmlns:ahyp="http://schemas.microsoft.com/office/drawing/2018/hyperlinkcolor" matchingName="One column text">
+<p:sldLayout xmlns:a="http://schemas.openxmlformats.org/drawingml/2006/main" xmlns:r="http://schemas.openxmlformats.org/officeDocument/2006/relationships" xmlns:p="http://schemas.openxmlformats.org/presentationml/2006/main" matchingName="One column text">
   <p:cSld name="ONE_COLUMN_TEXT">
     <p:spTree>
       <p:nvGrpSpPr>
@@ -3665,7 +3659,7 @@
           </a:prstGeom>
         </p:spPr>
         <p:txBody>
-          <a:bodyPr anchorCtr="0" anchor="b" bIns="91425" lIns="91425" spcFirstLastPara="1" rIns="91425" wrap="square" tIns="91425">
+          <a:bodyPr spcFirstLastPara="1" wrap="square" lIns="91425" tIns="91425" rIns="91425" bIns="91425" anchor="b" anchorCtr="0">
             <a:normAutofit/>
           </a:bodyPr>
           <a:lstStyle>
@@ -3777,7 +3771,7 @@
           <p:cNvPr id="33" name="Google Shape;33;g395d4a1ce48_0_478"/>
           <p:cNvSpPr txBox="1"/>
           <p:nvPr>
-            <p:ph idx="1" type="body"/>
+            <p:ph type="body" idx="1"/>
           </p:nvPr>
         </p:nvSpPr>
         <p:spPr>
@@ -3790,11 +3784,11 @@
           </a:prstGeom>
         </p:spPr>
         <p:txBody>
-          <a:bodyPr anchorCtr="0" anchor="t" bIns="91425" lIns="91425" spcFirstLastPara="1" rIns="91425" wrap="square" tIns="91425">
+          <a:bodyPr spcFirstLastPara="1" wrap="square" lIns="91425" tIns="91425" rIns="91425" bIns="91425" anchor="t" anchorCtr="0">
             <a:normAutofit/>
           </a:bodyPr>
           <a:lstStyle>
-            <a:lvl1pPr indent="-304800" lvl="0" marL="457200">
+            <a:lvl1pPr marL="457200" lvl="0" indent="-304800">
               <a:spcBef>
                 <a:spcPts val="0"/>
               </a:spcBef>
@@ -3805,7 +3799,7 @@
               <a:buChar char="●"/>
               <a:defRPr sz="1200"/>
             </a:lvl1pPr>
-            <a:lvl2pPr indent="-304800" lvl="1" marL="914400">
+            <a:lvl2pPr marL="914400" lvl="1" indent="-304800">
               <a:spcBef>
                 <a:spcPts val="0"/>
               </a:spcBef>
@@ -3816,7 +3810,7 @@
               <a:buChar char="○"/>
               <a:defRPr sz="1200"/>
             </a:lvl2pPr>
-            <a:lvl3pPr indent="-304800" lvl="2" marL="1371600">
+            <a:lvl3pPr marL="1371600" lvl="2" indent="-304800">
               <a:spcBef>
                 <a:spcPts val="0"/>
               </a:spcBef>
@@ -3827,7 +3821,7 @@
               <a:buChar char="■"/>
               <a:defRPr sz="1200"/>
             </a:lvl3pPr>
-            <a:lvl4pPr indent="-304800" lvl="3" marL="1828800">
+            <a:lvl4pPr marL="1828800" lvl="3" indent="-304800">
               <a:spcBef>
                 <a:spcPts val="0"/>
               </a:spcBef>
@@ -3838,7 +3832,7 @@
               <a:buChar char="●"/>
               <a:defRPr sz="1200"/>
             </a:lvl4pPr>
-            <a:lvl5pPr indent="-304800" lvl="4" marL="2286000">
+            <a:lvl5pPr marL="2286000" lvl="4" indent="-304800">
               <a:spcBef>
                 <a:spcPts val="0"/>
               </a:spcBef>
@@ -3849,7 +3843,7 @@
               <a:buChar char="○"/>
               <a:defRPr sz="1200"/>
             </a:lvl5pPr>
-            <a:lvl6pPr indent="-304800" lvl="5" marL="2743200">
+            <a:lvl6pPr marL="2743200" lvl="5" indent="-304800">
               <a:spcBef>
                 <a:spcPts val="0"/>
               </a:spcBef>
@@ -3860,7 +3854,7 @@
               <a:buChar char="■"/>
               <a:defRPr sz="1200"/>
             </a:lvl6pPr>
-            <a:lvl7pPr indent="-304800" lvl="6" marL="3200400">
+            <a:lvl7pPr marL="3200400" lvl="6" indent="-304800">
               <a:spcBef>
                 <a:spcPts val="0"/>
               </a:spcBef>
@@ -3871,7 +3865,7 @@
               <a:buChar char="●"/>
               <a:defRPr sz="1200"/>
             </a:lvl7pPr>
-            <a:lvl8pPr indent="-304800" lvl="7" marL="3657600">
+            <a:lvl8pPr marL="3657600" lvl="7" indent="-304800">
               <a:spcBef>
                 <a:spcPts val="0"/>
               </a:spcBef>
@@ -3882,7 +3876,7 @@
               <a:buChar char="○"/>
               <a:defRPr sz="1200"/>
             </a:lvl8pPr>
-            <a:lvl9pPr indent="-304800" lvl="8" marL="4114800">
+            <a:lvl9pPr marL="4114800" lvl="8" indent="-304800">
               <a:spcBef>
                 <a:spcPts val="0"/>
               </a:spcBef>
@@ -3902,7 +3896,7 @@
           <p:cNvPr id="34" name="Google Shape;34;g395d4a1ce48_0_478"/>
           <p:cNvSpPr txBox="1"/>
           <p:nvPr>
-            <p:ph idx="12" type="sldNum"/>
+            <p:ph type="sldNum" idx="12"/>
           </p:nvPr>
         </p:nvSpPr>
         <p:spPr>
@@ -3915,7 +3909,7 @@
           </a:prstGeom>
         </p:spPr>
         <p:txBody>
-          <a:bodyPr anchorCtr="0" anchor="ctr" bIns="91425" lIns="91425" spcFirstLastPara="1" rIns="91425" wrap="square" tIns="91425">
+          <a:bodyPr spcFirstLastPara="1" wrap="square" lIns="91425" tIns="91425" rIns="91425" bIns="91425" anchor="ctr" anchorCtr="0">
             <a:normAutofit/>
           </a:bodyPr>
           <a:lstStyle>
@@ -3957,7 +3951,7 @@
             </a:lvl9pPr>
           </a:lstStyle>
           <a:p>
-            <a:pPr indent="0" lvl="0" marL="0" rtl="0" algn="r">
+            <a:pPr marL="0" lvl="0" indent="0" algn="r" rtl="0">
               <a:spcBef>
                 <a:spcPts val="0"/>
               </a:spcBef>
@@ -3968,9 +3962,8 @@
             </a:pPr>
             <a:fld id="{00000000-1234-1234-1234-123412341234}" type="slidenum">
               <a:rPr lang="en-US"/>
-              <a:t>‹#›</a:t>
             </a:fld>
-            <a:endParaRPr/>
+            <a:endParaRPr lang="en-US"/>
           </a:p>
         </p:txBody>
       </p:sp>
@@ -3983,13 +3976,14 @@
 </file>
 
 <file path=ppt/slideLayouts/slideLayout7.xml><?xml version="1.0" encoding="utf-8"?>
-<p:sldLayout xmlns:a="http://schemas.openxmlformats.org/drawingml/2006/main" xmlns:r="http://schemas.openxmlformats.org/officeDocument/2006/relationships" xmlns:mc="http://schemas.openxmlformats.org/markup-compatibility/2006" xmlns:mv="urn:schemas-microsoft-com:mac:vml" xmlns:p="http://schemas.openxmlformats.org/presentationml/2006/main" xmlns:c="http://schemas.openxmlformats.org/drawingml/2006/chart" xmlns:dgm="http://schemas.openxmlformats.org/drawingml/2006/diagram" xmlns:o="urn:schemas-microsoft-com:office:office" xmlns:v="urn:schemas-microsoft-com:vml" xmlns:pvml="urn:schemas-microsoft-com:office:powerpoint" xmlns:com="http://schemas.openxmlformats.org/drawingml/2006/compatibility" xmlns:p14="http://schemas.microsoft.com/office/powerpoint/2010/main" xmlns:p15="http://schemas.microsoft.com/office/powerpoint/2012/main" xmlns:ahyp="http://schemas.microsoft.com/office/drawing/2018/hyperlinkcolor" matchingName="Main point">
+<p:sldLayout xmlns:a="http://schemas.openxmlformats.org/drawingml/2006/main" xmlns:r="http://schemas.openxmlformats.org/officeDocument/2006/relationships" xmlns:p="http://schemas.openxmlformats.org/presentationml/2006/main" matchingName="Main point">
   <p:cSld name="MAIN_POINT">
     <p:bg>
       <p:bgPr>
         <a:solidFill>
           <a:schemeClr val="lt2"/>
         </a:solidFill>
+        <a:effectLst/>
       </p:bgPr>
     </p:bg>
     <p:spTree>
@@ -4024,7 +4018,7 @@
           </a:prstGeom>
         </p:spPr>
         <p:txBody>
-          <a:bodyPr anchorCtr="0" anchor="ctr" bIns="91425" lIns="91425" spcFirstLastPara="1" rIns="91425" wrap="square" tIns="91425">
+          <a:bodyPr spcFirstLastPara="1" wrap="square" lIns="91425" tIns="91425" rIns="91425" bIns="91425" anchor="ctr" anchorCtr="0">
             <a:normAutofit/>
           </a:bodyPr>
           <a:lstStyle>
@@ -4136,7 +4130,7 @@
           <p:cNvPr id="37" name="Google Shape;37;g395d4a1ce48_0_482"/>
           <p:cNvSpPr txBox="1"/>
           <p:nvPr>
-            <p:ph idx="12" type="sldNum"/>
+            <p:ph type="sldNum" idx="12"/>
           </p:nvPr>
         </p:nvSpPr>
         <p:spPr>
@@ -4149,7 +4143,7 @@
           </a:prstGeom>
         </p:spPr>
         <p:txBody>
-          <a:bodyPr anchorCtr="0" anchor="ctr" bIns="91425" lIns="91425" spcFirstLastPara="1" rIns="91425" wrap="square" tIns="91425">
+          <a:bodyPr spcFirstLastPara="1" wrap="square" lIns="91425" tIns="91425" rIns="91425" bIns="91425" anchor="ctr" anchorCtr="0">
             <a:normAutofit/>
           </a:bodyPr>
           <a:lstStyle>
@@ -4191,7 +4185,7 @@
             </a:lvl9pPr>
           </a:lstStyle>
           <a:p>
-            <a:pPr indent="0" lvl="0" marL="0" rtl="0" algn="r">
+            <a:pPr marL="0" lvl="0" indent="0" algn="r" rtl="0">
               <a:spcBef>
                 <a:spcPts val="0"/>
               </a:spcBef>
@@ -4202,9 +4196,8 @@
             </a:pPr>
             <a:fld id="{00000000-1234-1234-1234-123412341234}" type="slidenum">
               <a:rPr lang="en-US"/>
-              <a:t>‹#›</a:t>
             </a:fld>
-            <a:endParaRPr/>
+            <a:endParaRPr lang="en-US"/>
           </a:p>
         </p:txBody>
       </p:sp>
@@ -4217,7 +4210,7 @@
 </file>
 
 <file path=ppt/slideLayouts/slideLayout8.xml><?xml version="1.0" encoding="utf-8"?>
-<p:sldLayout xmlns:a="http://schemas.openxmlformats.org/drawingml/2006/main" xmlns:r="http://schemas.openxmlformats.org/officeDocument/2006/relationships" xmlns:mc="http://schemas.openxmlformats.org/markup-compatibility/2006" xmlns:mv="urn:schemas-microsoft-com:mac:vml" xmlns:p="http://schemas.openxmlformats.org/presentationml/2006/main" xmlns:c="http://schemas.openxmlformats.org/drawingml/2006/chart" xmlns:dgm="http://schemas.openxmlformats.org/drawingml/2006/diagram" xmlns:o="urn:schemas-microsoft-com:office:office" xmlns:v="urn:schemas-microsoft-com:vml" xmlns:pvml="urn:schemas-microsoft-com:office:powerpoint" xmlns:com="http://schemas.openxmlformats.org/drawingml/2006/compatibility" xmlns:p14="http://schemas.microsoft.com/office/powerpoint/2010/main" xmlns:p15="http://schemas.microsoft.com/office/powerpoint/2012/main" xmlns:ahyp="http://schemas.microsoft.com/office/drawing/2018/hyperlinkcolor" matchingName="Section title and description">
+<p:sldLayout xmlns:a="http://schemas.openxmlformats.org/drawingml/2006/main" xmlns:r="http://schemas.openxmlformats.org/officeDocument/2006/relationships" xmlns:p="http://schemas.openxmlformats.org/presentationml/2006/main" matchingName="Section title and description">
   <p:cSld name="SECTION_TITLE_AND_DESCRIPTION">
     <p:spTree>
       <p:nvGrpSpPr>
@@ -4255,12 +4248,12 @@
           </a:ln>
         </p:spPr>
         <p:txBody>
-          <a:bodyPr anchorCtr="0" anchor="ctr" bIns="91425" lIns="91425" spcFirstLastPara="1" rIns="91425" wrap="square" tIns="91425">
+          <a:bodyPr spcFirstLastPara="1" wrap="square" lIns="91425" tIns="91425" rIns="91425" bIns="91425" anchor="ctr" anchorCtr="0">
             <a:noAutofit/>
           </a:bodyPr>
           <a:lstStyle/>
           <a:p>
-            <a:pPr indent="0" lvl="0" marL="0" rtl="0" algn="l">
+            <a:pPr marL="0" lvl="0" indent="0" algn="l" rtl="0">
               <a:spcBef>
                 <a:spcPts val="0"/>
               </a:spcBef>
@@ -4269,10 +4262,6 @@
               </a:spcAft>
               <a:buNone/>
             </a:pPr>
-            <a:r>
-              <a:t/>
-            </a:r>
-            <a:endParaRPr/>
           </a:p>
         </p:txBody>
       </p:sp>
@@ -4291,14 +4280,14 @@
             <a:avLst/>
           </a:prstGeom>
           <a:noFill/>
-          <a:ln cap="flat" cmpd="sng" w="19050">
+          <a:ln w="19050" cap="flat" cmpd="sng">
             <a:solidFill>
               <a:schemeClr val="lt2"/>
             </a:solidFill>
             <a:prstDash val="solid"/>
             <a:round/>
-            <a:headEnd len="sm" w="sm" type="none"/>
-            <a:tailEnd len="sm" w="sm" type="none"/>
+            <a:headEnd type="none" w="sm" len="sm"/>
+            <a:tailEnd type="none" w="sm" len="sm"/>
           </a:ln>
         </p:spPr>
       </p:cxnSp>
@@ -4320,7 +4309,7 @@
           </a:prstGeom>
         </p:spPr>
         <p:txBody>
-          <a:bodyPr anchorCtr="0" anchor="b" bIns="91425" lIns="91425" spcFirstLastPara="1" rIns="91425" wrap="square" tIns="91425">
+          <a:bodyPr spcFirstLastPara="1" wrap="square" lIns="91425" tIns="91425" rIns="91425" bIns="91425" anchor="b" anchorCtr="0">
             <a:normAutofit/>
           </a:bodyPr>
           <a:lstStyle>
@@ -4432,7 +4421,7 @@
           <p:cNvPr id="42" name="Google Shape;42;g395d4a1ce48_0_485"/>
           <p:cNvSpPr txBox="1"/>
           <p:nvPr>
-            <p:ph idx="1" type="subTitle"/>
+            <p:ph type="subTitle" idx="1"/>
           </p:nvPr>
         </p:nvSpPr>
         <p:spPr>
@@ -4445,7 +4434,7 @@
           </a:prstGeom>
         </p:spPr>
         <p:txBody>
-          <a:bodyPr anchorCtr="0" anchor="t" bIns="91425" lIns="91425" spcFirstLastPara="1" rIns="91425" wrap="square" tIns="91425">
+          <a:bodyPr spcFirstLastPara="1" wrap="square" lIns="91425" tIns="91425" rIns="91425" bIns="91425" anchor="t" anchorCtr="0">
             <a:normAutofit/>
           </a:bodyPr>
           <a:lstStyle>
@@ -4584,7 +4573,7 @@
           <p:cNvPr id="43" name="Google Shape;43;g395d4a1ce48_0_485"/>
           <p:cNvSpPr txBox="1"/>
           <p:nvPr>
-            <p:ph idx="2" type="body"/>
+            <p:ph type="body" idx="2"/>
           </p:nvPr>
         </p:nvSpPr>
         <p:spPr>
@@ -4597,11 +4586,11 @@
           </a:prstGeom>
         </p:spPr>
         <p:txBody>
-          <a:bodyPr anchorCtr="0" anchor="ctr" bIns="91425" lIns="91425" spcFirstLastPara="1" rIns="91425" wrap="square" tIns="91425">
+          <a:bodyPr spcFirstLastPara="1" wrap="square" lIns="91425" tIns="91425" rIns="91425" bIns="91425" anchor="ctr" anchorCtr="0">
             <a:normAutofit/>
           </a:bodyPr>
           <a:lstStyle>
-            <a:lvl1pPr indent="-342900" lvl="0" marL="457200">
+            <a:lvl1pPr marL="457200" lvl="0" indent="-342900">
               <a:spcBef>
                 <a:spcPts val="0"/>
               </a:spcBef>
@@ -4619,7 +4608,7 @@
                 </a:solidFill>
               </a:defRPr>
             </a:lvl1pPr>
-            <a:lvl2pPr indent="-317500" lvl="1" marL="914400">
+            <a:lvl2pPr marL="914400" lvl="1" indent="-317500">
               <a:spcBef>
                 <a:spcPts val="0"/>
               </a:spcBef>
@@ -4637,7 +4626,7 @@
                 </a:solidFill>
               </a:defRPr>
             </a:lvl2pPr>
-            <a:lvl3pPr indent="-317500" lvl="2" marL="1371600">
+            <a:lvl3pPr marL="1371600" lvl="2" indent="-317500">
               <a:spcBef>
                 <a:spcPts val="0"/>
               </a:spcBef>
@@ -4655,7 +4644,7 @@
                 </a:solidFill>
               </a:defRPr>
             </a:lvl3pPr>
-            <a:lvl4pPr indent="-317500" lvl="3" marL="1828800">
+            <a:lvl4pPr marL="1828800" lvl="3" indent="-317500">
               <a:spcBef>
                 <a:spcPts val="0"/>
               </a:spcBef>
@@ -4673,7 +4662,7 @@
                 </a:solidFill>
               </a:defRPr>
             </a:lvl4pPr>
-            <a:lvl5pPr indent="-317500" lvl="4" marL="2286000">
+            <a:lvl5pPr marL="2286000" lvl="4" indent="-317500">
               <a:spcBef>
                 <a:spcPts val="0"/>
               </a:spcBef>
@@ -4691,7 +4680,7 @@
                 </a:solidFill>
               </a:defRPr>
             </a:lvl5pPr>
-            <a:lvl6pPr indent="-317500" lvl="5" marL="2743200">
+            <a:lvl6pPr marL="2743200" lvl="5" indent="-317500">
               <a:spcBef>
                 <a:spcPts val="0"/>
               </a:spcBef>
@@ -4709,7 +4698,7 @@
                 </a:solidFill>
               </a:defRPr>
             </a:lvl6pPr>
-            <a:lvl7pPr indent="-317500" lvl="6" marL="3200400">
+            <a:lvl7pPr marL="3200400" lvl="6" indent="-317500">
               <a:spcBef>
                 <a:spcPts val="0"/>
               </a:spcBef>
@@ -4727,7 +4716,7 @@
                 </a:solidFill>
               </a:defRPr>
             </a:lvl7pPr>
-            <a:lvl8pPr indent="-317500" lvl="7" marL="3657600">
+            <a:lvl8pPr marL="3657600" lvl="7" indent="-317500">
               <a:spcBef>
                 <a:spcPts val="0"/>
               </a:spcBef>
@@ -4745,7 +4734,7 @@
                 </a:solidFill>
               </a:defRPr>
             </a:lvl8pPr>
-            <a:lvl9pPr indent="-317500" lvl="8" marL="4114800">
+            <a:lvl9pPr marL="4114800" lvl="8" indent="-317500">
               <a:spcBef>
                 <a:spcPts val="0"/>
               </a:spcBef>
@@ -4772,7 +4761,7 @@
           <p:cNvPr id="44" name="Google Shape;44;g395d4a1ce48_0_485"/>
           <p:cNvSpPr txBox="1"/>
           <p:nvPr>
-            <p:ph idx="12" type="sldNum"/>
+            <p:ph type="sldNum" idx="12"/>
           </p:nvPr>
         </p:nvSpPr>
         <p:spPr>
@@ -4785,7 +4774,7 @@
           </a:prstGeom>
         </p:spPr>
         <p:txBody>
-          <a:bodyPr anchorCtr="0" anchor="ctr" bIns="91425" lIns="91425" spcFirstLastPara="1" rIns="91425" wrap="square" tIns="91425">
+          <a:bodyPr spcFirstLastPara="1" wrap="square" lIns="91425" tIns="91425" rIns="91425" bIns="91425" anchor="ctr" anchorCtr="0">
             <a:normAutofit/>
           </a:bodyPr>
           <a:lstStyle>
@@ -4863,7 +4852,7 @@
             </a:lvl9pPr>
           </a:lstStyle>
           <a:p>
-            <a:pPr indent="0" lvl="0" marL="0" rtl="0" algn="r">
+            <a:pPr marL="0" lvl="0" indent="0" algn="r" rtl="0">
               <a:spcBef>
                 <a:spcPts val="0"/>
               </a:spcBef>
@@ -4874,9 +4863,8 @@
             </a:pPr>
             <a:fld id="{00000000-1234-1234-1234-123412341234}" type="slidenum">
               <a:rPr lang="en-US"/>
-              <a:t>‹#›</a:t>
             </a:fld>
-            <a:endParaRPr/>
+            <a:endParaRPr lang="en-US"/>
           </a:p>
         </p:txBody>
       </p:sp>
@@ -4889,7 +4877,7 @@
 </file>
 
 <file path=ppt/slideLayouts/slideLayout9.xml><?xml version="1.0" encoding="utf-8"?>
-<p:sldLayout xmlns:a="http://schemas.openxmlformats.org/drawingml/2006/main" xmlns:r="http://schemas.openxmlformats.org/officeDocument/2006/relationships" xmlns:mc="http://schemas.openxmlformats.org/markup-compatibility/2006" xmlns:mv="urn:schemas-microsoft-com:mac:vml" xmlns:p="http://schemas.openxmlformats.org/presentationml/2006/main" xmlns:c="http://schemas.openxmlformats.org/drawingml/2006/chart" xmlns:dgm="http://schemas.openxmlformats.org/drawingml/2006/diagram" xmlns:o="urn:schemas-microsoft-com:office:office" xmlns:v="urn:schemas-microsoft-com:vml" xmlns:pvml="urn:schemas-microsoft-com:office:powerpoint" xmlns:com="http://schemas.openxmlformats.org/drawingml/2006/compatibility" xmlns:p14="http://schemas.microsoft.com/office/powerpoint/2010/main" xmlns:p15="http://schemas.microsoft.com/office/powerpoint/2012/main" xmlns:ahyp="http://schemas.microsoft.com/office/drawing/2018/hyperlinkcolor" matchingName="Caption">
+<p:sldLayout xmlns:a="http://schemas.openxmlformats.org/drawingml/2006/main" xmlns:r="http://schemas.openxmlformats.org/officeDocument/2006/relationships" xmlns:p="http://schemas.openxmlformats.org/presentationml/2006/main" matchingName="Caption">
   <p:cSld name="CAPTION_ONLY">
     <p:spTree>
       <p:nvGrpSpPr>
@@ -4910,7 +4898,7 @@
           <p:cNvPr id="46" name="Google Shape;46;g395d4a1ce48_0_492"/>
           <p:cNvSpPr txBox="1"/>
           <p:nvPr>
-            <p:ph idx="1" type="body"/>
+            <p:ph type="body" idx="1"/>
           </p:nvPr>
         </p:nvSpPr>
         <p:spPr>
@@ -4923,11 +4911,11 @@
           </a:prstGeom>
         </p:spPr>
         <p:txBody>
-          <a:bodyPr anchorCtr="0" anchor="ctr" bIns="91425" lIns="91425" spcFirstLastPara="1" rIns="91425" wrap="square" tIns="91425">
+          <a:bodyPr spcFirstLastPara="1" wrap="square" lIns="91425" tIns="91425" rIns="91425" bIns="91425" anchor="ctr" anchorCtr="0">
             <a:normAutofit/>
           </a:bodyPr>
           <a:lstStyle>
-            <a:lvl1pPr indent="-228600" lvl="0" marL="457200">
+            <a:lvl1pPr marL="457200" lvl="0" indent="-228600">
               <a:lnSpc>
                 <a:spcPct val="100000"/>
               </a:lnSpc>
@@ -4950,7 +4938,7 @@
           <p:cNvPr id="47" name="Google Shape;47;g395d4a1ce48_0_492"/>
           <p:cNvSpPr txBox="1"/>
           <p:nvPr>
-            <p:ph idx="12" type="sldNum"/>
+            <p:ph type="sldNum" idx="12"/>
           </p:nvPr>
         </p:nvSpPr>
         <p:spPr>
@@ -4963,7 +4951,7 @@
           </a:prstGeom>
         </p:spPr>
         <p:txBody>
-          <a:bodyPr anchorCtr="0" anchor="ctr" bIns="91425" lIns="91425" spcFirstLastPara="1" rIns="91425" wrap="square" tIns="91425">
+          <a:bodyPr spcFirstLastPara="1" wrap="square" lIns="91425" tIns="91425" rIns="91425" bIns="91425" anchor="ctr" anchorCtr="0">
             <a:normAutofit/>
           </a:bodyPr>
           <a:lstStyle>
@@ -5005,7 +4993,7 @@
             </a:lvl9pPr>
           </a:lstStyle>
           <a:p>
-            <a:pPr indent="0" lvl="0" marL="0" rtl="0" algn="r">
+            <a:pPr marL="0" lvl="0" indent="0" algn="r" rtl="0">
               <a:spcBef>
                 <a:spcPts val="0"/>
               </a:spcBef>
@@ -5016,9 +5004,8 @@
             </a:pPr>
             <a:fld id="{00000000-1234-1234-1234-123412341234}" type="slidenum">
               <a:rPr lang="en-US"/>
-              <a:t>‹#›</a:t>
             </a:fld>
-            <a:endParaRPr/>
+            <a:endParaRPr lang="en-US"/>
           </a:p>
         </p:txBody>
       </p:sp>
@@ -5031,13 +5018,14 @@
 </file>
 
 <file path=ppt/slideMasters/slideMaster1.xml><?xml version="1.0" encoding="utf-8"?>
-<p:sldMaster xmlns:a="http://schemas.openxmlformats.org/drawingml/2006/main" xmlns:r="http://schemas.openxmlformats.org/officeDocument/2006/relationships" xmlns:mc="http://schemas.openxmlformats.org/markup-compatibility/2006" xmlns:mv="urn:schemas-microsoft-com:mac:vml" xmlns:p="http://schemas.openxmlformats.org/presentationml/2006/main" xmlns:c="http://schemas.openxmlformats.org/drawingml/2006/chart" xmlns:dgm="http://schemas.openxmlformats.org/drawingml/2006/diagram" xmlns:o="urn:schemas-microsoft-com:office:office" xmlns:v="urn:schemas-microsoft-com:vml" xmlns:pvml="urn:schemas-microsoft-com:office:powerpoint" xmlns:com="http://schemas.openxmlformats.org/drawingml/2006/compatibility" xmlns:p14="http://schemas.microsoft.com/office/powerpoint/2010/main" xmlns:p15="http://schemas.microsoft.com/office/powerpoint/2012/main" xmlns:ahyp="http://schemas.microsoft.com/office/drawing/2018/hyperlinkcolor">
-  <p:cSld name="spearmint">
+<p:sldMaster xmlns:a="http://schemas.openxmlformats.org/drawingml/2006/main" xmlns:r="http://schemas.openxmlformats.org/officeDocument/2006/relationships" xmlns:p="http://schemas.openxmlformats.org/presentationml/2006/main">
+  <p:cSld>
     <p:bg>
       <p:bgPr>
         <a:solidFill>
           <a:schemeClr val="lt1"/>
         </a:solidFill>
+        <a:effectLst/>
       </p:bgPr>
     </p:bg>
     <p:spTree>
@@ -5076,7 +5064,7 @@
           </a:ln>
         </p:spPr>
         <p:txBody>
-          <a:bodyPr anchorCtr="0" anchor="t" bIns="91425" lIns="91425" spcFirstLastPara="1" rIns="91425" wrap="square" tIns="91425">
+          <a:bodyPr spcFirstLastPara="1" wrap="square" lIns="91425" tIns="91425" rIns="91425" bIns="91425" anchor="t" anchorCtr="0">
             <a:normAutofit/>
           </a:bodyPr>
           <a:lstStyle>
@@ -5091,16 +5079,16 @@
                 <a:schemeClr val="dk1"/>
               </a:buClr>
               <a:buSzPts val="2800"/>
-              <a:buFont typeface="Proxima Nova"/>
+              <a:buFont typeface="Proxima Nova" panose="02000506030000020004"/>
               <a:buNone/>
               <a:defRPr sz="2800">
                 <a:solidFill>
                   <a:schemeClr val="dk1"/>
                 </a:solidFill>
-                <a:latin typeface="Proxima Nova"/>
-                <a:ea typeface="Proxima Nova"/>
-                <a:cs typeface="Proxima Nova"/>
-                <a:sym typeface="Proxima Nova"/>
+                <a:latin typeface="Proxima Nova" panose="02000506030000020004"/>
+                <a:ea typeface="Proxima Nova" panose="02000506030000020004"/>
+                <a:cs typeface="Proxima Nova" panose="02000506030000020004"/>
+                <a:sym typeface="Proxima Nova" panose="02000506030000020004"/>
               </a:defRPr>
             </a:lvl1pPr>
             <a:lvl2pPr lvl="1">
@@ -5114,16 +5102,16 @@
                 <a:schemeClr val="dk1"/>
               </a:buClr>
               <a:buSzPts val="2800"/>
-              <a:buFont typeface="Proxima Nova"/>
+              <a:buFont typeface="Proxima Nova" panose="02000506030000020004"/>
               <a:buNone/>
               <a:defRPr sz="2800">
                 <a:solidFill>
                   <a:schemeClr val="dk1"/>
                 </a:solidFill>
-                <a:latin typeface="Proxima Nova"/>
-                <a:ea typeface="Proxima Nova"/>
-                <a:cs typeface="Proxima Nova"/>
-                <a:sym typeface="Proxima Nova"/>
+                <a:latin typeface="Proxima Nova" panose="02000506030000020004"/>
+                <a:ea typeface="Proxima Nova" panose="02000506030000020004"/>
+                <a:cs typeface="Proxima Nova" panose="02000506030000020004"/>
+                <a:sym typeface="Proxima Nova" panose="02000506030000020004"/>
               </a:defRPr>
             </a:lvl2pPr>
             <a:lvl3pPr lvl="2">
@@ -5137,16 +5125,16 @@
                 <a:schemeClr val="dk1"/>
               </a:buClr>
               <a:buSzPts val="2800"/>
-              <a:buFont typeface="Proxima Nova"/>
+              <a:buFont typeface="Proxima Nova" panose="02000506030000020004"/>
               <a:buNone/>
               <a:defRPr sz="2800">
                 <a:solidFill>
                   <a:schemeClr val="dk1"/>
                 </a:solidFill>
-                <a:latin typeface="Proxima Nova"/>
-                <a:ea typeface="Proxima Nova"/>
-                <a:cs typeface="Proxima Nova"/>
-                <a:sym typeface="Proxima Nova"/>
+                <a:latin typeface="Proxima Nova" panose="02000506030000020004"/>
+                <a:ea typeface="Proxima Nova" panose="02000506030000020004"/>
+                <a:cs typeface="Proxima Nova" panose="02000506030000020004"/>
+                <a:sym typeface="Proxima Nova" panose="02000506030000020004"/>
               </a:defRPr>
             </a:lvl3pPr>
             <a:lvl4pPr lvl="3">
@@ -5160,16 +5148,16 @@
                 <a:schemeClr val="dk1"/>
               </a:buClr>
               <a:buSzPts val="2800"/>
-              <a:buFont typeface="Proxima Nova"/>
+              <a:buFont typeface="Proxima Nova" panose="02000506030000020004"/>
               <a:buNone/>
               <a:defRPr sz="2800">
                 <a:solidFill>
                   <a:schemeClr val="dk1"/>
                 </a:solidFill>
-                <a:latin typeface="Proxima Nova"/>
-                <a:ea typeface="Proxima Nova"/>
-                <a:cs typeface="Proxima Nova"/>
-                <a:sym typeface="Proxima Nova"/>
+                <a:latin typeface="Proxima Nova" panose="02000506030000020004"/>
+                <a:ea typeface="Proxima Nova" panose="02000506030000020004"/>
+                <a:cs typeface="Proxima Nova" panose="02000506030000020004"/>
+                <a:sym typeface="Proxima Nova" panose="02000506030000020004"/>
               </a:defRPr>
             </a:lvl4pPr>
             <a:lvl5pPr lvl="4">
@@ -5183,16 +5171,16 @@
                 <a:schemeClr val="dk1"/>
               </a:buClr>
               <a:buSzPts val="2800"/>
-              <a:buFont typeface="Proxima Nova"/>
+              <a:buFont typeface="Proxima Nova" panose="02000506030000020004"/>
               <a:buNone/>
               <a:defRPr sz="2800">
                 <a:solidFill>
                   <a:schemeClr val="dk1"/>
                 </a:solidFill>
-                <a:latin typeface="Proxima Nova"/>
-                <a:ea typeface="Proxima Nova"/>
-                <a:cs typeface="Proxima Nova"/>
-                <a:sym typeface="Proxima Nova"/>
+                <a:latin typeface="Proxima Nova" panose="02000506030000020004"/>
+                <a:ea typeface="Proxima Nova" panose="02000506030000020004"/>
+                <a:cs typeface="Proxima Nova" panose="02000506030000020004"/>
+                <a:sym typeface="Proxima Nova" panose="02000506030000020004"/>
               </a:defRPr>
             </a:lvl5pPr>
             <a:lvl6pPr lvl="5">
@@ -5206,16 +5194,16 @@
                 <a:schemeClr val="dk1"/>
               </a:buClr>
               <a:buSzPts val="2800"/>
-              <a:buFont typeface="Proxima Nova"/>
+              <a:buFont typeface="Proxima Nova" panose="02000506030000020004"/>
               <a:buNone/>
               <a:defRPr sz="2800">
                 <a:solidFill>
                   <a:schemeClr val="dk1"/>
                 </a:solidFill>
-                <a:latin typeface="Proxima Nova"/>
-                <a:ea typeface="Proxima Nova"/>
-                <a:cs typeface="Proxima Nova"/>
-                <a:sym typeface="Proxima Nova"/>
+                <a:latin typeface="Proxima Nova" panose="02000506030000020004"/>
+                <a:ea typeface="Proxima Nova" panose="02000506030000020004"/>
+                <a:cs typeface="Proxima Nova" panose="02000506030000020004"/>
+                <a:sym typeface="Proxima Nova" panose="02000506030000020004"/>
               </a:defRPr>
             </a:lvl6pPr>
             <a:lvl7pPr lvl="6">
@@ -5229,16 +5217,16 @@
                 <a:schemeClr val="dk1"/>
               </a:buClr>
               <a:buSzPts val="2800"/>
-              <a:buFont typeface="Proxima Nova"/>
+              <a:buFont typeface="Proxima Nova" panose="02000506030000020004"/>
               <a:buNone/>
               <a:defRPr sz="2800">
                 <a:solidFill>
                   <a:schemeClr val="dk1"/>
                 </a:solidFill>
-                <a:latin typeface="Proxima Nova"/>
-                <a:ea typeface="Proxima Nova"/>
-                <a:cs typeface="Proxima Nova"/>
-                <a:sym typeface="Proxima Nova"/>
+                <a:latin typeface="Proxima Nova" panose="02000506030000020004"/>
+                <a:ea typeface="Proxima Nova" panose="02000506030000020004"/>
+                <a:cs typeface="Proxima Nova" panose="02000506030000020004"/>
+                <a:sym typeface="Proxima Nova" panose="02000506030000020004"/>
               </a:defRPr>
             </a:lvl7pPr>
             <a:lvl8pPr lvl="7">
@@ -5252,16 +5240,16 @@
                 <a:schemeClr val="dk1"/>
               </a:buClr>
               <a:buSzPts val="2800"/>
-              <a:buFont typeface="Proxima Nova"/>
+              <a:buFont typeface="Proxima Nova" panose="02000506030000020004"/>
               <a:buNone/>
               <a:defRPr sz="2800">
                 <a:solidFill>
                   <a:schemeClr val="dk1"/>
                 </a:solidFill>
-                <a:latin typeface="Proxima Nova"/>
-                <a:ea typeface="Proxima Nova"/>
-                <a:cs typeface="Proxima Nova"/>
-                <a:sym typeface="Proxima Nova"/>
+                <a:latin typeface="Proxima Nova" panose="02000506030000020004"/>
+                <a:ea typeface="Proxima Nova" panose="02000506030000020004"/>
+                <a:cs typeface="Proxima Nova" panose="02000506030000020004"/>
+                <a:sym typeface="Proxima Nova" panose="02000506030000020004"/>
               </a:defRPr>
             </a:lvl8pPr>
             <a:lvl9pPr lvl="8">
@@ -5275,16 +5263,16 @@
                 <a:schemeClr val="dk1"/>
               </a:buClr>
               <a:buSzPts val="2800"/>
-              <a:buFont typeface="Proxima Nova"/>
+              <a:buFont typeface="Proxima Nova" panose="02000506030000020004"/>
               <a:buNone/>
               <a:defRPr sz="2800">
                 <a:solidFill>
                   <a:schemeClr val="dk1"/>
                 </a:solidFill>
-                <a:latin typeface="Proxima Nova"/>
-                <a:ea typeface="Proxima Nova"/>
-                <a:cs typeface="Proxima Nova"/>
-                <a:sym typeface="Proxima Nova"/>
+                <a:latin typeface="Proxima Nova" panose="02000506030000020004"/>
+                <a:ea typeface="Proxima Nova" panose="02000506030000020004"/>
+                <a:cs typeface="Proxima Nova" panose="02000506030000020004"/>
+                <a:sym typeface="Proxima Nova" panose="02000506030000020004"/>
               </a:defRPr>
             </a:lvl9pPr>
           </a:lstStyle>
@@ -5296,7 +5284,7 @@
           <p:cNvPr id="7" name="Google Shape;7;g395d4a1ce48_0_452"/>
           <p:cNvSpPr txBox="1"/>
           <p:nvPr>
-            <p:ph idx="1" type="body"/>
+            <p:ph type="body" idx="1"/>
           </p:nvPr>
         </p:nvSpPr>
         <p:spPr>
@@ -5313,11 +5301,11 @@
           </a:ln>
         </p:spPr>
         <p:txBody>
-          <a:bodyPr anchorCtr="0" anchor="t" bIns="91425" lIns="91425" spcFirstLastPara="1" rIns="91425" wrap="square" tIns="91425">
+          <a:bodyPr spcFirstLastPara="1" wrap="square" lIns="91425" tIns="91425" rIns="91425" bIns="91425" anchor="t" anchorCtr="0">
             <a:normAutofit/>
           </a:bodyPr>
           <a:lstStyle>
-            <a:lvl1pPr indent="-342900" lvl="0" marL="457200">
+            <a:lvl1pPr marL="457200" lvl="0" indent="-342900">
               <a:lnSpc>
                 <a:spcPct val="115000"/>
               </a:lnSpc>
@@ -5331,19 +5319,19 @@
                 <a:schemeClr val="accent3"/>
               </a:buClr>
               <a:buSzPts val="1800"/>
-              <a:buFont typeface="Proxima Nova"/>
+              <a:buFont typeface="Proxima Nova" panose="02000506030000020004"/>
               <a:buChar char="●"/>
               <a:defRPr sz="1800">
                 <a:solidFill>
                   <a:schemeClr val="accent3"/>
                 </a:solidFill>
-                <a:latin typeface="Proxima Nova"/>
-                <a:ea typeface="Proxima Nova"/>
-                <a:cs typeface="Proxima Nova"/>
-                <a:sym typeface="Proxima Nova"/>
+                <a:latin typeface="Proxima Nova" panose="02000506030000020004"/>
+                <a:ea typeface="Proxima Nova" panose="02000506030000020004"/>
+                <a:cs typeface="Proxima Nova" panose="02000506030000020004"/>
+                <a:sym typeface="Proxima Nova" panose="02000506030000020004"/>
               </a:defRPr>
             </a:lvl1pPr>
-            <a:lvl2pPr indent="-317500" lvl="1" marL="914400">
+            <a:lvl2pPr marL="914400" lvl="1" indent="-317500">
               <a:lnSpc>
                 <a:spcPct val="115000"/>
               </a:lnSpc>
@@ -5357,19 +5345,19 @@
                 <a:schemeClr val="accent3"/>
               </a:buClr>
               <a:buSzPts val="1400"/>
-              <a:buFont typeface="Proxima Nova"/>
+              <a:buFont typeface="Proxima Nova" panose="02000506030000020004"/>
               <a:buChar char="○"/>
               <a:defRPr>
                 <a:solidFill>
                   <a:schemeClr val="accent3"/>
                 </a:solidFill>
-                <a:latin typeface="Proxima Nova"/>
-                <a:ea typeface="Proxima Nova"/>
-                <a:cs typeface="Proxima Nova"/>
-                <a:sym typeface="Proxima Nova"/>
+                <a:latin typeface="Proxima Nova" panose="02000506030000020004"/>
+                <a:ea typeface="Proxima Nova" panose="02000506030000020004"/>
+                <a:cs typeface="Proxima Nova" panose="02000506030000020004"/>
+                <a:sym typeface="Proxima Nova" panose="02000506030000020004"/>
               </a:defRPr>
             </a:lvl2pPr>
-            <a:lvl3pPr indent="-317500" lvl="2" marL="1371600">
+            <a:lvl3pPr marL="1371600" lvl="2" indent="-317500">
               <a:lnSpc>
                 <a:spcPct val="115000"/>
               </a:lnSpc>
@@ -5383,19 +5371,19 @@
                 <a:schemeClr val="accent3"/>
               </a:buClr>
               <a:buSzPts val="1400"/>
-              <a:buFont typeface="Proxima Nova"/>
+              <a:buFont typeface="Proxima Nova" panose="02000506030000020004"/>
               <a:buChar char="■"/>
               <a:defRPr>
                 <a:solidFill>
                   <a:schemeClr val="accent3"/>
                 </a:solidFill>
-                <a:latin typeface="Proxima Nova"/>
-                <a:ea typeface="Proxima Nova"/>
-                <a:cs typeface="Proxima Nova"/>
-                <a:sym typeface="Proxima Nova"/>
+                <a:latin typeface="Proxima Nova" panose="02000506030000020004"/>
+                <a:ea typeface="Proxima Nova" panose="02000506030000020004"/>
+                <a:cs typeface="Proxima Nova" panose="02000506030000020004"/>
+                <a:sym typeface="Proxima Nova" panose="02000506030000020004"/>
               </a:defRPr>
             </a:lvl3pPr>
-            <a:lvl4pPr indent="-317500" lvl="3" marL="1828800">
+            <a:lvl4pPr marL="1828800" lvl="3" indent="-317500">
               <a:lnSpc>
                 <a:spcPct val="115000"/>
               </a:lnSpc>
@@ -5409,19 +5397,19 @@
                 <a:schemeClr val="accent3"/>
               </a:buClr>
               <a:buSzPts val="1400"/>
-              <a:buFont typeface="Proxima Nova"/>
+              <a:buFont typeface="Proxima Nova" panose="02000506030000020004"/>
               <a:buChar char="●"/>
               <a:defRPr>
                 <a:solidFill>
                   <a:schemeClr val="accent3"/>
                 </a:solidFill>
-                <a:latin typeface="Proxima Nova"/>
-                <a:ea typeface="Proxima Nova"/>
-                <a:cs typeface="Proxima Nova"/>
-                <a:sym typeface="Proxima Nova"/>
+                <a:latin typeface="Proxima Nova" panose="02000506030000020004"/>
+                <a:ea typeface="Proxima Nova" panose="02000506030000020004"/>
+                <a:cs typeface="Proxima Nova" panose="02000506030000020004"/>
+                <a:sym typeface="Proxima Nova" panose="02000506030000020004"/>
               </a:defRPr>
             </a:lvl4pPr>
-            <a:lvl5pPr indent="-317500" lvl="4" marL="2286000">
+            <a:lvl5pPr marL="2286000" lvl="4" indent="-317500">
               <a:lnSpc>
                 <a:spcPct val="115000"/>
               </a:lnSpc>
@@ -5435,19 +5423,19 @@
                 <a:schemeClr val="accent3"/>
               </a:buClr>
               <a:buSzPts val="1400"/>
-              <a:buFont typeface="Proxima Nova"/>
+              <a:buFont typeface="Proxima Nova" panose="02000506030000020004"/>
               <a:buChar char="○"/>
               <a:defRPr>
                 <a:solidFill>
                   <a:schemeClr val="accent3"/>
                 </a:solidFill>
-                <a:latin typeface="Proxima Nova"/>
-                <a:ea typeface="Proxima Nova"/>
-                <a:cs typeface="Proxima Nova"/>
-                <a:sym typeface="Proxima Nova"/>
+                <a:latin typeface="Proxima Nova" panose="02000506030000020004"/>
+                <a:ea typeface="Proxima Nova" panose="02000506030000020004"/>
+                <a:cs typeface="Proxima Nova" panose="02000506030000020004"/>
+                <a:sym typeface="Proxima Nova" panose="02000506030000020004"/>
               </a:defRPr>
             </a:lvl5pPr>
-            <a:lvl6pPr indent="-317500" lvl="5" marL="2743200">
+            <a:lvl6pPr marL="2743200" lvl="5" indent="-317500">
               <a:lnSpc>
                 <a:spcPct val="115000"/>
               </a:lnSpc>
@@ -5461,19 +5449,19 @@
                 <a:schemeClr val="accent3"/>
               </a:buClr>
               <a:buSzPts val="1400"/>
-              <a:buFont typeface="Proxima Nova"/>
+              <a:buFont typeface="Proxima Nova" panose="02000506030000020004"/>
               <a:buChar char="■"/>
               <a:defRPr>
                 <a:solidFill>
                   <a:schemeClr val="accent3"/>
                 </a:solidFill>
-                <a:latin typeface="Proxima Nova"/>
-                <a:ea typeface="Proxima Nova"/>
-                <a:cs typeface="Proxima Nova"/>
-                <a:sym typeface="Proxima Nova"/>
+                <a:latin typeface="Proxima Nova" panose="02000506030000020004"/>
+                <a:ea typeface="Proxima Nova" panose="02000506030000020004"/>
+                <a:cs typeface="Proxima Nova" panose="02000506030000020004"/>
+                <a:sym typeface="Proxima Nova" panose="02000506030000020004"/>
               </a:defRPr>
             </a:lvl6pPr>
-            <a:lvl7pPr indent="-317500" lvl="6" marL="3200400">
+            <a:lvl7pPr marL="3200400" lvl="6" indent="-317500">
               <a:lnSpc>
                 <a:spcPct val="115000"/>
               </a:lnSpc>
@@ -5487,19 +5475,19 @@
                 <a:schemeClr val="accent3"/>
               </a:buClr>
               <a:buSzPts val="1400"/>
-              <a:buFont typeface="Proxima Nova"/>
+              <a:buFont typeface="Proxima Nova" panose="02000506030000020004"/>
               <a:buChar char="●"/>
               <a:defRPr>
                 <a:solidFill>
                   <a:schemeClr val="accent3"/>
                 </a:solidFill>
-                <a:latin typeface="Proxima Nova"/>
-                <a:ea typeface="Proxima Nova"/>
-                <a:cs typeface="Proxima Nova"/>
-                <a:sym typeface="Proxima Nova"/>
+                <a:latin typeface="Proxima Nova" panose="02000506030000020004"/>
+                <a:ea typeface="Proxima Nova" panose="02000506030000020004"/>
+                <a:cs typeface="Proxima Nova" panose="02000506030000020004"/>
+                <a:sym typeface="Proxima Nova" panose="02000506030000020004"/>
               </a:defRPr>
             </a:lvl7pPr>
-            <a:lvl8pPr indent="-317500" lvl="7" marL="3657600">
+            <a:lvl8pPr marL="3657600" lvl="7" indent="-317500">
               <a:lnSpc>
                 <a:spcPct val="115000"/>
               </a:lnSpc>
@@ -5513,19 +5501,19 @@
                 <a:schemeClr val="accent3"/>
               </a:buClr>
               <a:buSzPts val="1400"/>
-              <a:buFont typeface="Proxima Nova"/>
+              <a:buFont typeface="Proxima Nova" panose="02000506030000020004"/>
               <a:buChar char="○"/>
               <a:defRPr>
                 <a:solidFill>
                   <a:schemeClr val="accent3"/>
                 </a:solidFill>
-                <a:latin typeface="Proxima Nova"/>
-                <a:ea typeface="Proxima Nova"/>
-                <a:cs typeface="Proxima Nova"/>
-                <a:sym typeface="Proxima Nova"/>
+                <a:latin typeface="Proxima Nova" panose="02000506030000020004"/>
+                <a:ea typeface="Proxima Nova" panose="02000506030000020004"/>
+                <a:cs typeface="Proxima Nova" panose="02000506030000020004"/>
+                <a:sym typeface="Proxima Nova" panose="02000506030000020004"/>
               </a:defRPr>
             </a:lvl8pPr>
-            <a:lvl9pPr indent="-317500" lvl="8" marL="4114800">
+            <a:lvl9pPr marL="4114800" lvl="8" indent="-317500">
               <a:lnSpc>
                 <a:spcPct val="115000"/>
               </a:lnSpc>
@@ -5539,16 +5527,16 @@
                 <a:schemeClr val="accent3"/>
               </a:buClr>
               <a:buSzPts val="1400"/>
-              <a:buFont typeface="Proxima Nova"/>
+              <a:buFont typeface="Proxima Nova" panose="02000506030000020004"/>
               <a:buChar char="■"/>
               <a:defRPr>
                 <a:solidFill>
                   <a:schemeClr val="accent3"/>
                 </a:solidFill>
-                <a:latin typeface="Proxima Nova"/>
-                <a:ea typeface="Proxima Nova"/>
-                <a:cs typeface="Proxima Nova"/>
-                <a:sym typeface="Proxima Nova"/>
+                <a:latin typeface="Proxima Nova" panose="02000506030000020004"/>
+                <a:ea typeface="Proxima Nova" panose="02000506030000020004"/>
+                <a:cs typeface="Proxima Nova" panose="02000506030000020004"/>
+                <a:sym typeface="Proxima Nova" panose="02000506030000020004"/>
               </a:defRPr>
             </a:lvl9pPr>
           </a:lstStyle>
@@ -5560,7 +5548,7 @@
           <p:cNvPr id="8" name="Google Shape;8;g395d4a1ce48_0_452"/>
           <p:cNvSpPr txBox="1"/>
           <p:nvPr>
-            <p:ph idx="12" type="sldNum"/>
+            <p:ph type="sldNum" idx="12"/>
           </p:nvPr>
         </p:nvSpPr>
         <p:spPr>
@@ -5577,7 +5565,7 @@
           </a:ln>
         </p:spPr>
         <p:txBody>
-          <a:bodyPr anchorCtr="0" anchor="ctr" bIns="91425" lIns="91425" spcFirstLastPara="1" rIns="91425" wrap="square" tIns="91425">
+          <a:bodyPr spcFirstLastPara="1" wrap="square" lIns="91425" tIns="91425" rIns="91425" bIns="91425" anchor="ctr" anchorCtr="0">
             <a:normAutofit/>
           </a:bodyPr>
           <a:lstStyle>
@@ -5587,10 +5575,10 @@
                 <a:solidFill>
                   <a:schemeClr val="dk1"/>
                 </a:solidFill>
-                <a:latin typeface="Proxima Nova"/>
-                <a:ea typeface="Proxima Nova"/>
-                <a:cs typeface="Proxima Nova"/>
-                <a:sym typeface="Proxima Nova"/>
+                <a:latin typeface="Proxima Nova" panose="02000506030000020004"/>
+                <a:ea typeface="Proxima Nova" panose="02000506030000020004"/>
+                <a:cs typeface="Proxima Nova" panose="02000506030000020004"/>
+                <a:sym typeface="Proxima Nova" panose="02000506030000020004"/>
               </a:defRPr>
             </a:lvl1pPr>
             <a:lvl2pPr lvl="1" algn="r">
@@ -5599,10 +5587,10 @@
                 <a:solidFill>
                   <a:schemeClr val="dk1"/>
                 </a:solidFill>
-                <a:latin typeface="Proxima Nova"/>
-                <a:ea typeface="Proxima Nova"/>
-                <a:cs typeface="Proxima Nova"/>
-                <a:sym typeface="Proxima Nova"/>
+                <a:latin typeface="Proxima Nova" panose="02000506030000020004"/>
+                <a:ea typeface="Proxima Nova" panose="02000506030000020004"/>
+                <a:cs typeface="Proxima Nova" panose="02000506030000020004"/>
+                <a:sym typeface="Proxima Nova" panose="02000506030000020004"/>
               </a:defRPr>
             </a:lvl2pPr>
             <a:lvl3pPr lvl="2" algn="r">
@@ -5611,10 +5599,10 @@
                 <a:solidFill>
                   <a:schemeClr val="dk1"/>
                 </a:solidFill>
-                <a:latin typeface="Proxima Nova"/>
-                <a:ea typeface="Proxima Nova"/>
-                <a:cs typeface="Proxima Nova"/>
-                <a:sym typeface="Proxima Nova"/>
+                <a:latin typeface="Proxima Nova" panose="02000506030000020004"/>
+                <a:ea typeface="Proxima Nova" panose="02000506030000020004"/>
+                <a:cs typeface="Proxima Nova" panose="02000506030000020004"/>
+                <a:sym typeface="Proxima Nova" panose="02000506030000020004"/>
               </a:defRPr>
             </a:lvl3pPr>
             <a:lvl4pPr lvl="3" algn="r">
@@ -5623,10 +5611,10 @@
                 <a:solidFill>
                   <a:schemeClr val="dk1"/>
                 </a:solidFill>
-                <a:latin typeface="Proxima Nova"/>
-                <a:ea typeface="Proxima Nova"/>
-                <a:cs typeface="Proxima Nova"/>
-                <a:sym typeface="Proxima Nova"/>
+                <a:latin typeface="Proxima Nova" panose="02000506030000020004"/>
+                <a:ea typeface="Proxima Nova" panose="02000506030000020004"/>
+                <a:cs typeface="Proxima Nova" panose="02000506030000020004"/>
+                <a:sym typeface="Proxima Nova" panose="02000506030000020004"/>
               </a:defRPr>
             </a:lvl4pPr>
             <a:lvl5pPr lvl="4" algn="r">
@@ -5635,10 +5623,10 @@
                 <a:solidFill>
                   <a:schemeClr val="dk1"/>
                 </a:solidFill>
-                <a:latin typeface="Proxima Nova"/>
-                <a:ea typeface="Proxima Nova"/>
-                <a:cs typeface="Proxima Nova"/>
-                <a:sym typeface="Proxima Nova"/>
+                <a:latin typeface="Proxima Nova" panose="02000506030000020004"/>
+                <a:ea typeface="Proxima Nova" panose="02000506030000020004"/>
+                <a:cs typeface="Proxima Nova" panose="02000506030000020004"/>
+                <a:sym typeface="Proxima Nova" panose="02000506030000020004"/>
               </a:defRPr>
             </a:lvl5pPr>
             <a:lvl6pPr lvl="5" algn="r">
@@ -5647,10 +5635,10 @@
                 <a:solidFill>
                   <a:schemeClr val="dk1"/>
                 </a:solidFill>
-                <a:latin typeface="Proxima Nova"/>
-                <a:ea typeface="Proxima Nova"/>
-                <a:cs typeface="Proxima Nova"/>
-                <a:sym typeface="Proxima Nova"/>
+                <a:latin typeface="Proxima Nova" panose="02000506030000020004"/>
+                <a:ea typeface="Proxima Nova" panose="02000506030000020004"/>
+                <a:cs typeface="Proxima Nova" panose="02000506030000020004"/>
+                <a:sym typeface="Proxima Nova" panose="02000506030000020004"/>
               </a:defRPr>
             </a:lvl6pPr>
             <a:lvl7pPr lvl="6" algn="r">
@@ -5659,10 +5647,10 @@
                 <a:solidFill>
                   <a:schemeClr val="dk1"/>
                 </a:solidFill>
-                <a:latin typeface="Proxima Nova"/>
-                <a:ea typeface="Proxima Nova"/>
-                <a:cs typeface="Proxima Nova"/>
-                <a:sym typeface="Proxima Nova"/>
+                <a:latin typeface="Proxima Nova" panose="02000506030000020004"/>
+                <a:ea typeface="Proxima Nova" panose="02000506030000020004"/>
+                <a:cs typeface="Proxima Nova" panose="02000506030000020004"/>
+                <a:sym typeface="Proxima Nova" panose="02000506030000020004"/>
               </a:defRPr>
             </a:lvl7pPr>
             <a:lvl8pPr lvl="7" algn="r">
@@ -5671,10 +5659,10 @@
                 <a:solidFill>
                   <a:schemeClr val="dk1"/>
                 </a:solidFill>
-                <a:latin typeface="Proxima Nova"/>
-                <a:ea typeface="Proxima Nova"/>
-                <a:cs typeface="Proxima Nova"/>
-                <a:sym typeface="Proxima Nova"/>
+                <a:latin typeface="Proxima Nova" panose="02000506030000020004"/>
+                <a:ea typeface="Proxima Nova" panose="02000506030000020004"/>
+                <a:cs typeface="Proxima Nova" panose="02000506030000020004"/>
+                <a:sym typeface="Proxima Nova" panose="02000506030000020004"/>
               </a:defRPr>
             </a:lvl8pPr>
             <a:lvl9pPr lvl="8" algn="r">
@@ -5683,15 +5671,15 @@
                 <a:solidFill>
                   <a:schemeClr val="dk1"/>
                 </a:solidFill>
-                <a:latin typeface="Proxima Nova"/>
-                <a:ea typeface="Proxima Nova"/>
-                <a:cs typeface="Proxima Nova"/>
-                <a:sym typeface="Proxima Nova"/>
+                <a:latin typeface="Proxima Nova" panose="02000506030000020004"/>
+                <a:ea typeface="Proxima Nova" panose="02000506030000020004"/>
+                <a:cs typeface="Proxima Nova" panose="02000506030000020004"/>
+                <a:sym typeface="Proxima Nova" panose="02000506030000020004"/>
               </a:defRPr>
             </a:lvl9pPr>
           </a:lstStyle>
           <a:p>
-            <a:pPr indent="0" lvl="0" marL="0" rtl="0" algn="r">
+            <a:pPr marL="0" lvl="0" indent="0" algn="r" rtl="0">
               <a:spcBef>
                 <a:spcPts val="0"/>
               </a:spcBef>
@@ -5702,15 +5690,14 @@
             </a:pPr>
             <a:fld id="{00000000-1234-1234-1234-123412341234}" type="slidenum">
               <a:rPr lang="en-US"/>
-              <a:t>‹#›</a:t>
             </a:fld>
-            <a:endParaRPr/>
+            <a:endParaRPr lang="en-US"/>
           </a:p>
         </p:txBody>
       </p:sp>
     </p:spTree>
   </p:cSld>
-  <p:clrMap accent1="accent1" accent2="accent2" accent3="accent3" accent4="accent4" accent5="accent5" accent6="accent6" bg1="lt1" bg2="dk2" tx1="dk1" tx2="lt2" folHlink="folHlink" hlink="hlink"/>
+  <p:clrMap bg1="lt1" tx1="dk1" bg2="dk2" tx2="lt2" accent1="accent1" accent2="accent2" accent3="accent3" accent4="accent4" accent5="accent5" accent6="accent6" hlink="hlink" folHlink="folHlink"/>
   <p:sldLayoutIdLst>
     <p:sldLayoutId id="2147483649" r:id="rId1"/>
     <p:sldLayoutId id="2147483650" r:id="rId2"/>
@@ -5724,10 +5711,10 @@
     <p:sldLayoutId id="2147483658" r:id="rId10"/>
     <p:sldLayoutId id="2147483659" r:id="rId11"/>
   </p:sldLayoutIdLst>
-  <p:hf dt="0" ftr="0" hdr="0" sldNum="0"/>
+  <p:hf sldNum="0" hdr="0" ftr="0" dt="0"/>
   <p:txStyles>
     <p:titleStyle>
-      <a:defPPr lvl="0" marR="0" rtl="0" algn="l">
+      <a:defPPr marR="0" lvl="0" algn="l" rtl="0">
         <a:lnSpc>
           <a:spcPct val="100000"/>
         </a:lnSpc>
@@ -5738,7 +5725,7 @@
           <a:spcPts val="0"/>
         </a:spcAft>
       </a:defPPr>
-      <a:lvl1pPr lvl="0" marR="0" rtl="0" algn="l">
+      <a:lvl1pPr marR="0" lvl="0" algn="l" rtl="0">
         <a:lnSpc>
           <a:spcPct val="100000"/>
         </a:lnSpc>
@@ -5751,18 +5738,18 @@
         <a:buClr>
           <a:srgbClr val="000000"/>
         </a:buClr>
-        <a:buFont typeface="Arial"/>
-        <a:defRPr b="0" i="0" sz="1400" u="none" cap="none" strike="noStrike">
+        <a:buFont typeface="Arial" panose="020B0604020202090204"/>
+        <a:defRPr sz="1400" b="0" i="0" u="none" strike="noStrike" cap="none">
           <a:solidFill>
             <a:srgbClr val="000000"/>
           </a:solidFill>
-          <a:latin typeface="Arial"/>
-          <a:ea typeface="Arial"/>
-          <a:cs typeface="Arial"/>
-          <a:sym typeface="Arial"/>
+          <a:latin typeface="Arial" panose="020B0604020202090204"/>
+          <a:ea typeface="Arial" panose="020B0604020202090204"/>
+          <a:cs typeface="Arial" panose="020B0604020202090204"/>
+          <a:sym typeface="Arial" panose="020B0604020202090204"/>
         </a:defRPr>
       </a:lvl1pPr>
-      <a:lvl2pPr lvl="1" marR="0" rtl="0" algn="l">
+      <a:lvl2pPr marR="0" lvl="1" algn="l" rtl="0">
         <a:lnSpc>
           <a:spcPct val="100000"/>
         </a:lnSpc>
@@ -5775,18 +5762,18 @@
         <a:buClr>
           <a:srgbClr val="000000"/>
         </a:buClr>
-        <a:buFont typeface="Arial"/>
-        <a:defRPr b="0" i="0" sz="1400" u="none" cap="none" strike="noStrike">
+        <a:buFont typeface="Arial" panose="020B0604020202090204"/>
+        <a:defRPr sz="1400" b="0" i="0" u="none" strike="noStrike" cap="none">
           <a:solidFill>
             <a:srgbClr val="000000"/>
           </a:solidFill>
-          <a:latin typeface="Arial"/>
-          <a:ea typeface="Arial"/>
-          <a:cs typeface="Arial"/>
-          <a:sym typeface="Arial"/>
+          <a:latin typeface="Arial" panose="020B0604020202090204"/>
+          <a:ea typeface="Arial" panose="020B0604020202090204"/>
+          <a:cs typeface="Arial" panose="020B0604020202090204"/>
+          <a:sym typeface="Arial" panose="020B0604020202090204"/>
         </a:defRPr>
       </a:lvl2pPr>
-      <a:lvl3pPr lvl="2" marR="0" rtl="0" algn="l">
+      <a:lvl3pPr marR="0" lvl="2" algn="l" rtl="0">
         <a:lnSpc>
           <a:spcPct val="100000"/>
         </a:lnSpc>
@@ -5799,18 +5786,18 @@
         <a:buClr>
           <a:srgbClr val="000000"/>
         </a:buClr>
-        <a:buFont typeface="Arial"/>
-        <a:defRPr b="0" i="0" sz="1400" u="none" cap="none" strike="noStrike">
+        <a:buFont typeface="Arial" panose="020B0604020202090204"/>
+        <a:defRPr sz="1400" b="0" i="0" u="none" strike="noStrike" cap="none">
           <a:solidFill>
             <a:srgbClr val="000000"/>
           </a:solidFill>
-          <a:latin typeface="Arial"/>
-          <a:ea typeface="Arial"/>
-          <a:cs typeface="Arial"/>
-          <a:sym typeface="Arial"/>
+          <a:latin typeface="Arial" panose="020B0604020202090204"/>
+          <a:ea typeface="Arial" panose="020B0604020202090204"/>
+          <a:cs typeface="Arial" panose="020B0604020202090204"/>
+          <a:sym typeface="Arial" panose="020B0604020202090204"/>
         </a:defRPr>
       </a:lvl3pPr>
-      <a:lvl4pPr lvl="3" marR="0" rtl="0" algn="l">
+      <a:lvl4pPr marR="0" lvl="3" algn="l" rtl="0">
         <a:lnSpc>
           <a:spcPct val="100000"/>
         </a:lnSpc>
@@ -5823,18 +5810,18 @@
         <a:buClr>
           <a:srgbClr val="000000"/>
         </a:buClr>
-        <a:buFont typeface="Arial"/>
-        <a:defRPr b="0" i="0" sz="1400" u="none" cap="none" strike="noStrike">
+        <a:buFont typeface="Arial" panose="020B0604020202090204"/>
+        <a:defRPr sz="1400" b="0" i="0" u="none" strike="noStrike" cap="none">
           <a:solidFill>
             <a:srgbClr val="000000"/>
           </a:solidFill>
-          <a:latin typeface="Arial"/>
-          <a:ea typeface="Arial"/>
-          <a:cs typeface="Arial"/>
-          <a:sym typeface="Arial"/>
+          <a:latin typeface="Arial" panose="020B0604020202090204"/>
+          <a:ea typeface="Arial" panose="020B0604020202090204"/>
+          <a:cs typeface="Arial" panose="020B0604020202090204"/>
+          <a:sym typeface="Arial" panose="020B0604020202090204"/>
         </a:defRPr>
       </a:lvl4pPr>
-      <a:lvl5pPr lvl="4" marR="0" rtl="0" algn="l">
+      <a:lvl5pPr marR="0" lvl="4" algn="l" rtl="0">
         <a:lnSpc>
           <a:spcPct val="100000"/>
         </a:lnSpc>
@@ -5847,18 +5834,18 @@
         <a:buClr>
           <a:srgbClr val="000000"/>
         </a:buClr>
-        <a:buFont typeface="Arial"/>
-        <a:defRPr b="0" i="0" sz="1400" u="none" cap="none" strike="noStrike">
+        <a:buFont typeface="Arial" panose="020B0604020202090204"/>
+        <a:defRPr sz="1400" b="0" i="0" u="none" strike="noStrike" cap="none">
           <a:solidFill>
             <a:srgbClr val="000000"/>
           </a:solidFill>
-          <a:latin typeface="Arial"/>
-          <a:ea typeface="Arial"/>
-          <a:cs typeface="Arial"/>
-          <a:sym typeface="Arial"/>
+          <a:latin typeface="Arial" panose="020B0604020202090204"/>
+          <a:ea typeface="Arial" panose="020B0604020202090204"/>
+          <a:cs typeface="Arial" panose="020B0604020202090204"/>
+          <a:sym typeface="Arial" panose="020B0604020202090204"/>
         </a:defRPr>
       </a:lvl5pPr>
-      <a:lvl6pPr lvl="5" marR="0" rtl="0" algn="l">
+      <a:lvl6pPr marR="0" lvl="5" algn="l" rtl="0">
         <a:lnSpc>
           <a:spcPct val="100000"/>
         </a:lnSpc>
@@ -5871,18 +5858,18 @@
         <a:buClr>
           <a:srgbClr val="000000"/>
         </a:buClr>
-        <a:buFont typeface="Arial"/>
-        <a:defRPr b="0" i="0" sz="1400" u="none" cap="none" strike="noStrike">
+        <a:buFont typeface="Arial" panose="020B0604020202090204"/>
+        <a:defRPr sz="1400" b="0" i="0" u="none" strike="noStrike" cap="none">
           <a:solidFill>
             <a:srgbClr val="000000"/>
           </a:solidFill>
-          <a:latin typeface="Arial"/>
-          <a:ea typeface="Arial"/>
-          <a:cs typeface="Arial"/>
-          <a:sym typeface="Arial"/>
+          <a:latin typeface="Arial" panose="020B0604020202090204"/>
+          <a:ea typeface="Arial" panose="020B0604020202090204"/>
+          <a:cs typeface="Arial" panose="020B0604020202090204"/>
+          <a:sym typeface="Arial" panose="020B0604020202090204"/>
         </a:defRPr>
       </a:lvl6pPr>
-      <a:lvl7pPr lvl="6" marR="0" rtl="0" algn="l">
+      <a:lvl7pPr marR="0" lvl="6" algn="l" rtl="0">
         <a:lnSpc>
           <a:spcPct val="100000"/>
         </a:lnSpc>
@@ -5895,18 +5882,18 @@
         <a:buClr>
           <a:srgbClr val="000000"/>
         </a:buClr>
-        <a:buFont typeface="Arial"/>
-        <a:defRPr b="0" i="0" sz="1400" u="none" cap="none" strike="noStrike">
+        <a:buFont typeface="Arial" panose="020B0604020202090204"/>
+        <a:defRPr sz="1400" b="0" i="0" u="none" strike="noStrike" cap="none">
           <a:solidFill>
             <a:srgbClr val="000000"/>
           </a:solidFill>
-          <a:latin typeface="Arial"/>
-          <a:ea typeface="Arial"/>
-          <a:cs typeface="Arial"/>
-          <a:sym typeface="Arial"/>
+          <a:latin typeface="Arial" panose="020B0604020202090204"/>
+          <a:ea typeface="Arial" panose="020B0604020202090204"/>
+          <a:cs typeface="Arial" panose="020B0604020202090204"/>
+          <a:sym typeface="Arial" panose="020B0604020202090204"/>
         </a:defRPr>
       </a:lvl7pPr>
-      <a:lvl8pPr lvl="7" marR="0" rtl="0" algn="l">
+      <a:lvl8pPr marR="0" lvl="7" algn="l" rtl="0">
         <a:lnSpc>
           <a:spcPct val="100000"/>
         </a:lnSpc>
@@ -5919,18 +5906,18 @@
         <a:buClr>
           <a:srgbClr val="000000"/>
         </a:buClr>
-        <a:buFont typeface="Arial"/>
-        <a:defRPr b="0" i="0" sz="1400" u="none" cap="none" strike="noStrike">
+        <a:buFont typeface="Arial" panose="020B0604020202090204"/>
+        <a:defRPr sz="1400" b="0" i="0" u="none" strike="noStrike" cap="none">
           <a:solidFill>
             <a:srgbClr val="000000"/>
           </a:solidFill>
-          <a:latin typeface="Arial"/>
-          <a:ea typeface="Arial"/>
-          <a:cs typeface="Arial"/>
-          <a:sym typeface="Arial"/>
+          <a:latin typeface="Arial" panose="020B0604020202090204"/>
+          <a:ea typeface="Arial" panose="020B0604020202090204"/>
+          <a:cs typeface="Arial" panose="020B0604020202090204"/>
+          <a:sym typeface="Arial" panose="020B0604020202090204"/>
         </a:defRPr>
       </a:lvl8pPr>
-      <a:lvl9pPr lvl="8" marR="0" rtl="0" algn="l">
+      <a:lvl9pPr marR="0" lvl="8" algn="l" rtl="0">
         <a:lnSpc>
           <a:spcPct val="100000"/>
         </a:lnSpc>
@@ -5943,20 +5930,20 @@
         <a:buClr>
           <a:srgbClr val="000000"/>
         </a:buClr>
-        <a:buFont typeface="Arial"/>
-        <a:defRPr b="0" i="0" sz="1400" u="none" cap="none" strike="noStrike">
+        <a:buFont typeface="Arial" panose="020B0604020202090204"/>
+        <a:defRPr sz="1400" b="0" i="0" u="none" strike="noStrike" cap="none">
           <a:solidFill>
             <a:srgbClr val="000000"/>
           </a:solidFill>
-          <a:latin typeface="Arial"/>
-          <a:ea typeface="Arial"/>
-          <a:cs typeface="Arial"/>
-          <a:sym typeface="Arial"/>
+          <a:latin typeface="Arial" panose="020B0604020202090204"/>
+          <a:ea typeface="Arial" panose="020B0604020202090204"/>
+          <a:cs typeface="Arial" panose="020B0604020202090204"/>
+          <a:sym typeface="Arial" panose="020B0604020202090204"/>
         </a:defRPr>
       </a:lvl9pPr>
     </p:titleStyle>
     <p:bodyStyle>
-      <a:defPPr lvl="0" marR="0" rtl="0" algn="l">
+      <a:defPPr marR="0" lvl="0" algn="l" rtl="0">
         <a:lnSpc>
           <a:spcPct val="100000"/>
         </a:lnSpc>
@@ -5967,7 +5954,7 @@
           <a:spcPts val="0"/>
         </a:spcAft>
       </a:defPPr>
-      <a:lvl1pPr lvl="0" marR="0" rtl="0" algn="l">
+      <a:lvl1pPr marR="0" lvl="0" algn="l" rtl="0">
         <a:lnSpc>
           <a:spcPct val="100000"/>
         </a:lnSpc>
@@ -5980,18 +5967,18 @@
         <a:buClr>
           <a:srgbClr val="000000"/>
         </a:buClr>
-        <a:buFont typeface="Arial"/>
-        <a:defRPr b="0" i="0" sz="1400" u="none" cap="none" strike="noStrike">
+        <a:buFont typeface="Arial" panose="020B0604020202090204"/>
+        <a:defRPr sz="1400" b="0" i="0" u="none" strike="noStrike" cap="none">
           <a:solidFill>
             <a:srgbClr val="000000"/>
           </a:solidFill>
-          <a:latin typeface="Arial"/>
-          <a:ea typeface="Arial"/>
-          <a:cs typeface="Arial"/>
-          <a:sym typeface="Arial"/>
+          <a:latin typeface="Arial" panose="020B0604020202090204"/>
+          <a:ea typeface="Arial" panose="020B0604020202090204"/>
+          <a:cs typeface="Arial" panose="020B0604020202090204"/>
+          <a:sym typeface="Arial" panose="020B0604020202090204"/>
         </a:defRPr>
       </a:lvl1pPr>
-      <a:lvl2pPr lvl="1" marR="0" rtl="0" algn="l">
+      <a:lvl2pPr marR="0" lvl="1" algn="l" rtl="0">
         <a:lnSpc>
           <a:spcPct val="100000"/>
         </a:lnSpc>
@@ -6004,18 +5991,18 @@
         <a:buClr>
           <a:srgbClr val="000000"/>
         </a:buClr>
-        <a:buFont typeface="Arial"/>
-        <a:defRPr b="0" i="0" sz="1400" u="none" cap="none" strike="noStrike">
+        <a:buFont typeface="Arial" panose="020B0604020202090204"/>
+        <a:defRPr sz="1400" b="0" i="0" u="none" strike="noStrike" cap="none">
           <a:solidFill>
             <a:srgbClr val="000000"/>
           </a:solidFill>
-          <a:latin typeface="Arial"/>
-          <a:ea typeface="Arial"/>
-          <a:cs typeface="Arial"/>
-          <a:sym typeface="Arial"/>
+          <a:latin typeface="Arial" panose="020B0604020202090204"/>
+          <a:ea typeface="Arial" panose="020B0604020202090204"/>
+          <a:cs typeface="Arial" panose="020B0604020202090204"/>
+          <a:sym typeface="Arial" panose="020B0604020202090204"/>
         </a:defRPr>
       </a:lvl2pPr>
-      <a:lvl3pPr lvl="2" marR="0" rtl="0" algn="l">
+      <a:lvl3pPr marR="0" lvl="2" algn="l" rtl="0">
         <a:lnSpc>
           <a:spcPct val="100000"/>
         </a:lnSpc>
@@ -6028,18 +6015,18 @@
         <a:buClr>
           <a:srgbClr val="000000"/>
         </a:buClr>
-        <a:buFont typeface="Arial"/>
-        <a:defRPr b="0" i="0" sz="1400" u="none" cap="none" strike="noStrike">
+        <a:buFont typeface="Arial" panose="020B0604020202090204"/>
+        <a:defRPr sz="1400" b="0" i="0" u="none" strike="noStrike" cap="none">
           <a:solidFill>
             <a:srgbClr val="000000"/>
           </a:solidFill>
-          <a:latin typeface="Arial"/>
-          <a:ea typeface="Arial"/>
-          <a:cs typeface="Arial"/>
-          <a:sym typeface="Arial"/>
+          <a:latin typeface="Arial" panose="020B0604020202090204"/>
+          <a:ea typeface="Arial" panose="020B0604020202090204"/>
+          <a:cs typeface="Arial" panose="020B0604020202090204"/>
+          <a:sym typeface="Arial" panose="020B0604020202090204"/>
         </a:defRPr>
       </a:lvl3pPr>
-      <a:lvl4pPr lvl="3" marR="0" rtl="0" algn="l">
+      <a:lvl4pPr marR="0" lvl="3" algn="l" rtl="0">
         <a:lnSpc>
           <a:spcPct val="100000"/>
         </a:lnSpc>
@@ -6052,18 +6039,18 @@
         <a:buClr>
           <a:srgbClr val="000000"/>
         </a:buClr>
-        <a:buFont typeface="Arial"/>
-        <a:defRPr b="0" i="0" sz="1400" u="none" cap="none" strike="noStrike">
+        <a:buFont typeface="Arial" panose="020B0604020202090204"/>
+        <a:defRPr sz="1400" b="0" i="0" u="none" strike="noStrike" cap="none">
           <a:solidFill>
             <a:srgbClr val="000000"/>
           </a:solidFill>
-          <a:latin typeface="Arial"/>
-          <a:ea typeface="Arial"/>
-          <a:cs typeface="Arial"/>
-          <a:sym typeface="Arial"/>
+          <a:latin typeface="Arial" panose="020B0604020202090204"/>
+          <a:ea typeface="Arial" panose="020B0604020202090204"/>
+          <a:cs typeface="Arial" panose="020B0604020202090204"/>
+          <a:sym typeface="Arial" panose="020B0604020202090204"/>
         </a:defRPr>
       </a:lvl4pPr>
-      <a:lvl5pPr lvl="4" marR="0" rtl="0" algn="l">
+      <a:lvl5pPr marR="0" lvl="4" algn="l" rtl="0">
         <a:lnSpc>
           <a:spcPct val="100000"/>
         </a:lnSpc>
@@ -6076,18 +6063,18 @@
         <a:buClr>
           <a:srgbClr val="000000"/>
         </a:buClr>
-        <a:buFont typeface="Arial"/>
-        <a:defRPr b="0" i="0" sz="1400" u="none" cap="none" strike="noStrike">
+        <a:buFont typeface="Arial" panose="020B0604020202090204"/>
+        <a:defRPr sz="1400" b="0" i="0" u="none" strike="noStrike" cap="none">
           <a:solidFill>
             <a:srgbClr val="000000"/>
           </a:solidFill>
-          <a:latin typeface="Arial"/>
-          <a:ea typeface="Arial"/>
-          <a:cs typeface="Arial"/>
-          <a:sym typeface="Arial"/>
+          <a:latin typeface="Arial" panose="020B0604020202090204"/>
+          <a:ea typeface="Arial" panose="020B0604020202090204"/>
+          <a:cs typeface="Arial" panose="020B0604020202090204"/>
+          <a:sym typeface="Arial" panose="020B0604020202090204"/>
         </a:defRPr>
       </a:lvl5pPr>
-      <a:lvl6pPr lvl="5" marR="0" rtl="0" algn="l">
+      <a:lvl6pPr marR="0" lvl="5" algn="l" rtl="0">
         <a:lnSpc>
           <a:spcPct val="100000"/>
         </a:lnSpc>
@@ -6100,18 +6087,18 @@
         <a:buClr>
           <a:srgbClr val="000000"/>
         </a:buClr>
-        <a:buFont typeface="Arial"/>
-        <a:defRPr b="0" i="0" sz="1400" u="none" cap="none" strike="noStrike">
+        <a:buFont typeface="Arial" panose="020B0604020202090204"/>
+        <a:defRPr sz="1400" b="0" i="0" u="none" strike="noStrike" cap="none">
           <a:solidFill>
             <a:srgbClr val="000000"/>
           </a:solidFill>
-          <a:latin typeface="Arial"/>
-          <a:ea typeface="Arial"/>
-          <a:cs typeface="Arial"/>
-          <a:sym typeface="Arial"/>
+          <a:latin typeface="Arial" panose="020B0604020202090204"/>
+          <a:ea typeface="Arial" panose="020B0604020202090204"/>
+          <a:cs typeface="Arial" panose="020B0604020202090204"/>
+          <a:sym typeface="Arial" panose="020B0604020202090204"/>
         </a:defRPr>
       </a:lvl6pPr>
-      <a:lvl7pPr lvl="6" marR="0" rtl="0" algn="l">
+      <a:lvl7pPr marR="0" lvl="6" algn="l" rtl="0">
         <a:lnSpc>
           <a:spcPct val="100000"/>
         </a:lnSpc>
@@ -6124,18 +6111,18 @@
         <a:buClr>
           <a:srgbClr val="000000"/>
         </a:buClr>
-        <a:buFont typeface="Arial"/>
-        <a:defRPr b="0" i="0" sz="1400" u="none" cap="none" strike="noStrike">
+        <a:buFont typeface="Arial" panose="020B0604020202090204"/>
+        <a:defRPr sz="1400" b="0" i="0" u="none" strike="noStrike" cap="none">
           <a:solidFill>
             <a:srgbClr val="000000"/>
           </a:solidFill>
-          <a:latin typeface="Arial"/>
-          <a:ea typeface="Arial"/>
-          <a:cs typeface="Arial"/>
-          <a:sym typeface="Arial"/>
+          <a:latin typeface="Arial" panose="020B0604020202090204"/>
+          <a:ea typeface="Arial" panose="020B0604020202090204"/>
+          <a:cs typeface="Arial" panose="020B0604020202090204"/>
+          <a:sym typeface="Arial" panose="020B0604020202090204"/>
         </a:defRPr>
       </a:lvl7pPr>
-      <a:lvl8pPr lvl="7" marR="0" rtl="0" algn="l">
+      <a:lvl8pPr marR="0" lvl="7" algn="l" rtl="0">
         <a:lnSpc>
           <a:spcPct val="100000"/>
         </a:lnSpc>
@@ -6148,18 +6135,18 @@
         <a:buClr>
           <a:srgbClr val="000000"/>
         </a:buClr>
-        <a:buFont typeface="Arial"/>
-        <a:defRPr b="0" i="0" sz="1400" u="none" cap="none" strike="noStrike">
+        <a:buFont typeface="Arial" panose="020B0604020202090204"/>
+        <a:defRPr sz="1400" b="0" i="0" u="none" strike="noStrike" cap="none">
           <a:solidFill>
             <a:srgbClr val="000000"/>
           </a:solidFill>
-          <a:latin typeface="Arial"/>
-          <a:ea typeface="Arial"/>
-          <a:cs typeface="Arial"/>
-          <a:sym typeface="Arial"/>
+          <a:latin typeface="Arial" panose="020B0604020202090204"/>
+          <a:ea typeface="Arial" panose="020B0604020202090204"/>
+          <a:cs typeface="Arial" panose="020B0604020202090204"/>
+          <a:sym typeface="Arial" panose="020B0604020202090204"/>
         </a:defRPr>
       </a:lvl8pPr>
-      <a:lvl9pPr lvl="8" marR="0" rtl="0" algn="l">
+      <a:lvl9pPr marR="0" lvl="8" algn="l" rtl="0">
         <a:lnSpc>
           <a:spcPct val="100000"/>
         </a:lnSpc>
@@ -6172,20 +6159,20 @@
         <a:buClr>
           <a:srgbClr val="000000"/>
         </a:buClr>
-        <a:buFont typeface="Arial"/>
-        <a:defRPr b="0" i="0" sz="1400" u="none" cap="none" strike="noStrike">
+        <a:buFont typeface="Arial" panose="020B0604020202090204"/>
+        <a:defRPr sz="1400" b="0" i="0" u="none" strike="noStrike" cap="none">
           <a:solidFill>
             <a:srgbClr val="000000"/>
           </a:solidFill>
-          <a:latin typeface="Arial"/>
-          <a:ea typeface="Arial"/>
-          <a:cs typeface="Arial"/>
-          <a:sym typeface="Arial"/>
+          <a:latin typeface="Arial" panose="020B0604020202090204"/>
+          <a:ea typeface="Arial" panose="020B0604020202090204"/>
+          <a:cs typeface="Arial" panose="020B0604020202090204"/>
+          <a:sym typeface="Arial" panose="020B0604020202090204"/>
         </a:defRPr>
       </a:lvl9pPr>
     </p:bodyStyle>
     <p:otherStyle>
-      <a:defPPr lvl="0" marR="0" rtl="0" algn="l">
+      <a:defPPr marR="0" lvl="0" algn="l" rtl="0">
         <a:lnSpc>
           <a:spcPct val="100000"/>
         </a:lnSpc>
@@ -6196,7 +6183,7 @@
           <a:spcPts val="0"/>
         </a:spcAft>
       </a:defPPr>
-      <a:lvl1pPr lvl="0" marR="0" rtl="0" algn="l">
+      <a:lvl1pPr marR="0" lvl="0" algn="l" rtl="0">
         <a:lnSpc>
           <a:spcPct val="100000"/>
         </a:lnSpc>
@@ -6209,18 +6196,18 @@
         <a:buClr>
           <a:srgbClr val="000000"/>
         </a:buClr>
-        <a:buFont typeface="Arial"/>
-        <a:defRPr b="0" i="0" sz="1400" u="none" cap="none" strike="noStrike">
+        <a:buFont typeface="Arial" panose="020B0604020202090204"/>
+        <a:defRPr sz="1400" b="0" i="0" u="none" strike="noStrike" cap="none">
           <a:solidFill>
             <a:srgbClr val="000000"/>
           </a:solidFill>
-          <a:latin typeface="Arial"/>
-          <a:ea typeface="Arial"/>
-          <a:cs typeface="Arial"/>
-          <a:sym typeface="Arial"/>
+          <a:latin typeface="Arial" panose="020B0604020202090204"/>
+          <a:ea typeface="Arial" panose="020B0604020202090204"/>
+          <a:cs typeface="Arial" panose="020B0604020202090204"/>
+          <a:sym typeface="Arial" panose="020B0604020202090204"/>
         </a:defRPr>
       </a:lvl1pPr>
-      <a:lvl2pPr lvl="1" marR="0" rtl="0" algn="l">
+      <a:lvl2pPr marR="0" lvl="1" algn="l" rtl="0">
         <a:lnSpc>
           <a:spcPct val="100000"/>
         </a:lnSpc>
@@ -6233,18 +6220,18 @@
         <a:buClr>
           <a:srgbClr val="000000"/>
         </a:buClr>
-        <a:buFont typeface="Arial"/>
-        <a:defRPr b="0" i="0" sz="1400" u="none" cap="none" strike="noStrike">
+        <a:buFont typeface="Arial" panose="020B0604020202090204"/>
+        <a:defRPr sz="1400" b="0" i="0" u="none" strike="noStrike" cap="none">
           <a:solidFill>
             <a:srgbClr val="000000"/>
           </a:solidFill>
-          <a:latin typeface="Arial"/>
-          <a:ea typeface="Arial"/>
-          <a:cs typeface="Arial"/>
-          <a:sym typeface="Arial"/>
+          <a:latin typeface="Arial" panose="020B0604020202090204"/>
+          <a:ea typeface="Arial" panose="020B0604020202090204"/>
+          <a:cs typeface="Arial" panose="020B0604020202090204"/>
+          <a:sym typeface="Arial" panose="020B0604020202090204"/>
         </a:defRPr>
       </a:lvl2pPr>
-      <a:lvl3pPr lvl="2" marR="0" rtl="0" algn="l">
+      <a:lvl3pPr marR="0" lvl="2" algn="l" rtl="0">
         <a:lnSpc>
           <a:spcPct val="100000"/>
         </a:lnSpc>
@@ -6257,18 +6244,18 @@
         <a:buClr>
           <a:srgbClr val="000000"/>
         </a:buClr>
-        <a:buFont typeface="Arial"/>
-        <a:defRPr b="0" i="0" sz="1400" u="none" cap="none" strike="noStrike">
+        <a:buFont typeface="Arial" panose="020B0604020202090204"/>
+        <a:defRPr sz="1400" b="0" i="0" u="none" strike="noStrike" cap="none">
           <a:solidFill>
             <a:srgbClr val="000000"/>
           </a:solidFill>
-          <a:latin typeface="Arial"/>
-          <a:ea typeface="Arial"/>
-          <a:cs typeface="Arial"/>
-          <a:sym typeface="Arial"/>
+          <a:latin typeface="Arial" panose="020B0604020202090204"/>
+          <a:ea typeface="Arial" panose="020B0604020202090204"/>
+          <a:cs typeface="Arial" panose="020B0604020202090204"/>
+          <a:sym typeface="Arial" panose="020B0604020202090204"/>
         </a:defRPr>
       </a:lvl3pPr>
-      <a:lvl4pPr lvl="3" marR="0" rtl="0" algn="l">
+      <a:lvl4pPr marR="0" lvl="3" algn="l" rtl="0">
         <a:lnSpc>
           <a:spcPct val="100000"/>
         </a:lnSpc>
@@ -6281,18 +6268,18 @@
         <a:buClr>
           <a:srgbClr val="000000"/>
         </a:buClr>
-        <a:buFont typeface="Arial"/>
-        <a:defRPr b="0" i="0" sz="1400" u="none" cap="none" strike="noStrike">
+        <a:buFont typeface="Arial" panose="020B0604020202090204"/>
+        <a:defRPr sz="1400" b="0" i="0" u="none" strike="noStrike" cap="none">
           <a:solidFill>
             <a:srgbClr val="000000"/>
           </a:solidFill>
-          <a:latin typeface="Arial"/>
-          <a:ea typeface="Arial"/>
-          <a:cs typeface="Arial"/>
-          <a:sym typeface="Arial"/>
+          <a:latin typeface="Arial" panose="020B0604020202090204"/>
+          <a:ea typeface="Arial" panose="020B0604020202090204"/>
+          <a:cs typeface="Arial" panose="020B0604020202090204"/>
+          <a:sym typeface="Arial" panose="020B0604020202090204"/>
         </a:defRPr>
       </a:lvl4pPr>
-      <a:lvl5pPr lvl="4" marR="0" rtl="0" algn="l">
+      <a:lvl5pPr marR="0" lvl="4" algn="l" rtl="0">
         <a:lnSpc>
           <a:spcPct val="100000"/>
         </a:lnSpc>
@@ -6305,18 +6292,18 @@
         <a:buClr>
           <a:srgbClr val="000000"/>
         </a:buClr>
-        <a:buFont typeface="Arial"/>
-        <a:defRPr b="0" i="0" sz="1400" u="none" cap="none" strike="noStrike">
+        <a:buFont typeface="Arial" panose="020B0604020202090204"/>
+        <a:defRPr sz="1400" b="0" i="0" u="none" strike="noStrike" cap="none">
           <a:solidFill>
             <a:srgbClr val="000000"/>
           </a:solidFill>
-          <a:latin typeface="Arial"/>
-          <a:ea typeface="Arial"/>
-          <a:cs typeface="Arial"/>
-          <a:sym typeface="Arial"/>
+          <a:latin typeface="Arial" panose="020B0604020202090204"/>
+          <a:ea typeface="Arial" panose="020B0604020202090204"/>
+          <a:cs typeface="Arial" panose="020B0604020202090204"/>
+          <a:sym typeface="Arial" panose="020B0604020202090204"/>
         </a:defRPr>
       </a:lvl5pPr>
-      <a:lvl6pPr lvl="5" marR="0" rtl="0" algn="l">
+      <a:lvl6pPr marR="0" lvl="5" algn="l" rtl="0">
         <a:lnSpc>
           <a:spcPct val="100000"/>
         </a:lnSpc>
@@ -6329,18 +6316,18 @@
         <a:buClr>
           <a:srgbClr val="000000"/>
         </a:buClr>
-        <a:buFont typeface="Arial"/>
-        <a:defRPr b="0" i="0" sz="1400" u="none" cap="none" strike="noStrike">
+        <a:buFont typeface="Arial" panose="020B0604020202090204"/>
+        <a:defRPr sz="1400" b="0" i="0" u="none" strike="noStrike" cap="none">
           <a:solidFill>
             <a:srgbClr val="000000"/>
           </a:solidFill>
-          <a:latin typeface="Arial"/>
-          <a:ea typeface="Arial"/>
-          <a:cs typeface="Arial"/>
-          <a:sym typeface="Arial"/>
+          <a:latin typeface="Arial" panose="020B0604020202090204"/>
+          <a:ea typeface="Arial" panose="020B0604020202090204"/>
+          <a:cs typeface="Arial" panose="020B0604020202090204"/>
+          <a:sym typeface="Arial" panose="020B0604020202090204"/>
         </a:defRPr>
       </a:lvl6pPr>
-      <a:lvl7pPr lvl="6" marR="0" rtl="0" algn="l">
+      <a:lvl7pPr marR="0" lvl="6" algn="l" rtl="0">
         <a:lnSpc>
           <a:spcPct val="100000"/>
         </a:lnSpc>
@@ -6353,18 +6340,18 @@
         <a:buClr>
           <a:srgbClr val="000000"/>
         </a:buClr>
-        <a:buFont typeface="Arial"/>
-        <a:defRPr b="0" i="0" sz="1400" u="none" cap="none" strike="noStrike">
+        <a:buFont typeface="Arial" panose="020B0604020202090204"/>
+        <a:defRPr sz="1400" b="0" i="0" u="none" strike="noStrike" cap="none">
           <a:solidFill>
             <a:srgbClr val="000000"/>
           </a:solidFill>
-          <a:latin typeface="Arial"/>
-          <a:ea typeface="Arial"/>
-          <a:cs typeface="Arial"/>
-          <a:sym typeface="Arial"/>
+          <a:latin typeface="Arial" panose="020B0604020202090204"/>
+          <a:ea typeface="Arial" panose="020B0604020202090204"/>
+          <a:cs typeface="Arial" panose="020B0604020202090204"/>
+          <a:sym typeface="Arial" panose="020B0604020202090204"/>
         </a:defRPr>
       </a:lvl7pPr>
-      <a:lvl8pPr lvl="7" marR="0" rtl="0" algn="l">
+      <a:lvl8pPr marR="0" lvl="7" algn="l" rtl="0">
         <a:lnSpc>
           <a:spcPct val="100000"/>
         </a:lnSpc>
@@ -6377,18 +6364,18 @@
         <a:buClr>
           <a:srgbClr val="000000"/>
         </a:buClr>
-        <a:buFont typeface="Arial"/>
-        <a:defRPr b="0" i="0" sz="1400" u="none" cap="none" strike="noStrike">
+        <a:buFont typeface="Arial" panose="020B0604020202090204"/>
+        <a:defRPr sz="1400" b="0" i="0" u="none" strike="noStrike" cap="none">
           <a:solidFill>
             <a:srgbClr val="000000"/>
           </a:solidFill>
-          <a:latin typeface="Arial"/>
-          <a:ea typeface="Arial"/>
-          <a:cs typeface="Arial"/>
-          <a:sym typeface="Arial"/>
+          <a:latin typeface="Arial" panose="020B0604020202090204"/>
+          <a:ea typeface="Arial" panose="020B0604020202090204"/>
+          <a:cs typeface="Arial" panose="020B0604020202090204"/>
+          <a:sym typeface="Arial" panose="020B0604020202090204"/>
         </a:defRPr>
       </a:lvl8pPr>
-      <a:lvl9pPr lvl="8" marR="0" rtl="0" algn="l">
+      <a:lvl9pPr marR="0" lvl="8" algn="l" rtl="0">
         <a:lnSpc>
           <a:spcPct val="100000"/>
         </a:lnSpc>
@@ -6401,15 +6388,15 @@
         <a:buClr>
           <a:srgbClr val="000000"/>
         </a:buClr>
-        <a:buFont typeface="Arial"/>
-        <a:defRPr b="0" i="0" sz="1400" u="none" cap="none" strike="noStrike">
+        <a:buFont typeface="Arial" panose="020B0604020202090204"/>
+        <a:defRPr sz="1400" b="0" i="0" u="none" strike="noStrike" cap="none">
           <a:solidFill>
             <a:srgbClr val="000000"/>
           </a:solidFill>
-          <a:latin typeface="Arial"/>
-          <a:ea typeface="Arial"/>
-          <a:cs typeface="Arial"/>
-          <a:sym typeface="Arial"/>
+          <a:latin typeface="Arial" panose="020B0604020202090204"/>
+          <a:ea typeface="Arial" panose="020B0604020202090204"/>
+          <a:cs typeface="Arial" panose="020B0604020202090204"/>
+          <a:sym typeface="Arial" panose="020B0604020202090204"/>
         </a:defRPr>
       </a:lvl9pPr>
     </p:otherStyle>
@@ -6418,7 +6405,7 @@
 </file>
 
 <file path=ppt/slides/slide1.xml><?xml version="1.0" encoding="utf-8"?>
-<p:sld xmlns:a="http://schemas.openxmlformats.org/drawingml/2006/main" xmlns:r="http://schemas.openxmlformats.org/officeDocument/2006/relationships" xmlns:mc="http://schemas.openxmlformats.org/markup-compatibility/2006" xmlns:mv="urn:schemas-microsoft-com:mac:vml" xmlns:p="http://schemas.openxmlformats.org/presentationml/2006/main" xmlns:c="http://schemas.openxmlformats.org/drawingml/2006/chart" xmlns:dgm="http://schemas.openxmlformats.org/drawingml/2006/diagram" xmlns:o="urn:schemas-microsoft-com:office:office" xmlns:v="urn:schemas-microsoft-com:vml" xmlns:pvml="urn:schemas-microsoft-com:office:powerpoint" xmlns:com="http://schemas.openxmlformats.org/drawingml/2006/compatibility" xmlns:p14="http://schemas.microsoft.com/office/powerpoint/2010/main" xmlns:p15="http://schemas.microsoft.com/office/powerpoint/2012/main" xmlns:ahyp="http://schemas.microsoft.com/office/drawing/2018/hyperlinkcolor">
+<p:sld xmlns:a="http://schemas.openxmlformats.org/drawingml/2006/main" xmlns:r="http://schemas.openxmlformats.org/officeDocument/2006/relationships" xmlns:p="http://schemas.openxmlformats.org/presentationml/2006/main">
   <p:cSld>
     <p:spTree>
       <p:nvGrpSpPr>
@@ -6456,12 +6443,12 @@
           </a:ln>
         </p:spPr>
         <p:txBody>
-          <a:bodyPr anchorCtr="0" anchor="ctr" bIns="45700" lIns="91425" spcFirstLastPara="1" rIns="91425" wrap="square" tIns="45700">
+          <a:bodyPr spcFirstLastPara="1" wrap="square" lIns="91425" tIns="45700" rIns="91425" bIns="45700" anchor="ctr" anchorCtr="0">
             <a:normAutofit/>
           </a:bodyPr>
           <a:lstStyle/>
           <a:p>
-            <a:pPr indent="0" lvl="0" marL="0" rtl="0" algn="l">
+            <a:pPr marL="0" lvl="0" indent="0" algn="l" rtl="0">
               <a:spcBef>
                 <a:spcPts val="0"/>
               </a:spcBef>
@@ -6472,18 +6459,18 @@
                 <a:srgbClr val="047857"/>
               </a:buClr>
               <a:buSzPts val="2400"/>
-              <a:buFont typeface="Calibri"/>
+              <a:buFont typeface="Calibri" panose="020F0502020204030204"/>
               <a:buNone/>
             </a:pPr>
             <a:r>
-              <a:rPr b="1" lang="en-US" sz="2400">
+              <a:rPr lang="en-US" sz="2400" b="1">
                 <a:solidFill>
                   <a:srgbClr val="3D85C6"/>
                 </a:solidFill>
-                <a:latin typeface="Calibri"/>
-                <a:ea typeface="Calibri"/>
-                <a:cs typeface="Calibri"/>
-                <a:sym typeface="Calibri"/>
+                <a:latin typeface="Calibri" panose="020F0502020204030204"/>
+                <a:ea typeface="Calibri" panose="020F0502020204030204"/>
+                <a:cs typeface="Calibri" panose="020F0502020204030204"/>
+                <a:sym typeface="Calibri" panose="020F0502020204030204"/>
               </a:rPr>
               <a:t>Topic &amp; Brief Introduction</a:t>
             </a:r>
@@ -6491,10 +6478,10 @@
               <a:solidFill>
                 <a:srgbClr val="3D85C6"/>
               </a:solidFill>
-              <a:latin typeface="Calibri"/>
-              <a:ea typeface="Calibri"/>
-              <a:cs typeface="Calibri"/>
-              <a:sym typeface="Calibri"/>
+              <a:latin typeface="Calibri" panose="020F0502020204030204"/>
+              <a:ea typeface="Calibri" panose="020F0502020204030204"/>
+              <a:cs typeface="Calibri" panose="020F0502020204030204"/>
+              <a:sym typeface="Calibri" panose="020F0502020204030204"/>
             </a:endParaRPr>
           </a:p>
         </p:txBody>
@@ -6519,12 +6506,12 @@
           </a:ln>
         </p:spPr>
         <p:txBody>
-          <a:bodyPr anchorCtr="0" anchor="t" bIns="45700" lIns="91425" spcFirstLastPara="1" rIns="91425" wrap="square" tIns="45700">
+          <a:bodyPr spcFirstLastPara="1" wrap="square" lIns="91425" tIns="45700" rIns="91425" bIns="45700" anchor="t" anchorCtr="0">
             <a:spAutoFit/>
           </a:bodyPr>
           <a:lstStyle/>
           <a:p>
-            <a:pPr indent="0" lvl="0" marL="0" marR="0" rtl="0" algn="l">
+            <a:pPr marL="0" marR="0" lvl="0" indent="0" algn="l" rtl="0">
               <a:spcBef>
                 <a:spcPts val="0"/>
               </a:spcBef>
@@ -6534,129 +6521,129 @@
               <a:buNone/>
             </a:pPr>
             <a:r>
-              <a:rPr b="1" i="0" lang="en-US" sz="1800" u="none" cap="none" strike="noStrike">
+              <a:rPr lang="en-US" sz="1800" b="1" i="0" u="none" strike="noStrike" cap="none">
                 <a:solidFill>
                   <a:schemeClr val="dk1"/>
                 </a:solidFill>
-                <a:latin typeface="Calibri"/>
-                <a:ea typeface="Calibri"/>
-                <a:cs typeface="Calibri"/>
-                <a:sym typeface="Calibri"/>
+                <a:latin typeface="Calibri" panose="020F0502020204030204"/>
+                <a:ea typeface="Calibri" panose="020F0502020204030204"/>
+                <a:cs typeface="Calibri" panose="020F0502020204030204"/>
+                <a:sym typeface="Calibri" panose="020F0502020204030204"/>
               </a:rPr>
               <a:t>Brief Introduction</a:t>
             </a:r>
             <a:r>
-              <a:rPr b="0" i="0" lang="en-US" sz="1500" u="none" cap="none" strike="noStrike">
+              <a:rPr lang="en-US" sz="1500" b="0" i="0" u="none" strike="noStrike" cap="none">
                 <a:solidFill>
                   <a:schemeClr val="dk1"/>
                 </a:solidFill>
-                <a:latin typeface="Calibri"/>
-                <a:ea typeface="Calibri"/>
-                <a:cs typeface="Calibri"/>
-                <a:sym typeface="Calibri"/>
+                <a:latin typeface="Calibri" panose="020F0502020204030204"/>
+                <a:ea typeface="Calibri" panose="020F0502020204030204"/>
+                <a:cs typeface="Calibri" panose="020F0502020204030204"/>
+                <a:sym typeface="Calibri" panose="020F0502020204030204"/>
               </a:rPr>
               <a:t>:</a:t>
             </a:r>
             <a:br>
-              <a:rPr b="0" i="0" lang="en-US" sz="1500" u="none" cap="none" strike="noStrike">
+              <a:rPr lang="en-US" sz="1500" b="0" i="0" u="none" strike="noStrike" cap="none">
                 <a:solidFill>
                   <a:schemeClr val="dk1"/>
                 </a:solidFill>
-                <a:latin typeface="Calibri"/>
-                <a:ea typeface="Calibri"/>
-                <a:cs typeface="Calibri"/>
-                <a:sym typeface="Calibri"/>
+                <a:latin typeface="Calibri" panose="020F0502020204030204"/>
+                <a:ea typeface="Calibri" panose="020F0502020204030204"/>
+                <a:cs typeface="Calibri" panose="020F0502020204030204"/>
+                <a:sym typeface="Calibri" panose="020F0502020204030204"/>
               </a:rPr>
             </a:br>
             <a:r>
-              <a:rPr b="0" i="0" lang="en-US" sz="1800" u="none" cap="none" strike="noStrike">
+              <a:rPr lang="en-US" sz="1800" b="0" i="0" u="none" strike="noStrike" cap="none">
                 <a:solidFill>
                   <a:schemeClr val="dk1"/>
                 </a:solidFill>
-                <a:latin typeface="Calibri"/>
-                <a:ea typeface="Calibri"/>
-                <a:cs typeface="Calibri"/>
-                <a:sym typeface="Calibri"/>
+                <a:latin typeface="Calibri" panose="020F0502020204030204"/>
+                <a:ea typeface="Calibri" panose="020F0502020204030204"/>
+                <a:cs typeface="Calibri" panose="020F0502020204030204"/>
+                <a:sym typeface="Calibri" panose="020F0502020204030204"/>
               </a:rPr>
               <a:t>• Explores training DRL agents to output trade positions directly, bypassing traditional explicit forecasting steps.</a:t>
             </a:r>
             <a:br>
-              <a:rPr b="0" i="0" lang="en-US" sz="1800" u="none" cap="none" strike="noStrike">
+              <a:rPr lang="en-US" sz="1800" b="0" i="0" u="none" strike="noStrike" cap="none">
                 <a:solidFill>
                   <a:schemeClr val="dk1"/>
                 </a:solidFill>
-                <a:latin typeface="Calibri"/>
-                <a:ea typeface="Calibri"/>
-                <a:cs typeface="Calibri"/>
-                <a:sym typeface="Calibri"/>
+                <a:latin typeface="Calibri" panose="020F0502020204030204"/>
+                <a:ea typeface="Calibri" panose="020F0502020204030204"/>
+                <a:cs typeface="Calibri" panose="020F0502020204030204"/>
+                <a:sym typeface="Calibri" panose="020F0502020204030204"/>
               </a:rPr>
             </a:br>
             <a:r>
-              <a:rPr b="0" i="0" lang="en-US" sz="1800" u="none" cap="none" strike="noStrike">
+              <a:rPr lang="en-US" sz="1800" b="0" i="0" u="none" strike="noStrike" cap="none">
                 <a:solidFill>
                   <a:schemeClr val="dk1"/>
                 </a:solidFill>
-                <a:latin typeface="Calibri"/>
-                <a:ea typeface="Calibri"/>
-                <a:cs typeface="Calibri"/>
-                <a:sym typeface="Calibri"/>
+                <a:latin typeface="Calibri" panose="020F0502020204030204"/>
+                <a:ea typeface="Calibri" panose="020F0502020204030204"/>
+                <a:cs typeface="Calibri" panose="020F0502020204030204"/>
+                <a:sym typeface="Calibri" panose="020F0502020204030204"/>
               </a:rPr>
               <a:t>• Agent learns to maximize a reward function based on expected cumulative trade returns.</a:t>
             </a:r>
             <a:br>
-              <a:rPr b="0" i="0" lang="en-US" sz="1800" u="none" cap="none" strike="noStrike">
+              <a:rPr lang="en-US" sz="1800" b="0" i="0" u="none" strike="noStrike" cap="none">
                 <a:solidFill>
                   <a:schemeClr val="dk1"/>
                 </a:solidFill>
-                <a:latin typeface="Calibri"/>
-                <a:ea typeface="Calibri"/>
-                <a:cs typeface="Calibri"/>
-                <a:sym typeface="Calibri"/>
+                <a:latin typeface="Calibri" panose="020F0502020204030204"/>
+                <a:ea typeface="Calibri" panose="020F0502020204030204"/>
+                <a:cs typeface="Calibri" panose="020F0502020204030204"/>
+                <a:sym typeface="Calibri" panose="020F0502020204030204"/>
               </a:rPr>
             </a:br>
             <a:r>
-              <a:rPr b="0" i="0" lang="en-US" sz="1800" u="none" cap="none" strike="noStrike">
+              <a:rPr lang="en-US" sz="1800" b="0" i="0" u="none" strike="noStrike" cap="none">
                 <a:solidFill>
                   <a:schemeClr val="dk1"/>
                 </a:solidFill>
-                <a:latin typeface="Calibri"/>
-                <a:ea typeface="Calibri"/>
-                <a:cs typeface="Calibri"/>
-                <a:sym typeface="Calibri"/>
+                <a:latin typeface="Calibri" panose="020F0502020204030204"/>
+                <a:ea typeface="Calibri" panose="020F0502020204030204"/>
+                <a:cs typeface="Calibri" panose="020F0502020204030204"/>
+                <a:sym typeface="Calibri" panose="020F0502020204030204"/>
               </a:rPr>
               <a:t>• Dynamically incorporates transaction costs into the optimization process.</a:t>
             </a:r>
             <a:br>
-              <a:rPr b="0" i="0" lang="en-US" sz="1800" u="none" cap="none" strike="noStrike">
+              <a:rPr lang="en-US" sz="1800" b="0" i="0" u="none" strike="noStrike" cap="none">
                 <a:solidFill>
                   <a:schemeClr val="dk1"/>
                 </a:solidFill>
-                <a:latin typeface="Calibri"/>
-                <a:ea typeface="Calibri"/>
-                <a:cs typeface="Calibri"/>
-                <a:sym typeface="Calibri"/>
+                <a:latin typeface="Calibri" panose="020F0502020204030204"/>
+                <a:ea typeface="Calibri" panose="020F0502020204030204"/>
+                <a:cs typeface="Calibri" panose="020F0502020204030204"/>
+                <a:sym typeface="Calibri" panose="020F0502020204030204"/>
               </a:rPr>
             </a:br>
             <a:br>
-              <a:rPr b="0" i="0" lang="en-US" sz="1800" u="none" cap="none" strike="noStrike">
+              <a:rPr lang="en-US" sz="1800" b="0" i="0" u="none" strike="noStrike" cap="none">
                 <a:solidFill>
                   <a:schemeClr val="dk1"/>
                 </a:solidFill>
-                <a:latin typeface="Calibri"/>
-                <a:ea typeface="Calibri"/>
-                <a:cs typeface="Calibri"/>
-                <a:sym typeface="Calibri"/>
+                <a:latin typeface="Calibri" panose="020F0502020204030204"/>
+                <a:ea typeface="Calibri" panose="020F0502020204030204"/>
+                <a:cs typeface="Calibri" panose="020F0502020204030204"/>
+                <a:sym typeface="Calibri" panose="020F0502020204030204"/>
               </a:rPr>
             </a:br>
             <a:r>
-              <a:rPr b="0" i="0" lang="en-US" sz="1800" u="none" cap="none" strike="noStrike">
+              <a:rPr lang="en-US" sz="1800" b="0" i="0" u="none" strike="noStrike" cap="none">
                 <a:solidFill>
                   <a:schemeClr val="dk1"/>
                 </a:solidFill>
-                <a:latin typeface="Calibri"/>
-                <a:ea typeface="Calibri"/>
-                <a:cs typeface="Calibri"/>
-                <a:sym typeface="Calibri"/>
+                <a:latin typeface="Calibri" panose="020F0502020204030204"/>
+                <a:ea typeface="Calibri" panose="020F0502020204030204"/>
+                <a:cs typeface="Calibri" panose="020F0502020204030204"/>
+                <a:sym typeface="Calibri" panose="020F0502020204030204"/>
               </a:rPr>
               <a:t>Paper: Zhang, Zohren, Roberts (Oxford-Man Institute, 2019) | arXiv:1911.10107</a:t>
             </a:r>
@@ -6684,12 +6671,12 @@
           </a:ln>
         </p:spPr>
         <p:txBody>
-          <a:bodyPr anchorCtr="0" anchor="t" bIns="91425" lIns="91425" spcFirstLastPara="1" rIns="91425" wrap="square" tIns="91425">
+          <a:bodyPr spcFirstLastPara="1" wrap="square" lIns="91425" tIns="91425" rIns="91425" bIns="91425" anchor="t" anchorCtr="0">
             <a:spAutoFit/>
           </a:bodyPr>
           <a:lstStyle/>
           <a:p>
-            <a:pPr indent="0" lvl="0" marL="0" rtl="0" algn="l">
+            <a:pPr marL="0" lvl="0" indent="0" algn="l" rtl="0">
               <a:spcBef>
                 <a:spcPts val="0"/>
               </a:spcBef>
@@ -6699,29 +6686,29 @@
               <a:buNone/>
             </a:pPr>
             <a:r>
-              <a:rPr b="1" lang="en-US" sz="1800">
+              <a:rPr lang="en-US" sz="1800" b="1">
                 <a:solidFill>
                   <a:srgbClr val="1C1917"/>
                 </a:solidFill>
-                <a:latin typeface="Calibri"/>
-                <a:ea typeface="Calibri"/>
-                <a:cs typeface="Calibri"/>
-                <a:sym typeface="Calibri"/>
+                <a:latin typeface="Calibri" panose="020F0502020204030204"/>
+                <a:ea typeface="Calibri" panose="020F0502020204030204"/>
+                <a:cs typeface="Calibri" panose="020F0502020204030204"/>
+                <a:sym typeface="Calibri" panose="020F0502020204030204"/>
               </a:rPr>
               <a:t>Topic: </a:t>
             </a:r>
-            <a:endParaRPr b="1" sz="1800">
+            <a:endParaRPr sz="1800" b="1">
               <a:solidFill>
                 <a:srgbClr val="1C1917"/>
               </a:solidFill>
-              <a:latin typeface="Calibri"/>
-              <a:ea typeface="Calibri"/>
-              <a:cs typeface="Calibri"/>
-              <a:sym typeface="Calibri"/>
+              <a:latin typeface="Calibri" panose="020F0502020204030204"/>
+              <a:ea typeface="Calibri" panose="020F0502020204030204"/>
+              <a:cs typeface="Calibri" panose="020F0502020204030204"/>
+              <a:sym typeface="Calibri" panose="020F0502020204030204"/>
             </a:endParaRPr>
           </a:p>
           <a:p>
-            <a:pPr indent="0" lvl="0" marL="0" rtl="0" algn="l">
+            <a:pPr marL="0" lvl="0" indent="0" algn="l" rtl="0">
               <a:spcBef>
                 <a:spcPts val="0"/>
               </a:spcBef>
@@ -6735,22 +6722,22 @@
                 <a:solidFill>
                   <a:schemeClr val="dk1"/>
                 </a:solidFill>
-                <a:latin typeface="Calibri"/>
-                <a:ea typeface="Calibri"/>
-                <a:cs typeface="Calibri"/>
-                <a:sym typeface="Calibri"/>
+                <a:latin typeface="Calibri" panose="020F0502020204030204"/>
+                <a:ea typeface="Calibri" panose="020F0502020204030204"/>
+                <a:cs typeface="Calibri" panose="020F0502020204030204"/>
+                <a:sym typeface="Calibri" panose="020F0502020204030204"/>
               </a:rPr>
               <a:t>Deep Reinforcement Learning (DRL) for optimal trading strategy development.</a:t>
             </a:r>
             <a:r>
-              <a:rPr b="1" lang="en-US" sz="1800">
+              <a:rPr lang="en-US" sz="1800" b="1">
                 <a:solidFill>
                   <a:srgbClr val="1C1917"/>
                 </a:solidFill>
-                <a:latin typeface="Calibri"/>
-                <a:ea typeface="Calibri"/>
-                <a:cs typeface="Calibri"/>
-                <a:sym typeface="Calibri"/>
+                <a:latin typeface="Calibri" panose="020F0502020204030204"/>
+                <a:ea typeface="Calibri" panose="020F0502020204030204"/>
+                <a:cs typeface="Calibri" panose="020F0502020204030204"/>
+                <a:sym typeface="Calibri" panose="020F0502020204030204"/>
               </a:rPr>
               <a:t> </a:t>
             </a:r>
@@ -6758,10 +6745,10 @@
               <a:solidFill>
                 <a:schemeClr val="dk1"/>
               </a:solidFill>
-              <a:latin typeface="Calibri"/>
-              <a:ea typeface="Calibri"/>
-              <a:cs typeface="Calibri"/>
-              <a:sym typeface="Calibri"/>
+              <a:latin typeface="Calibri" panose="020F0502020204030204"/>
+              <a:ea typeface="Calibri" panose="020F0502020204030204"/>
+              <a:cs typeface="Calibri" panose="020F0502020204030204"/>
+              <a:sym typeface="Calibri" panose="020F0502020204030204"/>
             </a:endParaRPr>
           </a:p>
         </p:txBody>
@@ -6775,7 +6762,7 @@
 </file>
 
 <file path=ppt/slides/slide2.xml><?xml version="1.0" encoding="utf-8"?>
-<p:sld xmlns:a="http://schemas.openxmlformats.org/drawingml/2006/main" xmlns:r="http://schemas.openxmlformats.org/officeDocument/2006/relationships" xmlns:mc="http://schemas.openxmlformats.org/markup-compatibility/2006" xmlns:mv="urn:schemas-microsoft-com:mac:vml" xmlns:p="http://schemas.openxmlformats.org/presentationml/2006/main" xmlns:c="http://schemas.openxmlformats.org/drawingml/2006/chart" xmlns:dgm="http://schemas.openxmlformats.org/drawingml/2006/diagram" xmlns:o="urn:schemas-microsoft-com:office:office" xmlns:v="urn:schemas-microsoft-com:vml" xmlns:pvml="urn:schemas-microsoft-com:office:powerpoint" xmlns:com="http://schemas.openxmlformats.org/drawingml/2006/compatibility" xmlns:p14="http://schemas.microsoft.com/office/powerpoint/2010/main" xmlns:p15="http://schemas.microsoft.com/office/powerpoint/2012/main" xmlns:ahyp="http://schemas.microsoft.com/office/drawing/2018/hyperlinkcolor">
+<p:sld xmlns:a="http://schemas.openxmlformats.org/drawingml/2006/main" xmlns:r="http://schemas.openxmlformats.org/officeDocument/2006/relationships" xmlns:p="http://schemas.openxmlformats.org/presentationml/2006/main">
   <p:cSld>
     <p:spTree>
       <p:nvGrpSpPr>
@@ -6811,12 +6798,12 @@
           </a:ln>
         </p:spPr>
         <p:txBody>
-          <a:bodyPr anchorCtr="0" anchor="ctr" bIns="45700" lIns="91425" spcFirstLastPara="1" rIns="91425" wrap="square" tIns="45700">
+          <a:bodyPr spcFirstLastPara="1" wrap="square" lIns="91425" tIns="45700" rIns="91425" bIns="45700" anchor="ctr" anchorCtr="0">
             <a:noAutofit/>
           </a:bodyPr>
           <a:lstStyle/>
           <a:p>
-            <a:pPr indent="0" lvl="0" marL="0" marR="0" rtl="0" algn="l">
+            <a:pPr marL="0" marR="0" lvl="0" indent="0" algn="l" rtl="0">
               <a:spcBef>
                 <a:spcPts val="0"/>
               </a:spcBef>
@@ -6827,21 +6814,21 @@
                 <a:srgbClr val="047857"/>
               </a:buClr>
               <a:buSzPts val="2400"/>
-              <a:buFont typeface="Calibri"/>
+              <a:buFont typeface="Calibri" panose="020F0502020204030204"/>
               <a:buNone/>
             </a:pPr>
             <a:r>
-              <a:rPr b="1" lang="en-US" sz="2400">
+              <a:rPr lang="en-US" sz="2400" b="1">
                 <a:solidFill>
                   <a:srgbClr val="3D85C6"/>
                 </a:solidFill>
                 <a:highlight>
                   <a:schemeClr val="lt1"/>
                 </a:highlight>
-                <a:latin typeface="Calibri"/>
-                <a:ea typeface="Calibri"/>
-                <a:cs typeface="Calibri"/>
-                <a:sym typeface="Calibri"/>
+                <a:latin typeface="Calibri" panose="020F0502020204030204"/>
+                <a:ea typeface="Calibri" panose="020F0502020204030204"/>
+                <a:cs typeface="Calibri" panose="020F0502020204030204"/>
+                <a:sym typeface="Calibri" panose="020F0502020204030204"/>
               </a:rPr>
               <a:t>Overview of Literature and Methods</a:t>
             </a:r>
@@ -6852,10 +6839,10 @@
               <a:highlight>
                 <a:schemeClr val="lt1"/>
               </a:highlight>
-              <a:latin typeface="Calibri"/>
-              <a:ea typeface="Calibri"/>
-              <a:cs typeface="Calibri"/>
-              <a:sym typeface="Calibri"/>
+              <a:latin typeface="Calibri" panose="020F0502020204030204"/>
+              <a:ea typeface="Calibri" panose="020F0502020204030204"/>
+              <a:cs typeface="Calibri" panose="020F0502020204030204"/>
+              <a:sym typeface="Calibri" panose="020F0502020204030204"/>
             </a:endParaRPr>
           </a:p>
         </p:txBody>
@@ -6880,12 +6867,12 @@
           </a:ln>
         </p:spPr>
         <p:txBody>
-          <a:bodyPr anchorCtr="0" anchor="ctr" bIns="45700" lIns="91425" spcFirstLastPara="1" rIns="91425" wrap="square" tIns="45700">
+          <a:bodyPr spcFirstLastPara="1" wrap="square" lIns="91425" tIns="45700" rIns="91425" bIns="45700" anchor="ctr" anchorCtr="0">
             <a:noAutofit/>
           </a:bodyPr>
           <a:lstStyle/>
           <a:p>
-            <a:pPr indent="0" lvl="0" marL="0" marR="0" rtl="0" algn="l">
+            <a:pPr marL="0" marR="0" lvl="0" indent="0" algn="l" rtl="0">
               <a:spcBef>
                 <a:spcPts val="0"/>
               </a:spcBef>
@@ -6896,18 +6883,18 @@
                 <a:srgbClr val="1C1917"/>
               </a:buClr>
               <a:buSzPts val="1800"/>
-              <a:buFont typeface="Calibri"/>
+              <a:buFont typeface="Calibri" panose="020F0502020204030204"/>
               <a:buNone/>
             </a:pPr>
             <a:r>
-              <a:rPr b="1" lang="en-US" sz="1800">
+              <a:rPr lang="en-US" sz="1800" b="1">
                 <a:solidFill>
                   <a:srgbClr val="1C1917"/>
                 </a:solidFill>
-                <a:latin typeface="Calibri"/>
-                <a:ea typeface="Calibri"/>
-                <a:cs typeface="Calibri"/>
-                <a:sym typeface="Calibri"/>
+                <a:latin typeface="Calibri" panose="020F0502020204030204"/>
+                <a:ea typeface="Calibri" panose="020F0502020204030204"/>
+                <a:cs typeface="Calibri" panose="020F0502020204030204"/>
+                <a:sym typeface="Calibri" panose="020F0502020204030204"/>
               </a:rPr>
               <a:t>Traditional Methods</a:t>
             </a:r>
@@ -6915,10 +6902,10 @@
               <a:solidFill>
                 <a:srgbClr val="7F7F7F"/>
               </a:solidFill>
-              <a:latin typeface="Calibri"/>
-              <a:ea typeface="Calibri"/>
-              <a:cs typeface="Calibri"/>
-              <a:sym typeface="Calibri"/>
+              <a:latin typeface="Calibri" panose="020F0502020204030204"/>
+              <a:ea typeface="Calibri" panose="020F0502020204030204"/>
+              <a:cs typeface="Calibri" panose="020F0502020204030204"/>
+              <a:sym typeface="Calibri" panose="020F0502020204030204"/>
             </a:endParaRPr>
           </a:p>
         </p:txBody>
@@ -6943,12 +6930,12 @@
           </a:ln>
         </p:spPr>
         <p:txBody>
-          <a:bodyPr anchorCtr="0" anchor="ctr" bIns="45700" lIns="91425" spcFirstLastPara="1" rIns="91425" wrap="square" tIns="45700">
+          <a:bodyPr spcFirstLastPara="1" wrap="square" lIns="91425" tIns="45700" rIns="91425" bIns="45700" anchor="ctr" anchorCtr="0">
             <a:noAutofit/>
           </a:bodyPr>
           <a:lstStyle/>
           <a:p>
-            <a:pPr indent="-285750" lvl="0" marL="285750" marR="0" rtl="0" algn="l">
+            <a:pPr marL="285750" marR="0" lvl="0" indent="-285750" algn="l" rtl="0">
               <a:spcBef>
                 <a:spcPts val="0"/>
               </a:spcBef>
@@ -6959,7 +6946,7 @@
                 <a:srgbClr val="000000"/>
               </a:buClr>
               <a:buSzPts val="1400"/>
-              <a:buFont typeface="Arial"/>
+              <a:buFont typeface="Arial" panose="020B0604020202090204"/>
               <a:buChar char="•"/>
             </a:pPr>
             <a:r>
@@ -6967,17 +6954,25 @@
                 <a:solidFill>
                   <a:srgbClr val="000000"/>
                 </a:solidFill>
-                <a:latin typeface="Calibri"/>
-                <a:ea typeface="Calibri"/>
-                <a:cs typeface="Calibri"/>
-                <a:sym typeface="Calibri"/>
+                <a:latin typeface="Calibri" panose="020F0502020204030204"/>
+                <a:ea typeface="Calibri" panose="020F0502020204030204"/>
+                <a:cs typeface="Calibri" panose="020F0502020204030204"/>
+                <a:sym typeface="Calibri" panose="020F0502020204030204"/>
               </a:rPr>
               <a:t>Fundamental &amp; Technical Analysis: Often lack precise timing for entering and exiting trades, leading to potential drawdowns.</a:t>
             </a:r>
-            <a:endParaRPr/>
+            <a:endParaRPr lang="en-US" sz="1400">
+              <a:solidFill>
+                <a:srgbClr val="000000"/>
+              </a:solidFill>
+              <a:latin typeface="Calibri" panose="020F0502020204030204"/>
+              <a:ea typeface="Calibri" panose="020F0502020204030204"/>
+              <a:cs typeface="Calibri" panose="020F0502020204030204"/>
+              <a:sym typeface="Calibri" panose="020F0502020204030204"/>
+            </a:endParaRPr>
           </a:p>
           <a:p>
-            <a:pPr indent="-285750" lvl="0" marL="285750" marR="0" rtl="0" algn="l">
+            <a:pPr marL="285750" marR="0" lvl="0" indent="-285750" algn="l" rtl="0">
               <a:spcBef>
                 <a:spcPts val="0"/>
               </a:spcBef>
@@ -6988,7 +6983,7 @@
                 <a:srgbClr val="000000"/>
               </a:buClr>
               <a:buSzPts val="1400"/>
-              <a:buFont typeface="Arial"/>
+              <a:buFont typeface="Arial" panose="020B0604020202090204"/>
               <a:buChar char="•"/>
             </a:pPr>
             <a:r>
@@ -6996,17 +6991,25 @@
                 <a:solidFill>
                   <a:srgbClr val="000000"/>
                 </a:solidFill>
-                <a:latin typeface="Calibri"/>
-                <a:ea typeface="Calibri"/>
-                <a:cs typeface="Calibri"/>
-                <a:sym typeface="Calibri"/>
+                <a:latin typeface="Calibri" panose="020F0502020204030204"/>
+                <a:ea typeface="Calibri" panose="020F0502020204030204"/>
+                <a:cs typeface="Calibri" panose="020F0502020204030204"/>
+                <a:sym typeface="Calibri" panose="020F0502020204030204"/>
               </a:rPr>
               <a:t>Time-Series Momentum: Highly effective in trending markets, but severely vulnerable to sideways or mean-reverting markets (like FX).</a:t>
             </a:r>
-            <a:endParaRPr/>
+            <a:endParaRPr lang="en-US" sz="1400">
+              <a:solidFill>
+                <a:srgbClr val="000000"/>
+              </a:solidFill>
+              <a:latin typeface="Calibri" panose="020F0502020204030204"/>
+              <a:ea typeface="Calibri" panose="020F0502020204030204"/>
+              <a:cs typeface="Calibri" panose="020F0502020204030204"/>
+              <a:sym typeface="Calibri" panose="020F0502020204030204"/>
+            </a:endParaRPr>
           </a:p>
           <a:p>
-            <a:pPr indent="-285750" lvl="0" marL="285750" marR="0" rtl="0" algn="l">
+            <a:pPr marL="285750" marR="0" lvl="0" indent="-285750" algn="l" rtl="0">
               <a:spcBef>
                 <a:spcPts val="0"/>
               </a:spcBef>
@@ -7017,7 +7020,7 @@
                 <a:srgbClr val="000000"/>
               </a:buClr>
               <a:buSzPts val="1400"/>
-              <a:buFont typeface="Arial"/>
+              <a:buFont typeface="Arial" panose="020B0604020202090204"/>
               <a:buChar char="•"/>
             </a:pPr>
             <a:r>
@@ -7025,10 +7028,10 @@
                 <a:solidFill>
                   <a:srgbClr val="000000"/>
                 </a:solidFill>
-                <a:latin typeface="Calibri"/>
-                <a:ea typeface="Calibri"/>
-                <a:cs typeface="Calibri"/>
-                <a:sym typeface="Calibri"/>
+                <a:latin typeface="Calibri" panose="020F0502020204030204"/>
+                <a:ea typeface="Calibri" panose="020F0502020204030204"/>
+                <a:cs typeface="Calibri" panose="020F0502020204030204"/>
+                <a:sym typeface="Calibri" panose="020F0502020204030204"/>
               </a:rPr>
               <a:t>Classical RL (Q-Learning): Frequently relies on discrete action spaces (fully long/short), which is highly risky during volatile periods.</a:t>
             </a:r>
@@ -7036,10 +7039,10 @@
               <a:solidFill>
                 <a:srgbClr val="000000"/>
               </a:solidFill>
-              <a:latin typeface="Calibri"/>
-              <a:ea typeface="Calibri"/>
-              <a:cs typeface="Calibri"/>
-              <a:sym typeface="Calibri"/>
+              <a:latin typeface="Calibri" panose="020F0502020204030204"/>
+              <a:ea typeface="Calibri" panose="020F0502020204030204"/>
+              <a:cs typeface="Calibri" panose="020F0502020204030204"/>
+              <a:sym typeface="Calibri" panose="020F0502020204030204"/>
             </a:endParaRPr>
           </a:p>
         </p:txBody>
@@ -7064,12 +7067,12 @@
           </a:ln>
         </p:spPr>
         <p:txBody>
-          <a:bodyPr anchorCtr="0" anchor="ctr" bIns="45700" lIns="91425" spcFirstLastPara="1" rIns="91425" wrap="square" tIns="45700">
+          <a:bodyPr spcFirstLastPara="1" wrap="square" lIns="91425" tIns="45700" rIns="91425" bIns="45700" anchor="ctr" anchorCtr="0">
             <a:noAutofit/>
           </a:bodyPr>
           <a:lstStyle/>
           <a:p>
-            <a:pPr indent="0" lvl="0" marL="0" marR="0" rtl="0" algn="l">
+            <a:pPr marL="0" marR="0" lvl="0" indent="0" algn="l" rtl="0">
               <a:spcBef>
                 <a:spcPts val="0"/>
               </a:spcBef>
@@ -7080,18 +7083,18 @@
                 <a:srgbClr val="1C1917"/>
               </a:buClr>
               <a:buSzPts val="1800"/>
-              <a:buFont typeface="Calibri"/>
+              <a:buFont typeface="Calibri" panose="020F0502020204030204"/>
               <a:buNone/>
             </a:pPr>
             <a:r>
-              <a:rPr b="1" lang="en-US" sz="1800">
+              <a:rPr lang="en-US" sz="1800" b="1">
                 <a:solidFill>
                   <a:srgbClr val="1C1917"/>
                 </a:solidFill>
-                <a:latin typeface="Calibri"/>
-                <a:ea typeface="Calibri"/>
-                <a:cs typeface="Calibri"/>
-                <a:sym typeface="Calibri"/>
+                <a:latin typeface="Calibri" panose="020F0502020204030204"/>
+                <a:ea typeface="Calibri" panose="020F0502020204030204"/>
+                <a:cs typeface="Calibri" panose="020F0502020204030204"/>
+                <a:sym typeface="Calibri" panose="020F0502020204030204"/>
               </a:rPr>
               <a:t>Proposed RL Methods</a:t>
             </a:r>
@@ -7099,10 +7102,10 @@
               <a:solidFill>
                 <a:srgbClr val="7F7F7F"/>
               </a:solidFill>
-              <a:latin typeface="Calibri"/>
-              <a:ea typeface="Calibri"/>
-              <a:cs typeface="Calibri"/>
-              <a:sym typeface="Calibri"/>
+              <a:latin typeface="Calibri" panose="020F0502020204030204"/>
+              <a:ea typeface="Calibri" panose="020F0502020204030204"/>
+              <a:cs typeface="Calibri" panose="020F0502020204030204"/>
+              <a:sym typeface="Calibri" panose="020F0502020204030204"/>
             </a:endParaRPr>
           </a:p>
         </p:txBody>
@@ -7127,12 +7130,12 @@
           </a:ln>
         </p:spPr>
         <p:txBody>
-          <a:bodyPr anchorCtr="0" anchor="ctr" bIns="45700" lIns="91425" spcFirstLastPara="1" rIns="91425" wrap="square" tIns="45700">
+          <a:bodyPr spcFirstLastPara="1" wrap="square" lIns="91425" tIns="45700" rIns="91425" bIns="45700" anchor="ctr" anchorCtr="0">
             <a:noAutofit/>
           </a:bodyPr>
           <a:lstStyle/>
           <a:p>
-            <a:pPr indent="-285750" lvl="0" marL="285750" marR="0" rtl="0" algn="l">
+            <a:pPr marL="285750" marR="0" lvl="0" indent="-285750" algn="l" rtl="0">
               <a:spcBef>
                 <a:spcPts val="0"/>
               </a:spcBef>
@@ -7143,7 +7146,7 @@
                 <a:srgbClr val="1C1917"/>
               </a:buClr>
               <a:buSzPts val="1400"/>
-              <a:buFont typeface="Arial"/>
+              <a:buFont typeface="Arial" panose="020B0604020202090204"/>
               <a:buChar char="•"/>
             </a:pPr>
             <a:r>
@@ -7151,10 +7154,10 @@
                 <a:solidFill>
                   <a:srgbClr val="1C1917"/>
                 </a:solidFill>
-                <a:latin typeface="Calibri"/>
-                <a:ea typeface="Calibri"/>
-                <a:cs typeface="Calibri"/>
-                <a:sym typeface="Calibri"/>
+                <a:latin typeface="Calibri" panose="020F0502020204030204"/>
+                <a:ea typeface="Calibri" panose="020F0502020204030204"/>
+                <a:cs typeface="Calibri" panose="020F0502020204030204"/>
+                <a:sym typeface="Calibri" panose="020F0502020204030204"/>
               </a:rPr>
               <a:t>Deep Q-Networks (DQN): </a:t>
             </a:r>
@@ -7163,17 +7166,25 @@
                 <a:solidFill>
                   <a:srgbClr val="000000"/>
                 </a:solidFill>
-                <a:latin typeface="Calibri"/>
-                <a:ea typeface="Calibri"/>
-                <a:cs typeface="Calibri"/>
-                <a:sym typeface="Calibri"/>
+                <a:latin typeface="Calibri" panose="020F0502020204030204"/>
+                <a:ea typeface="Calibri" panose="020F0502020204030204"/>
+                <a:cs typeface="Calibri" panose="020F0502020204030204"/>
+                <a:sym typeface="Calibri" panose="020F0502020204030204"/>
               </a:rPr>
               <a:t>Evaluates the value of discrete actions in a given state.</a:t>
             </a:r>
-            <a:endParaRPr/>
+            <a:endParaRPr lang="en-US" sz="1400">
+              <a:solidFill>
+                <a:srgbClr val="000000"/>
+              </a:solidFill>
+              <a:latin typeface="Calibri" panose="020F0502020204030204"/>
+              <a:ea typeface="Calibri" panose="020F0502020204030204"/>
+              <a:cs typeface="Calibri" panose="020F0502020204030204"/>
+              <a:sym typeface="Calibri" panose="020F0502020204030204"/>
+            </a:endParaRPr>
           </a:p>
           <a:p>
-            <a:pPr indent="-285750" lvl="0" marL="285750" marR="0" rtl="0" algn="l">
+            <a:pPr marL="285750" marR="0" lvl="0" indent="-285750" algn="l" rtl="0">
               <a:spcBef>
                 <a:spcPts val="0"/>
               </a:spcBef>
@@ -7184,7 +7195,7 @@
                 <a:srgbClr val="1C1917"/>
               </a:buClr>
               <a:buSzPts val="1400"/>
-              <a:buFont typeface="Arial"/>
+              <a:buFont typeface="Arial" panose="020B0604020202090204"/>
               <a:buChar char="•"/>
             </a:pPr>
             <a:r>
@@ -7192,10 +7203,10 @@
                 <a:solidFill>
                   <a:srgbClr val="1C1917"/>
                 </a:solidFill>
-                <a:latin typeface="Calibri"/>
-                <a:ea typeface="Calibri"/>
-                <a:cs typeface="Calibri"/>
-                <a:sym typeface="Calibri"/>
+                <a:latin typeface="Calibri" panose="020F0502020204030204"/>
+                <a:ea typeface="Calibri" panose="020F0502020204030204"/>
+                <a:cs typeface="Calibri" panose="020F0502020204030204"/>
+                <a:sym typeface="Calibri" panose="020F0502020204030204"/>
               </a:rPr>
               <a:t>Policy Gradients (PG): </a:t>
             </a:r>
@@ -7204,17 +7215,25 @@
                 <a:solidFill>
                   <a:srgbClr val="000000"/>
                 </a:solidFill>
-                <a:latin typeface="Calibri"/>
-                <a:ea typeface="Calibri"/>
-                <a:cs typeface="Calibri"/>
-                <a:sym typeface="Calibri"/>
+                <a:latin typeface="Calibri" panose="020F0502020204030204"/>
+                <a:ea typeface="Calibri" panose="020F0502020204030204"/>
+                <a:cs typeface="Calibri" panose="020F0502020204030204"/>
+                <a:sym typeface="Calibri" panose="020F0502020204030204"/>
               </a:rPr>
               <a:t>Optimizes the policy directly, useful for continuous action spaces.</a:t>
             </a:r>
-            <a:endParaRPr/>
+            <a:endParaRPr lang="en-US" sz="1400">
+              <a:solidFill>
+                <a:srgbClr val="000000"/>
+              </a:solidFill>
+              <a:latin typeface="Calibri" panose="020F0502020204030204"/>
+              <a:ea typeface="Calibri" panose="020F0502020204030204"/>
+              <a:cs typeface="Calibri" panose="020F0502020204030204"/>
+              <a:sym typeface="Calibri" panose="020F0502020204030204"/>
+            </a:endParaRPr>
           </a:p>
           <a:p>
-            <a:pPr indent="-285750" lvl="0" marL="285750" marR="0" rtl="0" algn="l">
+            <a:pPr marL="285750" marR="0" lvl="0" indent="-285750" algn="l" rtl="0">
               <a:spcBef>
                 <a:spcPts val="0"/>
               </a:spcBef>
@@ -7225,7 +7244,7 @@
                 <a:srgbClr val="1C1917"/>
               </a:buClr>
               <a:buSzPts val="1400"/>
-              <a:buFont typeface="Arial"/>
+              <a:buFont typeface="Arial" panose="020B0604020202090204"/>
               <a:buChar char="•"/>
             </a:pPr>
             <a:r>
@@ -7233,10 +7252,10 @@
                 <a:solidFill>
                   <a:srgbClr val="1C1917"/>
                 </a:solidFill>
-                <a:latin typeface="Calibri"/>
-                <a:ea typeface="Calibri"/>
-                <a:cs typeface="Calibri"/>
-                <a:sym typeface="Calibri"/>
+                <a:latin typeface="Calibri" panose="020F0502020204030204"/>
+                <a:ea typeface="Calibri" panose="020F0502020204030204"/>
+                <a:cs typeface="Calibri" panose="020F0502020204030204"/>
+                <a:sym typeface="Calibri" panose="020F0502020204030204"/>
               </a:rPr>
               <a:t>Advantage Actor-Critic (A2C): </a:t>
             </a:r>
@@ -7245,10 +7264,10 @@
                 <a:solidFill>
                   <a:srgbClr val="000000"/>
                 </a:solidFill>
-                <a:latin typeface="Calibri"/>
-                <a:ea typeface="Calibri"/>
-                <a:cs typeface="Calibri"/>
-                <a:sym typeface="Calibri"/>
+                <a:latin typeface="Calibri" panose="020F0502020204030204"/>
+                <a:ea typeface="Calibri" panose="020F0502020204030204"/>
+                <a:cs typeface="Calibri" panose="020F0502020204030204"/>
+                <a:sym typeface="Calibri" panose="020F0502020204030204"/>
               </a:rPr>
               <a:t>Updates policies in real-time by combining an 'actor' network with a 'critic' network.</a:t>
             </a:r>
@@ -7256,10 +7275,10 @@
               <a:solidFill>
                 <a:srgbClr val="000000"/>
               </a:solidFill>
-              <a:latin typeface="Calibri"/>
-              <a:ea typeface="Calibri"/>
-              <a:cs typeface="Calibri"/>
-              <a:sym typeface="Calibri"/>
+              <a:latin typeface="Calibri" panose="020F0502020204030204"/>
+              <a:ea typeface="Calibri" panose="020F0502020204030204"/>
+              <a:cs typeface="Calibri" panose="020F0502020204030204"/>
+              <a:sym typeface="Calibri" panose="020F0502020204030204"/>
             </a:endParaRPr>
           </a:p>
         </p:txBody>
@@ -7271,9 +7290,7 @@
           <p:nvPr/>
         </p:nvPicPr>
         <p:blipFill>
-          <a:blip r:embed="rId3">
-            <a:alphaModFix/>
-          </a:blip>
+          <a:blip r:embed="rId1"/>
           <a:stretch>
             <a:fillRect/>
           </a:stretch>
@@ -7312,12 +7329,12 @@
           </a:ln>
         </p:spPr>
         <p:txBody>
-          <a:bodyPr anchorCtr="0" anchor="t" bIns="91425" lIns="91425" spcFirstLastPara="1" rIns="91425" wrap="square" tIns="91425">
+          <a:bodyPr spcFirstLastPara="1" wrap="square" lIns="91425" tIns="91425" rIns="91425" bIns="91425" anchor="t" anchorCtr="0">
             <a:noAutofit/>
           </a:bodyPr>
           <a:lstStyle/>
           <a:p>
-            <a:pPr indent="0" lvl="0" marL="0" rtl="0" algn="l">
+            <a:pPr marL="0" lvl="0" indent="0" algn="l" rtl="0">
               <a:lnSpc>
                 <a:spcPct val="115000"/>
               </a:lnSpc>
@@ -7331,22 +7348,22 @@
             </a:pPr>
             <a:r>
               <a:rPr lang="en-US">
-                <a:latin typeface="Calibri"/>
-                <a:ea typeface="Calibri"/>
-                <a:cs typeface="Calibri"/>
-                <a:sym typeface="Calibri"/>
+                <a:latin typeface="Calibri" panose="020F0502020204030204"/>
+                <a:ea typeface="Calibri" panose="020F0502020204030204"/>
+                <a:cs typeface="Calibri" panose="020F0502020204030204"/>
+                <a:sym typeface="Calibri" panose="020F0502020204030204"/>
               </a:rPr>
               <a:t>Figure 1: Cumulative trade returns for </a:t>
             </a:r>
             <a:endParaRPr>
-              <a:latin typeface="Calibri"/>
-              <a:ea typeface="Calibri"/>
-              <a:cs typeface="Calibri"/>
-              <a:sym typeface="Calibri"/>
+              <a:latin typeface="Calibri" panose="020F0502020204030204"/>
+              <a:ea typeface="Calibri" panose="020F0502020204030204"/>
+              <a:cs typeface="Calibri" panose="020F0502020204030204"/>
+              <a:sym typeface="Calibri" panose="020F0502020204030204"/>
             </a:endParaRPr>
           </a:p>
           <a:p>
-            <a:pPr indent="0" lvl="0" marL="0" rtl="0" algn="l">
+            <a:pPr marL="0" lvl="0" indent="0" algn="l" rtl="0">
               <a:lnSpc>
                 <a:spcPct val="115000"/>
               </a:lnSpc>
@@ -7360,22 +7377,22 @@
             </a:pPr>
             <a:r>
               <a:rPr lang="en-US">
-                <a:latin typeface="Calibri"/>
-                <a:ea typeface="Calibri"/>
-                <a:cs typeface="Calibri"/>
-                <a:sym typeface="Calibri"/>
+                <a:latin typeface="Calibri" panose="020F0502020204030204"/>
+                <a:ea typeface="Calibri" panose="020F0502020204030204"/>
+                <a:cs typeface="Calibri" panose="020F0502020204030204"/>
+                <a:sym typeface="Calibri" panose="020F0502020204030204"/>
               </a:rPr>
               <a:t>First row: commodity, equity index and fixed income; </a:t>
             </a:r>
             <a:endParaRPr>
-              <a:latin typeface="Calibri"/>
-              <a:ea typeface="Calibri"/>
-              <a:cs typeface="Calibri"/>
-              <a:sym typeface="Calibri"/>
+              <a:latin typeface="Calibri" panose="020F0502020204030204"/>
+              <a:ea typeface="Calibri" panose="020F0502020204030204"/>
+              <a:cs typeface="Calibri" panose="020F0502020204030204"/>
+              <a:sym typeface="Calibri" panose="020F0502020204030204"/>
             </a:endParaRPr>
           </a:p>
           <a:p>
-            <a:pPr indent="0" lvl="0" marL="0" rtl="0" algn="l">
+            <a:pPr marL="0" lvl="0" indent="0" algn="l" rtl="0">
               <a:lnSpc>
                 <a:spcPct val="115000"/>
               </a:lnSpc>
@@ -7389,10 +7406,10 @@
             </a:pPr>
             <a:r>
               <a:rPr lang="en-US">
-                <a:latin typeface="Calibri"/>
-                <a:ea typeface="Calibri"/>
-                <a:cs typeface="Calibri"/>
-                <a:sym typeface="Calibri"/>
+                <a:latin typeface="Calibri" panose="020F0502020204030204"/>
+                <a:ea typeface="Calibri" panose="020F0502020204030204"/>
+                <a:cs typeface="Calibri" panose="020F0502020204030204"/>
+                <a:sym typeface="Calibri" panose="020F0502020204030204"/>
               </a:rPr>
               <a:t>Second row: FX and the portfolio of using all contracts.</a:t>
             </a:r>
@@ -7400,10 +7417,10 @@
               <a:solidFill>
                 <a:schemeClr val="accent3"/>
               </a:solidFill>
-              <a:latin typeface="Calibri"/>
-              <a:ea typeface="Calibri"/>
-              <a:cs typeface="Calibri"/>
-              <a:sym typeface="Calibri"/>
+              <a:latin typeface="Calibri" panose="020F0502020204030204"/>
+              <a:ea typeface="Calibri" panose="020F0502020204030204"/>
+              <a:cs typeface="Calibri" panose="020F0502020204030204"/>
+              <a:sym typeface="Calibri" panose="020F0502020204030204"/>
             </a:endParaRPr>
           </a:p>
         </p:txBody>
@@ -7417,7 +7434,7 @@
 </file>
 
 <file path=ppt/slides/slide3.xml><?xml version="1.0" encoding="utf-8"?>
-<p:sld xmlns:a="http://schemas.openxmlformats.org/drawingml/2006/main" xmlns:r="http://schemas.openxmlformats.org/officeDocument/2006/relationships" xmlns:mc="http://schemas.openxmlformats.org/markup-compatibility/2006" xmlns:mv="urn:schemas-microsoft-com:mac:vml" xmlns:p="http://schemas.openxmlformats.org/presentationml/2006/main" xmlns:c="http://schemas.openxmlformats.org/drawingml/2006/chart" xmlns:dgm="http://schemas.openxmlformats.org/drawingml/2006/diagram" xmlns:o="urn:schemas-microsoft-com:office:office" xmlns:v="urn:schemas-microsoft-com:vml" xmlns:pvml="urn:schemas-microsoft-com:office:powerpoint" xmlns:com="http://schemas.openxmlformats.org/drawingml/2006/compatibility" xmlns:p14="http://schemas.microsoft.com/office/powerpoint/2010/main" xmlns:p15="http://schemas.microsoft.com/office/powerpoint/2012/main" xmlns:ahyp="http://schemas.microsoft.com/office/drawing/2018/hyperlinkcolor">
+<p:sld xmlns:a="http://schemas.openxmlformats.org/drawingml/2006/main" xmlns:r="http://schemas.openxmlformats.org/officeDocument/2006/relationships" xmlns:p="http://schemas.openxmlformats.org/presentationml/2006/main">
   <p:cSld>
     <p:spTree>
       <p:nvGrpSpPr>
@@ -7455,12 +7472,12 @@
           </a:ln>
         </p:spPr>
         <p:txBody>
-          <a:bodyPr anchorCtr="0" anchor="ctr" bIns="45700" lIns="91425" spcFirstLastPara="1" rIns="91425" wrap="square" tIns="45700">
+          <a:bodyPr spcFirstLastPara="1" wrap="square" lIns="91425" tIns="45700" rIns="91425" bIns="45700" anchor="ctr" anchorCtr="0">
             <a:normAutofit/>
           </a:bodyPr>
           <a:lstStyle/>
           <a:p>
-            <a:pPr indent="0" lvl="0" marL="0" rtl="0" algn="l">
+            <a:pPr marL="0" lvl="0" indent="0" algn="l" rtl="0">
               <a:spcBef>
                 <a:spcPts val="0"/>
               </a:spcBef>
@@ -7471,18 +7488,18 @@
                 <a:srgbClr val="047857"/>
               </a:buClr>
               <a:buSzPts val="2400"/>
-              <a:buFont typeface="Calibri"/>
+              <a:buFont typeface="Calibri" panose="020F0502020204030204"/>
               <a:buNone/>
             </a:pPr>
             <a:r>
-              <a:rPr b="1" lang="en-US" sz="2400">
+              <a:rPr lang="en-US" sz="2400" b="1">
                 <a:solidFill>
                   <a:srgbClr val="2A75B8"/>
                 </a:solidFill>
-                <a:latin typeface="Calibri"/>
-                <a:ea typeface="Calibri"/>
-                <a:cs typeface="Calibri"/>
-                <a:sym typeface="Calibri"/>
+                <a:latin typeface="Calibri" panose="020F0502020204030204"/>
+                <a:ea typeface="Calibri" panose="020F0502020204030204"/>
+                <a:cs typeface="Calibri" panose="020F0502020204030204"/>
+                <a:sym typeface="Calibri" panose="020F0502020204030204"/>
               </a:rPr>
               <a:t>Strategy Overview</a:t>
             </a:r>
@@ -7490,10 +7507,10 @@
               <a:solidFill>
                 <a:srgbClr val="2A75B8"/>
               </a:solidFill>
-              <a:latin typeface="Calibri"/>
-              <a:ea typeface="Calibri"/>
-              <a:cs typeface="Calibri"/>
-              <a:sym typeface="Calibri"/>
+              <a:latin typeface="Calibri" panose="020F0502020204030204"/>
+              <a:ea typeface="Calibri" panose="020F0502020204030204"/>
+              <a:cs typeface="Calibri" panose="020F0502020204030204"/>
+              <a:sym typeface="Calibri" panose="020F0502020204030204"/>
             </a:endParaRPr>
           </a:p>
         </p:txBody>
@@ -7518,12 +7535,12 @@
           </a:ln>
         </p:spPr>
         <p:txBody>
-          <a:bodyPr anchorCtr="0" anchor="ctr" bIns="45700" lIns="91425" spcFirstLastPara="1" rIns="91425" wrap="square" tIns="45700">
+          <a:bodyPr spcFirstLastPara="1" wrap="square" lIns="91425" tIns="45700" rIns="91425" bIns="45700" anchor="ctr" anchorCtr="0">
             <a:noAutofit/>
           </a:bodyPr>
           <a:lstStyle/>
           <a:p>
-            <a:pPr indent="0" lvl="0" marL="0" marR="0" rtl="0" algn="l">
+            <a:pPr marL="0" marR="0" lvl="0" indent="0" algn="l" rtl="0">
               <a:spcBef>
                 <a:spcPts val="0"/>
               </a:spcBef>
@@ -7534,18 +7551,18 @@
                 <a:srgbClr val="1C1917"/>
               </a:buClr>
               <a:buSzPts val="1600"/>
-              <a:buFont typeface="Calibri"/>
+              <a:buFont typeface="Calibri" panose="020F0502020204030204"/>
               <a:buNone/>
             </a:pPr>
             <a:r>
-              <a:rPr b="1" lang="en-US" sz="1600">
+              <a:rPr lang="en-US" sz="1600" b="1">
                 <a:solidFill>
                   <a:srgbClr val="1C1917"/>
                 </a:solidFill>
-                <a:latin typeface="Calibri"/>
-                <a:ea typeface="Calibri"/>
-                <a:cs typeface="Calibri"/>
-                <a:sym typeface="Calibri"/>
+                <a:latin typeface="Calibri" panose="020F0502020204030204"/>
+                <a:ea typeface="Calibri" panose="020F0502020204030204"/>
+                <a:cs typeface="Calibri" panose="020F0502020204030204"/>
+                <a:sym typeface="Calibri" panose="020F0502020204030204"/>
               </a:rPr>
               <a:t>1. Data</a:t>
             </a:r>
@@ -7553,10 +7570,10 @@
               <a:solidFill>
                 <a:srgbClr val="000000"/>
               </a:solidFill>
-              <a:latin typeface="Calibri"/>
-              <a:ea typeface="Calibri"/>
-              <a:cs typeface="Calibri"/>
-              <a:sym typeface="Calibri"/>
+              <a:latin typeface="Calibri" panose="020F0502020204030204"/>
+              <a:ea typeface="Calibri" panose="020F0502020204030204"/>
+              <a:cs typeface="Calibri" panose="020F0502020204030204"/>
+              <a:sym typeface="Calibri" panose="020F0502020204030204"/>
             </a:endParaRPr>
           </a:p>
         </p:txBody>
@@ -7581,12 +7598,12 @@
           </a:ln>
         </p:spPr>
         <p:txBody>
-          <a:bodyPr anchorCtr="0" anchor="ctr" bIns="45700" lIns="91425" spcFirstLastPara="1" rIns="91425" wrap="square" tIns="45700">
+          <a:bodyPr spcFirstLastPara="1" wrap="square" lIns="91425" tIns="45700" rIns="91425" bIns="45700" anchor="ctr" anchorCtr="0">
             <a:noAutofit/>
           </a:bodyPr>
           <a:lstStyle/>
           <a:p>
-            <a:pPr indent="0" lvl="0" marL="0" marR="0" rtl="0" algn="l">
+            <a:pPr marL="0" marR="0" lvl="0" indent="0" algn="l" rtl="0">
               <a:spcBef>
                 <a:spcPts val="0"/>
               </a:spcBef>
@@ -7597,7 +7614,7 @@
                 <a:srgbClr val="1C1917"/>
               </a:buClr>
               <a:buSzPts val="1600"/>
-              <a:buFont typeface="Calibri"/>
+              <a:buFont typeface="Calibri" panose="020F0502020204030204"/>
               <a:buNone/>
             </a:pPr>
             <a:r>
@@ -7605,10 +7622,10 @@
                 <a:solidFill>
                   <a:srgbClr val="1C1917"/>
                 </a:solidFill>
-                <a:latin typeface="Calibri"/>
-                <a:ea typeface="Calibri"/>
-                <a:cs typeface="Calibri"/>
-                <a:sym typeface="Calibri"/>
+                <a:latin typeface="Calibri" panose="020F0502020204030204"/>
+                <a:ea typeface="Calibri" panose="020F0502020204030204"/>
+                <a:cs typeface="Calibri" panose="020F0502020204030204"/>
+                <a:sym typeface="Calibri" panose="020F0502020204030204"/>
               </a:rPr>
               <a:t>50 most liquid futures contracts (2011-2019).</a:t>
             </a:r>
@@ -7616,14 +7633,14 @@
               <a:solidFill>
                 <a:srgbClr val="000000"/>
               </a:solidFill>
-              <a:latin typeface="Calibri"/>
-              <a:ea typeface="Calibri"/>
-              <a:cs typeface="Calibri"/>
-              <a:sym typeface="Calibri"/>
+              <a:latin typeface="Calibri" panose="020F0502020204030204"/>
+              <a:ea typeface="Calibri" panose="020F0502020204030204"/>
+              <a:cs typeface="Calibri" panose="020F0502020204030204"/>
+              <a:sym typeface="Calibri" panose="020F0502020204030204"/>
             </a:endParaRPr>
           </a:p>
           <a:p>
-            <a:pPr indent="-273050" lvl="0" marL="285750" marR="0" rtl="0" algn="l">
+            <a:pPr marL="285750" marR="0" lvl="0" indent="-273050" algn="l" rtl="0">
               <a:spcBef>
                 <a:spcPts val="0"/>
               </a:spcBef>
@@ -7634,7 +7651,7 @@
                 <a:srgbClr val="1C1917"/>
               </a:buClr>
               <a:buSzPts val="1400"/>
-              <a:buFont typeface="Arial"/>
+              <a:buFont typeface="Arial" panose="020B0604020202090204"/>
               <a:buChar char="•"/>
             </a:pPr>
             <a:r>
@@ -7642,10 +7659,10 @@
                 <a:solidFill>
                   <a:srgbClr val="1C1917"/>
                 </a:solidFill>
-                <a:latin typeface="Calibri"/>
-                <a:ea typeface="Calibri"/>
-                <a:cs typeface="Calibri"/>
-                <a:sym typeface="Calibri"/>
+                <a:latin typeface="Calibri" panose="020F0502020204030204"/>
+                <a:ea typeface="Calibri" panose="020F0502020204030204"/>
+                <a:cs typeface="Calibri" panose="020F0502020204030204"/>
+                <a:sym typeface="Calibri" panose="020F0502020204030204"/>
               </a:rPr>
               <a:t>Commodities (25)</a:t>
             </a:r>
@@ -7653,14 +7670,14 @@
               <a:solidFill>
                 <a:srgbClr val="000000"/>
               </a:solidFill>
-              <a:latin typeface="Calibri"/>
-              <a:ea typeface="Calibri"/>
-              <a:cs typeface="Calibri"/>
-              <a:sym typeface="Calibri"/>
+              <a:latin typeface="Calibri" panose="020F0502020204030204"/>
+              <a:ea typeface="Calibri" panose="020F0502020204030204"/>
+              <a:cs typeface="Calibri" panose="020F0502020204030204"/>
+              <a:sym typeface="Calibri" panose="020F0502020204030204"/>
             </a:endParaRPr>
           </a:p>
           <a:p>
-            <a:pPr indent="-273050" lvl="0" marL="285750" marR="0" rtl="0" algn="l">
+            <a:pPr marL="285750" marR="0" lvl="0" indent="-273050" algn="l" rtl="0">
               <a:spcBef>
                 <a:spcPts val="0"/>
               </a:spcBef>
@@ -7671,7 +7688,7 @@
                 <a:srgbClr val="1C1917"/>
               </a:buClr>
               <a:buSzPts val="1400"/>
-              <a:buFont typeface="Arial"/>
+              <a:buFont typeface="Arial" panose="020B0604020202090204"/>
               <a:buChar char="•"/>
             </a:pPr>
             <a:r>
@@ -7679,10 +7696,10 @@
                 <a:solidFill>
                   <a:srgbClr val="1C1917"/>
                 </a:solidFill>
-                <a:latin typeface="Calibri"/>
-                <a:ea typeface="Calibri"/>
-                <a:cs typeface="Calibri"/>
-                <a:sym typeface="Calibri"/>
+                <a:latin typeface="Calibri" panose="020F0502020204030204"/>
+                <a:ea typeface="Calibri" panose="020F0502020204030204"/>
+                <a:cs typeface="Calibri" panose="020F0502020204030204"/>
+                <a:sym typeface="Calibri" panose="020F0502020204030204"/>
               </a:rPr>
               <a:t>Equity Indices (11)</a:t>
             </a:r>
@@ -7690,14 +7707,14 @@
               <a:solidFill>
                 <a:srgbClr val="000000"/>
               </a:solidFill>
-              <a:latin typeface="Calibri"/>
-              <a:ea typeface="Calibri"/>
-              <a:cs typeface="Calibri"/>
-              <a:sym typeface="Calibri"/>
+              <a:latin typeface="Calibri" panose="020F0502020204030204"/>
+              <a:ea typeface="Calibri" panose="020F0502020204030204"/>
+              <a:cs typeface="Calibri" panose="020F0502020204030204"/>
+              <a:sym typeface="Calibri" panose="020F0502020204030204"/>
             </a:endParaRPr>
           </a:p>
           <a:p>
-            <a:pPr indent="-273050" lvl="0" marL="285750" marR="0" rtl="0" algn="l">
+            <a:pPr marL="285750" marR="0" lvl="0" indent="-273050" algn="l" rtl="0">
               <a:spcBef>
                 <a:spcPts val="0"/>
               </a:spcBef>
@@ -7708,7 +7725,7 @@
                 <a:srgbClr val="1C1917"/>
               </a:buClr>
               <a:buSzPts val="1400"/>
-              <a:buFont typeface="Arial"/>
+              <a:buFont typeface="Arial" panose="020B0604020202090204"/>
               <a:buChar char="•"/>
             </a:pPr>
             <a:r>
@@ -7716,10 +7733,10 @@
                 <a:solidFill>
                   <a:srgbClr val="1C1917"/>
                 </a:solidFill>
-                <a:latin typeface="Calibri"/>
-                <a:ea typeface="Calibri"/>
-                <a:cs typeface="Calibri"/>
-                <a:sym typeface="Calibri"/>
+                <a:latin typeface="Calibri" panose="020F0502020204030204"/>
+                <a:ea typeface="Calibri" panose="020F0502020204030204"/>
+                <a:cs typeface="Calibri" panose="020F0502020204030204"/>
+                <a:sym typeface="Calibri" panose="020F0502020204030204"/>
               </a:rPr>
               <a:t>Fixed Income (5)</a:t>
             </a:r>
@@ -7727,14 +7744,14 @@
               <a:solidFill>
                 <a:srgbClr val="000000"/>
               </a:solidFill>
-              <a:latin typeface="Calibri"/>
-              <a:ea typeface="Calibri"/>
-              <a:cs typeface="Calibri"/>
-              <a:sym typeface="Calibri"/>
+              <a:latin typeface="Calibri" panose="020F0502020204030204"/>
+              <a:ea typeface="Calibri" panose="020F0502020204030204"/>
+              <a:cs typeface="Calibri" panose="020F0502020204030204"/>
+              <a:sym typeface="Calibri" panose="020F0502020204030204"/>
             </a:endParaRPr>
           </a:p>
           <a:p>
-            <a:pPr indent="-273050" lvl="0" marL="285750" marR="0" rtl="0" algn="l">
+            <a:pPr marL="285750" marR="0" lvl="0" indent="-273050" algn="l" rtl="0">
               <a:spcBef>
                 <a:spcPts val="0"/>
               </a:spcBef>
@@ -7745,7 +7762,7 @@
                 <a:srgbClr val="1C1917"/>
               </a:buClr>
               <a:buSzPts val="1400"/>
-              <a:buFont typeface="Arial"/>
+              <a:buFont typeface="Arial" panose="020B0604020202090204"/>
               <a:buChar char="•"/>
             </a:pPr>
             <a:r>
@@ -7753,10 +7770,10 @@
                 <a:solidFill>
                   <a:srgbClr val="1C1917"/>
                 </a:solidFill>
-                <a:latin typeface="Calibri"/>
-                <a:ea typeface="Calibri"/>
-                <a:cs typeface="Calibri"/>
-                <a:sym typeface="Calibri"/>
+                <a:latin typeface="Calibri" panose="020F0502020204030204"/>
+                <a:ea typeface="Calibri" panose="020F0502020204030204"/>
+                <a:cs typeface="Calibri" panose="020F0502020204030204"/>
+                <a:sym typeface="Calibri" panose="020F0502020204030204"/>
               </a:rPr>
               <a:t>Forex (9)</a:t>
             </a:r>
@@ -7764,10 +7781,10 @@
               <a:solidFill>
                 <a:srgbClr val="000000"/>
               </a:solidFill>
-              <a:latin typeface="Calibri"/>
-              <a:ea typeface="Calibri"/>
-              <a:cs typeface="Calibri"/>
-              <a:sym typeface="Calibri"/>
+              <a:latin typeface="Calibri" panose="020F0502020204030204"/>
+              <a:ea typeface="Calibri" panose="020F0502020204030204"/>
+              <a:cs typeface="Calibri" panose="020F0502020204030204"/>
+              <a:sym typeface="Calibri" panose="020F0502020204030204"/>
             </a:endParaRPr>
           </a:p>
         </p:txBody>
@@ -7792,12 +7809,12 @@
           </a:ln>
         </p:spPr>
         <p:txBody>
-          <a:bodyPr anchorCtr="0" anchor="ctr" bIns="45700" lIns="91425" spcFirstLastPara="1" rIns="91425" wrap="square" tIns="45700">
+          <a:bodyPr spcFirstLastPara="1" wrap="square" lIns="91425" tIns="45700" rIns="91425" bIns="45700" anchor="ctr" anchorCtr="0">
             <a:noAutofit/>
           </a:bodyPr>
           <a:lstStyle/>
           <a:p>
-            <a:pPr indent="0" lvl="0" marL="0" marR="0" rtl="0" algn="l">
+            <a:pPr marL="0" marR="0" lvl="0" indent="0" algn="l" rtl="0">
               <a:spcBef>
                 <a:spcPts val="0"/>
               </a:spcBef>
@@ -7808,18 +7825,18 @@
                 <a:srgbClr val="1C1917"/>
               </a:buClr>
               <a:buSzPts val="1600"/>
-              <a:buFont typeface="Calibri"/>
+              <a:buFont typeface="Calibri" panose="020F0502020204030204"/>
               <a:buNone/>
             </a:pPr>
             <a:r>
-              <a:rPr b="1" lang="en-US" sz="1600">
+              <a:rPr lang="en-US" sz="1600" b="1">
                 <a:solidFill>
                   <a:srgbClr val="1C1917"/>
                 </a:solidFill>
-                <a:latin typeface="Calibri"/>
-                <a:ea typeface="Calibri"/>
-                <a:cs typeface="Calibri"/>
-                <a:sym typeface="Calibri"/>
+                <a:latin typeface="Calibri" panose="020F0502020204030204"/>
+                <a:ea typeface="Calibri" panose="020F0502020204030204"/>
+                <a:cs typeface="Calibri" panose="020F0502020204030204"/>
+                <a:sym typeface="Calibri" panose="020F0502020204030204"/>
               </a:rPr>
               <a:t>2. Methodology</a:t>
             </a:r>
@@ -7827,10 +7844,10 @@
               <a:solidFill>
                 <a:srgbClr val="000000"/>
               </a:solidFill>
-              <a:latin typeface="Calibri"/>
-              <a:ea typeface="Calibri"/>
-              <a:cs typeface="Calibri"/>
-              <a:sym typeface="Calibri"/>
+              <a:latin typeface="Calibri" panose="020F0502020204030204"/>
+              <a:ea typeface="Calibri" panose="020F0502020204030204"/>
+              <a:cs typeface="Calibri" panose="020F0502020204030204"/>
+              <a:sym typeface="Calibri" panose="020F0502020204030204"/>
             </a:endParaRPr>
           </a:p>
         </p:txBody>
@@ -7855,12 +7872,12 @@
           </a:ln>
         </p:spPr>
         <p:txBody>
-          <a:bodyPr anchorCtr="0" anchor="ctr" bIns="45700" lIns="91425" spcFirstLastPara="1" rIns="91425" wrap="square" tIns="45700">
+          <a:bodyPr spcFirstLastPara="1" wrap="square" lIns="91425" tIns="45700" rIns="91425" bIns="45700" anchor="ctr" anchorCtr="0">
             <a:noAutofit/>
           </a:bodyPr>
           <a:lstStyle/>
           <a:p>
-            <a:pPr indent="0" lvl="0" marL="0" marR="0" rtl="0" algn="l">
+            <a:pPr marL="0" marR="0" lvl="0" indent="0" algn="l" rtl="0">
               <a:spcBef>
                 <a:spcPts val="0"/>
               </a:spcBef>
@@ -7871,7 +7888,7 @@
                 <a:srgbClr val="1C1917"/>
               </a:buClr>
               <a:buSzPts val="1600"/>
-              <a:buFont typeface="Calibri"/>
+              <a:buFont typeface="Calibri" panose="020F0502020204030204"/>
               <a:buNone/>
             </a:pPr>
             <a:r>
@@ -7879,10 +7896,10 @@
                 <a:solidFill>
                   <a:srgbClr val="1C1917"/>
                 </a:solidFill>
-                <a:latin typeface="Calibri"/>
-                <a:ea typeface="Calibri"/>
-                <a:cs typeface="Calibri"/>
-                <a:sym typeface="Calibri"/>
+                <a:latin typeface="Calibri" panose="020F0502020204030204"/>
+                <a:ea typeface="Calibri" panose="020F0502020204030204"/>
+                <a:cs typeface="Calibri" panose="020F0502020204030204"/>
+                <a:sym typeface="Calibri" panose="020F0502020204030204"/>
               </a:rPr>
               <a:t>Markov Decision Process (MDP) formulation.</a:t>
             </a:r>
@@ -7890,14 +7907,14 @@
               <a:solidFill>
                 <a:srgbClr val="000000"/>
               </a:solidFill>
-              <a:latin typeface="Calibri"/>
-              <a:ea typeface="Calibri"/>
-              <a:cs typeface="Calibri"/>
-              <a:sym typeface="Calibri"/>
+              <a:latin typeface="Calibri" panose="020F0502020204030204"/>
+              <a:ea typeface="Calibri" panose="020F0502020204030204"/>
+              <a:cs typeface="Calibri" panose="020F0502020204030204"/>
+              <a:sym typeface="Calibri" panose="020F0502020204030204"/>
             </a:endParaRPr>
           </a:p>
           <a:p>
-            <a:pPr indent="-273050" lvl="0" marL="285750" marR="0" rtl="0" algn="l">
+            <a:pPr marL="285750" marR="0" lvl="0" indent="-273050" algn="l" rtl="0">
               <a:spcBef>
                 <a:spcPts val="0"/>
               </a:spcBef>
@@ -7908,7 +7925,7 @@
                 <a:srgbClr val="1C1917"/>
               </a:buClr>
               <a:buSzPts val="1400"/>
-              <a:buFont typeface="Arial"/>
+              <a:buFont typeface="Arial" panose="020B0604020202090204"/>
               <a:buChar char="•"/>
             </a:pPr>
             <a:r>
@@ -7916,10 +7933,10 @@
                 <a:solidFill>
                   <a:srgbClr val="1C1917"/>
                 </a:solidFill>
-                <a:latin typeface="Calibri"/>
-                <a:ea typeface="Calibri"/>
-                <a:cs typeface="Calibri"/>
-                <a:sym typeface="Calibri"/>
+                <a:latin typeface="Calibri" panose="020F0502020204030204"/>
+                <a:ea typeface="Calibri" panose="020F0502020204030204"/>
+                <a:cs typeface="Calibri" panose="020F0502020204030204"/>
+                <a:sym typeface="Calibri" panose="020F0502020204030204"/>
               </a:rPr>
               <a:t>State: 60-day lookback (Price, Returns, MACD, RSI).</a:t>
             </a:r>
@@ -7927,14 +7944,14 @@
               <a:solidFill>
                 <a:srgbClr val="000000"/>
               </a:solidFill>
-              <a:latin typeface="Calibri"/>
-              <a:ea typeface="Calibri"/>
-              <a:cs typeface="Calibri"/>
-              <a:sym typeface="Calibri"/>
+              <a:latin typeface="Calibri" panose="020F0502020204030204"/>
+              <a:ea typeface="Calibri" panose="020F0502020204030204"/>
+              <a:cs typeface="Calibri" panose="020F0502020204030204"/>
+              <a:sym typeface="Calibri" panose="020F0502020204030204"/>
             </a:endParaRPr>
           </a:p>
           <a:p>
-            <a:pPr indent="-273050" lvl="0" marL="285750" marR="0" rtl="0" algn="l">
+            <a:pPr marL="285750" marR="0" lvl="0" indent="-273050" algn="l" rtl="0">
               <a:spcBef>
                 <a:spcPts val="0"/>
               </a:spcBef>
@@ -7945,7 +7962,7 @@
                 <a:srgbClr val="1C1917"/>
               </a:buClr>
               <a:buSzPts val="1400"/>
-              <a:buFont typeface="Arial"/>
+              <a:buFont typeface="Arial" panose="020B0604020202090204"/>
               <a:buChar char="•"/>
             </a:pPr>
             <a:r>
@@ -7953,10 +7970,10 @@
                 <a:solidFill>
                   <a:srgbClr val="1C1917"/>
                 </a:solidFill>
-                <a:latin typeface="Calibri"/>
-                <a:ea typeface="Calibri"/>
-                <a:cs typeface="Calibri"/>
-                <a:sym typeface="Calibri"/>
+                <a:latin typeface="Calibri" panose="020F0502020204030204"/>
+                <a:ea typeface="Calibri" panose="020F0502020204030204"/>
+                <a:cs typeface="Calibri" panose="020F0502020204030204"/>
+                <a:sym typeface="Calibri" panose="020F0502020204030204"/>
               </a:rPr>
               <a:t>Action: Target orders [-1, 1].</a:t>
             </a:r>
@@ -7964,14 +7981,14 @@
               <a:solidFill>
                 <a:srgbClr val="000000"/>
               </a:solidFill>
-              <a:latin typeface="Calibri"/>
-              <a:ea typeface="Calibri"/>
-              <a:cs typeface="Calibri"/>
-              <a:sym typeface="Calibri"/>
+              <a:latin typeface="Calibri" panose="020F0502020204030204"/>
+              <a:ea typeface="Calibri" panose="020F0502020204030204"/>
+              <a:cs typeface="Calibri" panose="020F0502020204030204"/>
+              <a:sym typeface="Calibri" panose="020F0502020204030204"/>
             </a:endParaRPr>
           </a:p>
           <a:p>
-            <a:pPr indent="-273050" lvl="0" marL="285750" marR="0" rtl="0" algn="l">
+            <a:pPr marL="285750" marR="0" lvl="0" indent="-273050" algn="l" rtl="0">
               <a:spcBef>
                 <a:spcPts val="0"/>
               </a:spcBef>
@@ -7982,7 +7999,7 @@
                 <a:srgbClr val="1C1917"/>
               </a:buClr>
               <a:buSzPts val="1400"/>
-              <a:buFont typeface="Arial"/>
+              <a:buFont typeface="Arial" panose="020B0604020202090204"/>
               <a:buChar char="•"/>
             </a:pPr>
             <a:r>
@@ -7990,10 +8007,10 @@
                 <a:solidFill>
                   <a:srgbClr val="1C1917"/>
                 </a:solidFill>
-                <a:latin typeface="Calibri"/>
-                <a:ea typeface="Calibri"/>
-                <a:cs typeface="Calibri"/>
-                <a:sym typeface="Calibri"/>
+                <a:latin typeface="Calibri" panose="020F0502020204030204"/>
+                <a:ea typeface="Calibri" panose="020F0502020204030204"/>
+                <a:cs typeface="Calibri" panose="020F0502020204030204"/>
+                <a:sym typeface="Calibri" panose="020F0502020204030204"/>
               </a:rPr>
               <a:t>Reward: Volatility-scaled additive profits.</a:t>
             </a:r>
@@ -8001,10 +8018,10 @@
               <a:solidFill>
                 <a:srgbClr val="000000"/>
               </a:solidFill>
-              <a:latin typeface="Calibri"/>
-              <a:ea typeface="Calibri"/>
-              <a:cs typeface="Calibri"/>
-              <a:sym typeface="Calibri"/>
+              <a:latin typeface="Calibri" panose="020F0502020204030204"/>
+              <a:ea typeface="Calibri" panose="020F0502020204030204"/>
+              <a:cs typeface="Calibri" panose="020F0502020204030204"/>
+              <a:sym typeface="Calibri" panose="020F0502020204030204"/>
             </a:endParaRPr>
           </a:p>
         </p:txBody>
@@ -8029,12 +8046,12 @@
           </a:ln>
         </p:spPr>
         <p:txBody>
-          <a:bodyPr anchorCtr="0" anchor="ctr" bIns="45700" lIns="91425" spcFirstLastPara="1" rIns="91425" wrap="square" tIns="45700">
+          <a:bodyPr spcFirstLastPara="1" wrap="square" lIns="91425" tIns="45700" rIns="91425" bIns="45700" anchor="ctr" anchorCtr="0">
             <a:noAutofit/>
           </a:bodyPr>
           <a:lstStyle/>
           <a:p>
-            <a:pPr indent="0" lvl="0" marL="0" marR="0" rtl="0" algn="l">
+            <a:pPr marL="0" marR="0" lvl="0" indent="0" algn="l" rtl="0">
               <a:spcBef>
                 <a:spcPts val="0"/>
               </a:spcBef>
@@ -8045,18 +8062,18 @@
                 <a:srgbClr val="1C1917"/>
               </a:buClr>
               <a:buSzPts val="1600"/>
-              <a:buFont typeface="Calibri"/>
+              <a:buFont typeface="Calibri" panose="020F0502020204030204"/>
               <a:buNone/>
             </a:pPr>
             <a:r>
-              <a:rPr b="1" lang="en-US" sz="1600">
+              <a:rPr lang="en-US" sz="1600" b="1">
                 <a:solidFill>
                   <a:srgbClr val="1C1917"/>
                 </a:solidFill>
-                <a:latin typeface="Calibri"/>
-                <a:ea typeface="Calibri"/>
-                <a:cs typeface="Calibri"/>
-                <a:sym typeface="Calibri"/>
+                <a:latin typeface="Calibri" panose="020F0502020204030204"/>
+                <a:ea typeface="Calibri" panose="020F0502020204030204"/>
+                <a:cs typeface="Calibri" panose="020F0502020204030204"/>
+                <a:sym typeface="Calibri" panose="020F0502020204030204"/>
               </a:rPr>
               <a:t>3. Evaluation Metrics</a:t>
             </a:r>
@@ -8064,10 +8081,10 @@
               <a:solidFill>
                 <a:srgbClr val="000000"/>
               </a:solidFill>
-              <a:latin typeface="Calibri"/>
-              <a:ea typeface="Calibri"/>
-              <a:cs typeface="Calibri"/>
-              <a:sym typeface="Calibri"/>
+              <a:latin typeface="Calibri" panose="020F0502020204030204"/>
+              <a:ea typeface="Calibri" panose="020F0502020204030204"/>
+              <a:cs typeface="Calibri" panose="020F0502020204030204"/>
+              <a:sym typeface="Calibri" panose="020F0502020204030204"/>
             </a:endParaRPr>
           </a:p>
         </p:txBody>
@@ -8092,12 +8109,12 @@
           </a:ln>
         </p:spPr>
         <p:txBody>
-          <a:bodyPr anchorCtr="0" anchor="ctr" bIns="45700" lIns="91425" spcFirstLastPara="1" rIns="91425" wrap="square" tIns="45700">
+          <a:bodyPr spcFirstLastPara="1" wrap="square" lIns="91425" tIns="45700" rIns="91425" bIns="45700" anchor="ctr" anchorCtr="0">
             <a:noAutofit/>
           </a:bodyPr>
           <a:lstStyle/>
           <a:p>
-            <a:pPr indent="0" lvl="0" marL="0" marR="0" rtl="0" algn="l">
+            <a:pPr marL="0" marR="0" lvl="0" indent="0" algn="l" rtl="0">
               <a:spcBef>
                 <a:spcPts val="0"/>
               </a:spcBef>
@@ -8108,7 +8125,7 @@
                 <a:srgbClr val="1C1917"/>
               </a:buClr>
               <a:buSzPts val="1600"/>
-              <a:buFont typeface="Calibri"/>
+              <a:buFont typeface="Calibri" panose="020F0502020204030204"/>
               <a:buNone/>
             </a:pPr>
             <a:r>
@@ -8116,10 +8133,10 @@
                 <a:solidFill>
                   <a:srgbClr val="1C1917"/>
                 </a:solidFill>
-                <a:latin typeface="Calibri"/>
-                <a:ea typeface="Calibri"/>
-                <a:cs typeface="Calibri"/>
-                <a:sym typeface="Calibri"/>
+                <a:latin typeface="Calibri" panose="020F0502020204030204"/>
+                <a:ea typeface="Calibri" panose="020F0502020204030204"/>
+                <a:cs typeface="Calibri" panose="020F0502020204030204"/>
+                <a:sym typeface="Calibri" panose="020F0502020204030204"/>
               </a:rPr>
               <a:t>Portfolio-level performance assessment.</a:t>
             </a:r>
@@ -8127,14 +8144,14 @@
               <a:solidFill>
                 <a:srgbClr val="000000"/>
               </a:solidFill>
-              <a:latin typeface="Calibri"/>
-              <a:ea typeface="Calibri"/>
-              <a:cs typeface="Calibri"/>
-              <a:sym typeface="Calibri"/>
+              <a:latin typeface="Calibri" panose="020F0502020204030204"/>
+              <a:ea typeface="Calibri" panose="020F0502020204030204"/>
+              <a:cs typeface="Calibri" panose="020F0502020204030204"/>
+              <a:sym typeface="Calibri" panose="020F0502020204030204"/>
             </a:endParaRPr>
           </a:p>
           <a:p>
-            <a:pPr indent="-273050" lvl="0" marL="285750" marR="0" rtl="0" algn="l">
+            <a:pPr marL="285750" marR="0" lvl="0" indent="-273050" algn="l" rtl="0">
               <a:spcBef>
                 <a:spcPts val="0"/>
               </a:spcBef>
@@ -8145,7 +8162,7 @@
                 <a:srgbClr val="1C1917"/>
               </a:buClr>
               <a:buSzPts val="1400"/>
-              <a:buFont typeface="Arial"/>
+              <a:buFont typeface="Arial" panose="020B0604020202090204"/>
               <a:buChar char="•"/>
             </a:pPr>
             <a:r>
@@ -8153,10 +8170,10 @@
                 <a:solidFill>
                   <a:srgbClr val="1C1917"/>
                 </a:solidFill>
-                <a:latin typeface="Calibri"/>
-                <a:ea typeface="Calibri"/>
-                <a:cs typeface="Calibri"/>
-                <a:sym typeface="Calibri"/>
+                <a:latin typeface="Calibri" panose="020F0502020204030204"/>
+                <a:ea typeface="Calibri" panose="020F0502020204030204"/>
+                <a:cs typeface="Calibri" panose="020F0502020204030204"/>
+                <a:sym typeface="Calibri" panose="020F0502020204030204"/>
               </a:rPr>
               <a:t>Annualised Expected Return</a:t>
             </a:r>
@@ -8164,14 +8181,14 @@
               <a:solidFill>
                 <a:srgbClr val="000000"/>
               </a:solidFill>
-              <a:latin typeface="Calibri"/>
-              <a:ea typeface="Calibri"/>
-              <a:cs typeface="Calibri"/>
-              <a:sym typeface="Calibri"/>
+              <a:latin typeface="Calibri" panose="020F0502020204030204"/>
+              <a:ea typeface="Calibri" panose="020F0502020204030204"/>
+              <a:cs typeface="Calibri" panose="020F0502020204030204"/>
+              <a:sym typeface="Calibri" panose="020F0502020204030204"/>
             </a:endParaRPr>
           </a:p>
           <a:p>
-            <a:pPr indent="-273050" lvl="0" marL="285750" marR="0" rtl="0" algn="l">
+            <a:pPr marL="285750" marR="0" lvl="0" indent="-273050" algn="l" rtl="0">
               <a:spcBef>
                 <a:spcPts val="0"/>
               </a:spcBef>
@@ -8182,7 +8199,7 @@
                 <a:srgbClr val="1C1917"/>
               </a:buClr>
               <a:buSzPts val="1400"/>
-              <a:buFont typeface="Arial"/>
+              <a:buFont typeface="Arial" panose="020B0604020202090204"/>
               <a:buChar char="•"/>
             </a:pPr>
             <a:r>
@@ -8190,10 +8207,10 @@
                 <a:solidFill>
                   <a:srgbClr val="1C1917"/>
                 </a:solidFill>
-                <a:latin typeface="Calibri"/>
-                <a:ea typeface="Calibri"/>
-                <a:cs typeface="Calibri"/>
-                <a:sym typeface="Calibri"/>
+                <a:latin typeface="Calibri" panose="020F0502020204030204"/>
+                <a:ea typeface="Calibri" panose="020F0502020204030204"/>
+                <a:cs typeface="Calibri" panose="020F0502020204030204"/>
+                <a:sym typeface="Calibri" panose="020F0502020204030204"/>
               </a:rPr>
               <a:t>Sharpe &amp; Sortino Ratios</a:t>
             </a:r>
@@ -8201,14 +8218,14 @@
               <a:solidFill>
                 <a:srgbClr val="000000"/>
               </a:solidFill>
-              <a:latin typeface="Calibri"/>
-              <a:ea typeface="Calibri"/>
-              <a:cs typeface="Calibri"/>
-              <a:sym typeface="Calibri"/>
+              <a:latin typeface="Calibri" panose="020F0502020204030204"/>
+              <a:ea typeface="Calibri" panose="020F0502020204030204"/>
+              <a:cs typeface="Calibri" panose="020F0502020204030204"/>
+              <a:sym typeface="Calibri" panose="020F0502020204030204"/>
             </a:endParaRPr>
           </a:p>
           <a:p>
-            <a:pPr indent="-273050" lvl="0" marL="285750" marR="0" rtl="0" algn="l">
+            <a:pPr marL="285750" marR="0" lvl="0" indent="-273050" algn="l" rtl="0">
               <a:spcBef>
                 <a:spcPts val="0"/>
               </a:spcBef>
@@ -8219,7 +8236,7 @@
                 <a:srgbClr val="1C1917"/>
               </a:buClr>
               <a:buSzPts val="1400"/>
-              <a:buFont typeface="Arial"/>
+              <a:buFont typeface="Arial" panose="020B0604020202090204"/>
               <a:buChar char="•"/>
             </a:pPr>
             <a:r>
@@ -8227,10 +8244,10 @@
                 <a:solidFill>
                   <a:srgbClr val="1C1917"/>
                 </a:solidFill>
-                <a:latin typeface="Calibri"/>
-                <a:ea typeface="Calibri"/>
-                <a:cs typeface="Calibri"/>
-                <a:sym typeface="Calibri"/>
+                <a:latin typeface="Calibri" panose="020F0502020204030204"/>
+                <a:ea typeface="Calibri" panose="020F0502020204030204"/>
+                <a:cs typeface="Calibri" panose="020F0502020204030204"/>
+                <a:sym typeface="Calibri" panose="020F0502020204030204"/>
               </a:rPr>
               <a:t>Maximum Drawdown (MDD)</a:t>
             </a:r>
@@ -8238,14 +8255,14 @@
               <a:solidFill>
                 <a:srgbClr val="000000"/>
               </a:solidFill>
-              <a:latin typeface="Calibri"/>
-              <a:ea typeface="Calibri"/>
-              <a:cs typeface="Calibri"/>
-              <a:sym typeface="Calibri"/>
+              <a:latin typeface="Calibri" panose="020F0502020204030204"/>
+              <a:ea typeface="Calibri" panose="020F0502020204030204"/>
+              <a:cs typeface="Calibri" panose="020F0502020204030204"/>
+              <a:sym typeface="Calibri" panose="020F0502020204030204"/>
             </a:endParaRPr>
           </a:p>
           <a:p>
-            <a:pPr indent="-273050" lvl="0" marL="285750" marR="0" rtl="0" algn="l">
+            <a:pPr marL="285750" marR="0" lvl="0" indent="-273050" algn="l" rtl="0">
               <a:spcBef>
                 <a:spcPts val="0"/>
               </a:spcBef>
@@ -8256,7 +8273,7 @@
                 <a:srgbClr val="1C1917"/>
               </a:buClr>
               <a:buSzPts val="1400"/>
-              <a:buFont typeface="Arial"/>
+              <a:buFont typeface="Arial" panose="020B0604020202090204"/>
               <a:buChar char="•"/>
             </a:pPr>
             <a:r>
@@ -8264,10 +8281,10 @@
                 <a:solidFill>
                   <a:srgbClr val="1C1917"/>
                 </a:solidFill>
-                <a:latin typeface="Calibri"/>
-                <a:ea typeface="Calibri"/>
-                <a:cs typeface="Calibri"/>
-                <a:sym typeface="Calibri"/>
+                <a:latin typeface="Calibri" panose="020F0502020204030204"/>
+                <a:ea typeface="Calibri" panose="020F0502020204030204"/>
+                <a:cs typeface="Calibri" panose="020F0502020204030204"/>
+                <a:sym typeface="Calibri" panose="020F0502020204030204"/>
               </a:rPr>
               <a:t>Calmar Ratio</a:t>
             </a:r>
@@ -8275,10 +8292,10 @@
               <a:solidFill>
                 <a:srgbClr val="000000"/>
               </a:solidFill>
-              <a:latin typeface="Calibri"/>
-              <a:ea typeface="Calibri"/>
-              <a:cs typeface="Calibri"/>
-              <a:sym typeface="Calibri"/>
+              <a:latin typeface="Calibri" panose="020F0502020204030204"/>
+              <a:ea typeface="Calibri" panose="020F0502020204030204"/>
+              <a:cs typeface="Calibri" panose="020F0502020204030204"/>
+              <a:sym typeface="Calibri" panose="020F0502020204030204"/>
             </a:endParaRPr>
           </a:p>
         </p:txBody>
@@ -8296,29 +8313,29 @@
           </a:xfrm>
           <a:prstGeom prst="roundRect">
             <a:avLst>
-              <a:gd fmla="val 16667" name="adj"/>
+              <a:gd name="adj" fmla="val 16667"/>
             </a:avLst>
           </a:prstGeom>
           <a:solidFill>
             <a:srgbClr val="0B5394"/>
           </a:solidFill>
-          <a:ln cap="flat" cmpd="sng" w="12700">
+          <a:ln w="12700" cap="flat" cmpd="sng">
             <a:solidFill>
               <a:schemeClr val="dk1"/>
             </a:solidFill>
             <a:prstDash val="solid"/>
             <a:miter lim="800000"/>
-            <a:headEnd len="sm" w="sm" type="none"/>
-            <a:tailEnd len="sm" w="sm" type="none"/>
+            <a:headEnd type="none" w="sm" len="sm"/>
+            <a:tailEnd type="none" w="sm" len="sm"/>
           </a:ln>
         </p:spPr>
         <p:txBody>
-          <a:bodyPr anchorCtr="0" anchor="ctr" bIns="45700" lIns="91425" spcFirstLastPara="1" rIns="91425" wrap="square" tIns="45700">
+          <a:bodyPr spcFirstLastPara="1" wrap="square" lIns="91425" tIns="45700" rIns="91425" bIns="45700" anchor="ctr" anchorCtr="0">
             <a:noAutofit/>
           </a:bodyPr>
           <a:lstStyle/>
           <a:p>
-            <a:pPr indent="0" lvl="0" marL="0" marR="0" rtl="0" algn="ctr">
+            <a:pPr marL="0" marR="0" lvl="0" indent="0" algn="ctr" rtl="0">
               <a:spcBef>
                 <a:spcPts val="0"/>
               </a:spcBef>
@@ -8328,14 +8345,14 @@
               <a:buNone/>
             </a:pPr>
             <a:r>
-              <a:rPr b="1" lang="en-US" sz="1600">
+              <a:rPr lang="en-US" sz="1600" b="1">
                 <a:solidFill>
                   <a:schemeClr val="lt1"/>
                 </a:solidFill>
-                <a:latin typeface="Calibri"/>
-                <a:ea typeface="Calibri"/>
-                <a:cs typeface="Calibri"/>
-                <a:sym typeface="Calibri"/>
+                <a:latin typeface="Calibri" panose="020F0502020204030204"/>
+                <a:ea typeface="Calibri" panose="020F0502020204030204"/>
+                <a:cs typeface="Calibri" panose="020F0502020204030204"/>
+                <a:sym typeface="Calibri" panose="020F0502020204030204"/>
               </a:rPr>
               <a:t>Market State</a:t>
             </a:r>
@@ -8346,7 +8363,7 @@
             </a:endParaRPr>
           </a:p>
           <a:p>
-            <a:pPr indent="0" lvl="0" marL="0" marR="0" rtl="0" algn="ctr">
+            <a:pPr marL="0" marR="0" lvl="0" indent="0" algn="ctr" rtl="0">
               <a:spcBef>
                 <a:spcPts val="0"/>
               </a:spcBef>
@@ -8356,25 +8373,25 @@
               <a:buNone/>
             </a:pPr>
             <a:r>
-              <a:rPr b="1" lang="en-US" sz="1600">
+              <a:rPr lang="en-US" sz="1600" b="1">
                 <a:solidFill>
                   <a:schemeClr val="lt1"/>
                 </a:solidFill>
-                <a:latin typeface="Calibri"/>
-                <a:ea typeface="Calibri"/>
-                <a:cs typeface="Calibri"/>
-                <a:sym typeface="Calibri"/>
+                <a:latin typeface="Calibri" panose="020F0502020204030204"/>
+                <a:ea typeface="Calibri" panose="020F0502020204030204"/>
+                <a:cs typeface="Calibri" panose="020F0502020204030204"/>
+                <a:sym typeface="Calibri" panose="020F0502020204030204"/>
               </a:rPr>
               <a:t>Price, Vol, MACD</a:t>
             </a:r>
-            <a:endParaRPr b="1" sz="1600">
+            <a:endParaRPr sz="1600" b="1">
               <a:solidFill>
                 <a:schemeClr val="lt1"/>
               </a:solidFill>
-              <a:latin typeface="Calibri"/>
-              <a:ea typeface="Calibri"/>
-              <a:cs typeface="Calibri"/>
-              <a:sym typeface="Calibri"/>
+              <a:latin typeface="Calibri" panose="020F0502020204030204"/>
+              <a:ea typeface="Calibri" panose="020F0502020204030204"/>
+              <a:cs typeface="Calibri" panose="020F0502020204030204"/>
+              <a:sym typeface="Calibri" panose="020F0502020204030204"/>
             </a:endParaRPr>
           </a:p>
         </p:txBody>
@@ -8392,29 +8409,29 @@
           </a:xfrm>
           <a:prstGeom prst="roundRect">
             <a:avLst>
-              <a:gd fmla="val 16667" name="adj"/>
+              <a:gd name="adj" fmla="val 16667"/>
             </a:avLst>
           </a:prstGeom>
           <a:solidFill>
             <a:srgbClr val="0B5394"/>
           </a:solidFill>
-          <a:ln cap="flat" cmpd="sng" w="12700">
+          <a:ln w="12700" cap="flat" cmpd="sng">
             <a:solidFill>
               <a:schemeClr val="dk1"/>
             </a:solidFill>
             <a:prstDash val="solid"/>
             <a:miter lim="800000"/>
-            <a:headEnd len="sm" w="sm" type="none"/>
-            <a:tailEnd len="sm" w="sm" type="none"/>
+            <a:headEnd type="none" w="sm" len="sm"/>
+            <a:tailEnd type="none" w="sm" len="sm"/>
           </a:ln>
         </p:spPr>
         <p:txBody>
-          <a:bodyPr anchorCtr="0" anchor="ctr" bIns="45700" lIns="91425" spcFirstLastPara="1" rIns="91425" wrap="square" tIns="45700">
+          <a:bodyPr spcFirstLastPara="1" wrap="square" lIns="91425" tIns="45700" rIns="91425" bIns="45700" anchor="ctr" anchorCtr="0">
             <a:noAutofit/>
           </a:bodyPr>
           <a:lstStyle/>
           <a:p>
-            <a:pPr indent="0" lvl="0" marL="0" marR="0" rtl="0" algn="ctr">
+            <a:pPr marL="0" marR="0" lvl="0" indent="0" algn="ctr" rtl="0">
               <a:spcBef>
                 <a:spcPts val="0"/>
               </a:spcBef>
@@ -8424,14 +8441,14 @@
               <a:buNone/>
             </a:pPr>
             <a:r>
-              <a:rPr b="1" lang="en-US" sz="1600">
+              <a:rPr lang="en-US" sz="1600" b="1">
                 <a:solidFill>
                   <a:schemeClr val="lt1"/>
                 </a:solidFill>
-                <a:latin typeface="Calibri"/>
-                <a:ea typeface="Calibri"/>
-                <a:cs typeface="Calibri"/>
-                <a:sym typeface="Calibri"/>
+                <a:latin typeface="Calibri" panose="020F0502020204030204"/>
+                <a:ea typeface="Calibri" panose="020F0502020204030204"/>
+                <a:cs typeface="Calibri" panose="020F0502020204030204"/>
+                <a:sym typeface="Calibri" panose="020F0502020204030204"/>
               </a:rPr>
               <a:t>DRL Agent</a:t>
             </a:r>
@@ -8442,7 +8459,7 @@
             </a:endParaRPr>
           </a:p>
           <a:p>
-            <a:pPr indent="0" lvl="0" marL="0" marR="0" rtl="0" algn="ctr">
+            <a:pPr marL="0" marR="0" lvl="0" indent="0" algn="ctr" rtl="0">
               <a:spcBef>
                 <a:spcPts val="0"/>
               </a:spcBef>
@@ -8452,25 +8469,25 @@
               <a:buNone/>
             </a:pPr>
             <a:r>
-              <a:rPr b="1" lang="en-US" sz="1600">
+              <a:rPr lang="en-US" sz="1600" b="1">
                 <a:solidFill>
                   <a:schemeClr val="lt1"/>
                 </a:solidFill>
-                <a:latin typeface="Calibri"/>
-                <a:ea typeface="Calibri"/>
-                <a:cs typeface="Calibri"/>
-                <a:sym typeface="Calibri"/>
+                <a:latin typeface="Calibri" panose="020F0502020204030204"/>
+                <a:ea typeface="Calibri" panose="020F0502020204030204"/>
+                <a:cs typeface="Calibri" panose="020F0502020204030204"/>
+                <a:sym typeface="Calibri" panose="020F0502020204030204"/>
               </a:rPr>
               <a:t>(Actor-Critic LSTM)</a:t>
             </a:r>
-            <a:endParaRPr b="1" sz="1600">
+            <a:endParaRPr sz="1600" b="1">
               <a:solidFill>
                 <a:schemeClr val="lt1"/>
               </a:solidFill>
-              <a:latin typeface="Calibri"/>
-              <a:ea typeface="Calibri"/>
-              <a:cs typeface="Calibri"/>
-              <a:sym typeface="Calibri"/>
+              <a:latin typeface="Calibri" panose="020F0502020204030204"/>
+              <a:ea typeface="Calibri" panose="020F0502020204030204"/>
+              <a:cs typeface="Calibri" panose="020F0502020204030204"/>
+              <a:sym typeface="Calibri" panose="020F0502020204030204"/>
             </a:endParaRPr>
           </a:p>
         </p:txBody>
@@ -8488,29 +8505,29 @@
           </a:xfrm>
           <a:prstGeom prst="roundRect">
             <a:avLst>
-              <a:gd fmla="val 16667" name="adj"/>
+              <a:gd name="adj" fmla="val 16667"/>
             </a:avLst>
           </a:prstGeom>
           <a:solidFill>
             <a:srgbClr val="0B5394"/>
           </a:solidFill>
-          <a:ln cap="flat" cmpd="sng" w="12700">
+          <a:ln w="12700" cap="flat" cmpd="sng">
             <a:solidFill>
               <a:srgbClr val="1C1917"/>
             </a:solidFill>
             <a:prstDash val="solid"/>
             <a:miter lim="800000"/>
-            <a:headEnd len="sm" w="sm" type="none"/>
-            <a:tailEnd len="sm" w="sm" type="none"/>
+            <a:headEnd type="none" w="sm" len="sm"/>
+            <a:tailEnd type="none" w="sm" len="sm"/>
           </a:ln>
         </p:spPr>
         <p:txBody>
-          <a:bodyPr anchorCtr="0" anchor="ctr" bIns="45700" lIns="91425" spcFirstLastPara="1" rIns="91425" wrap="square" tIns="45700">
+          <a:bodyPr spcFirstLastPara="1" wrap="square" lIns="91425" tIns="45700" rIns="91425" bIns="45700" anchor="ctr" anchorCtr="0">
             <a:noAutofit/>
           </a:bodyPr>
           <a:lstStyle/>
           <a:p>
-            <a:pPr indent="0" lvl="0" marL="0" marR="0" rtl="0" algn="ctr">
+            <a:pPr marL="0" marR="0" lvl="0" indent="0" algn="ctr" rtl="0">
               <a:spcBef>
                 <a:spcPts val="0"/>
               </a:spcBef>
@@ -8520,19 +8537,19 @@
               <a:buNone/>
             </a:pPr>
             <a:r>
-              <a:rPr b="1" lang="en-US" sz="1600">
+              <a:rPr lang="en-US" sz="1600" b="1">
                 <a:solidFill>
                   <a:schemeClr val="lt1"/>
                 </a:solidFill>
-                <a:latin typeface="Calibri"/>
-                <a:ea typeface="Calibri"/>
-                <a:cs typeface="Calibri"/>
-                <a:sym typeface="Calibri"/>
+                <a:latin typeface="Calibri" panose="020F0502020204030204"/>
+                <a:ea typeface="Calibri" panose="020F0502020204030204"/>
+                <a:cs typeface="Calibri" panose="020F0502020204030204"/>
+                <a:sym typeface="Calibri" panose="020F0502020204030204"/>
               </a:rPr>
               <a:t>Action</a:t>
             </a:r>
             <a:r>
-              <a:rPr b="1" lang="en-US">
+              <a:rPr lang="en-US" b="1">
                 <a:solidFill>
                   <a:schemeClr val="lt1"/>
                 </a:solidFill>
@@ -8540,25 +8557,25 @@
               <a:t> </a:t>
             </a:r>
             <a:r>
-              <a:rPr b="1" lang="en-US" sz="1600">
+              <a:rPr lang="en-US" sz="1600" b="1">
                 <a:solidFill>
                   <a:schemeClr val="lt1"/>
                 </a:solidFill>
-                <a:latin typeface="Calibri"/>
-                <a:ea typeface="Calibri"/>
-                <a:cs typeface="Calibri"/>
-                <a:sym typeface="Calibri"/>
+                <a:latin typeface="Calibri" panose="020F0502020204030204"/>
+                <a:ea typeface="Calibri" panose="020F0502020204030204"/>
+                <a:cs typeface="Calibri" panose="020F0502020204030204"/>
+                <a:sym typeface="Calibri" panose="020F0502020204030204"/>
               </a:rPr>
               <a:t>Portfolio Weights</a:t>
             </a:r>
-            <a:endParaRPr b="1" sz="1600">
+            <a:endParaRPr sz="1600" b="1">
               <a:solidFill>
                 <a:schemeClr val="lt1"/>
               </a:solidFill>
-              <a:latin typeface="Calibri"/>
-              <a:ea typeface="Calibri"/>
-              <a:cs typeface="Calibri"/>
-              <a:sym typeface="Calibri"/>
+              <a:latin typeface="Calibri" panose="020F0502020204030204"/>
+              <a:ea typeface="Calibri" panose="020F0502020204030204"/>
+              <a:cs typeface="Calibri" panose="020F0502020204030204"/>
+              <a:sym typeface="Calibri" panose="020F0502020204030204"/>
             </a:endParaRPr>
           </a:p>
         </p:txBody>
@@ -8580,14 +8597,14 @@
             <a:avLst/>
           </a:prstGeom>
           <a:noFill/>
-          <a:ln cap="flat" cmpd="sng" w="9525">
+          <a:ln w="9525" cap="flat" cmpd="sng">
             <a:solidFill>
               <a:schemeClr val="dk1"/>
             </a:solidFill>
             <a:prstDash val="solid"/>
             <a:miter lim="800000"/>
-            <a:headEnd len="sm" w="sm" type="none"/>
-            <a:tailEnd len="med" w="med" type="triangle"/>
+            <a:headEnd type="none" w="sm" len="sm"/>
+            <a:tailEnd type="triangle" w="med" len="med"/>
           </a:ln>
         </p:spPr>
       </p:cxnSp>
@@ -8598,9 +8615,7 @@
           <p:nvPr/>
         </p:nvPicPr>
         <p:blipFill>
-          <a:blip r:embed="rId3">
-            <a:alphaModFix/>
-          </a:blip>
+          <a:blip r:embed="rId1"/>
           <a:stretch>
             <a:fillRect/>
           </a:stretch>
@@ -8626,9 +8641,7 @@
           <p:nvPr/>
         </p:nvPicPr>
         <p:blipFill>
-          <a:blip r:embed="rId4">
-            <a:alphaModFix/>
-          </a:blip>
+          <a:blip r:embed="rId2"/>
           <a:stretch>
             <a:fillRect/>
           </a:stretch>
@@ -8662,14 +8675,14 @@
             <a:avLst/>
           </a:prstGeom>
           <a:noFill/>
-          <a:ln cap="flat" cmpd="sng" w="9525">
+          <a:ln w="9525" cap="flat" cmpd="sng">
             <a:solidFill>
               <a:schemeClr val="dk1"/>
             </a:solidFill>
             <a:prstDash val="solid"/>
             <a:miter lim="800000"/>
-            <a:headEnd len="sm" w="sm" type="none"/>
-            <a:tailEnd len="med" w="med" type="triangle"/>
+            <a:headEnd type="none" w="sm" len="sm"/>
+            <a:tailEnd type="triangle" w="med" len="med"/>
           </a:ln>
         </p:spPr>
       </p:cxnSp>
@@ -8682,7 +8695,7 @@
 </file>
 
 <file path=ppt/slides/slide4.xml><?xml version="1.0" encoding="utf-8"?>
-<p:sld xmlns:a="http://schemas.openxmlformats.org/drawingml/2006/main" xmlns:r="http://schemas.openxmlformats.org/officeDocument/2006/relationships" xmlns:mc="http://schemas.openxmlformats.org/markup-compatibility/2006" xmlns:mv="urn:schemas-microsoft-com:mac:vml" xmlns:p="http://schemas.openxmlformats.org/presentationml/2006/main" xmlns:c="http://schemas.openxmlformats.org/drawingml/2006/chart" xmlns:dgm="http://schemas.openxmlformats.org/drawingml/2006/diagram" xmlns:o="urn:schemas-microsoft-com:office:office" xmlns:v="urn:schemas-microsoft-com:vml" xmlns:pvml="urn:schemas-microsoft-com:office:powerpoint" xmlns:com="http://schemas.openxmlformats.org/drawingml/2006/compatibility" xmlns:p14="http://schemas.microsoft.com/office/powerpoint/2010/main" xmlns:p15="http://schemas.microsoft.com/office/powerpoint/2012/main" xmlns:ahyp="http://schemas.microsoft.com/office/drawing/2018/hyperlinkcolor">
+<p:sld xmlns:a="http://schemas.openxmlformats.org/drawingml/2006/main" xmlns:r="http://schemas.openxmlformats.org/officeDocument/2006/relationships" xmlns:p="http://schemas.openxmlformats.org/presentationml/2006/main">
   <p:cSld>
     <p:spTree>
       <p:nvGrpSpPr>
@@ -8720,12 +8733,12 @@
           </a:ln>
         </p:spPr>
         <p:txBody>
-          <a:bodyPr anchorCtr="0" anchor="ctr" bIns="45700" lIns="91425" spcFirstLastPara="1" rIns="91425" wrap="square" tIns="45700">
+          <a:bodyPr spcFirstLastPara="1" wrap="square" lIns="91425" tIns="45700" rIns="91425" bIns="45700" anchor="ctr" anchorCtr="0">
             <a:normAutofit/>
           </a:bodyPr>
           <a:lstStyle/>
           <a:p>
-            <a:pPr indent="0" lvl="0" marL="0" rtl="0" algn="l">
+            <a:pPr marL="0" lvl="0" indent="0" algn="l" rtl="0">
               <a:spcBef>
                 <a:spcPts val="0"/>
               </a:spcBef>
@@ -8736,18 +8749,18 @@
                 <a:srgbClr val="047857"/>
               </a:buClr>
               <a:buSzPts val="2400"/>
-              <a:buFont typeface="Calibri"/>
+              <a:buFont typeface="Calibri" panose="020F0502020204030204"/>
               <a:buNone/>
             </a:pPr>
             <a:r>
-              <a:rPr b="1" lang="en-US" sz="2400">
+              <a:rPr lang="en-US" sz="2400" b="1">
                 <a:solidFill>
                   <a:srgbClr val="3D85C6"/>
                 </a:solidFill>
-                <a:latin typeface="Calibri"/>
-                <a:ea typeface="Calibri"/>
-                <a:cs typeface="Calibri"/>
-                <a:sym typeface="Calibri"/>
+                <a:latin typeface="Calibri" panose="020F0502020204030204"/>
+                <a:ea typeface="Calibri" panose="020F0502020204030204"/>
+                <a:cs typeface="Calibri" panose="020F0502020204030204"/>
+                <a:sym typeface="Calibri" panose="020F0502020204030204"/>
               </a:rPr>
               <a:t>Identified Weaknesses &amp; Tentative Timeline</a:t>
             </a:r>
@@ -8755,10 +8768,10 @@
               <a:solidFill>
                 <a:srgbClr val="3D85C6"/>
               </a:solidFill>
-              <a:latin typeface="Calibri"/>
-              <a:ea typeface="Calibri"/>
-              <a:cs typeface="Calibri"/>
-              <a:sym typeface="Calibri"/>
+              <a:latin typeface="Calibri" panose="020F0502020204030204"/>
+              <a:ea typeface="Calibri" panose="020F0502020204030204"/>
+              <a:cs typeface="Calibri" panose="020F0502020204030204"/>
+              <a:sym typeface="Calibri" panose="020F0502020204030204"/>
             </a:endParaRPr>
           </a:p>
         </p:txBody>
@@ -8771,8 +8784,8 @@
         </p:nvSpPr>
         <p:spPr>
           <a:xfrm>
-            <a:off x="311700" y="608525"/>
-            <a:ext cx="4852200" cy="3540300"/>
+            <a:off x="311700" y="516450"/>
+            <a:ext cx="4852200" cy="3752215"/>
           </a:xfrm>
           <a:prstGeom prst="rect">
             <a:avLst/>
@@ -8783,12 +8796,12 @@
           </a:ln>
         </p:spPr>
         <p:txBody>
-          <a:bodyPr anchorCtr="0" anchor="t" bIns="45700" lIns="91425" spcFirstLastPara="1" rIns="91425" wrap="square" tIns="45700">
+          <a:bodyPr spcFirstLastPara="1" wrap="square" lIns="91425" tIns="45700" rIns="91425" bIns="45700" anchor="t" anchorCtr="0">
             <a:spAutoFit/>
           </a:bodyPr>
           <a:lstStyle/>
           <a:p>
-            <a:pPr indent="0" lvl="0" marL="0" marR="0" rtl="0" algn="l">
+            <a:pPr marL="0" marR="0" lvl="0" indent="0" algn="l" rtl="0">
               <a:spcBef>
                 <a:spcPts val="0"/>
               </a:spcBef>
@@ -8798,306 +8811,326 @@
               <a:buNone/>
             </a:pPr>
             <a:r>
-              <a:rPr b="1" i="0" lang="en-US" sz="1800" u="none" cap="none" strike="noStrike">
+              <a:rPr lang="en-US" sz="1800" b="1" i="0" u="none" strike="noStrike" cap="none">
                 <a:solidFill>
                   <a:schemeClr val="dk1"/>
                 </a:solidFill>
-                <a:latin typeface="Calibri"/>
-                <a:ea typeface="Calibri"/>
-                <a:cs typeface="Calibri"/>
-                <a:sym typeface="Calibri"/>
+                <a:latin typeface="Calibri" panose="020F0502020204030204"/>
+                <a:ea typeface="Calibri" panose="020F0502020204030204"/>
+                <a:cs typeface="Calibri" panose="020F0502020204030204"/>
+                <a:sym typeface="Calibri" panose="020F0502020204030204"/>
               </a:rPr>
               <a:t>Weaknesse</a:t>
             </a:r>
             <a:r>
-              <a:rPr b="1" lang="en-US" sz="1800">
+              <a:rPr lang="en-US" sz="1800" b="1">
                 <a:solidFill>
                   <a:schemeClr val="dk1"/>
                 </a:solidFill>
-                <a:latin typeface="Calibri"/>
-                <a:ea typeface="Calibri"/>
-                <a:cs typeface="Calibri"/>
-                <a:sym typeface="Calibri"/>
+                <a:latin typeface="Calibri" panose="020F0502020204030204"/>
+                <a:ea typeface="Calibri" panose="020F0502020204030204"/>
+                <a:cs typeface="Calibri" panose="020F0502020204030204"/>
+                <a:sym typeface="Calibri" panose="020F0502020204030204"/>
               </a:rPr>
               <a:t>s:</a:t>
             </a:r>
             <a:br>
-              <a:rPr b="0" i="0" lang="en-US" sz="1100" u="none" cap="none" strike="noStrike">
+              <a:rPr lang="en-US" sz="1100" b="0" i="0" u="none" strike="noStrike" cap="none">
                 <a:solidFill>
                   <a:schemeClr val="dk1"/>
                 </a:solidFill>
-                <a:latin typeface="Calibri"/>
-                <a:ea typeface="Calibri"/>
-                <a:cs typeface="Calibri"/>
-                <a:sym typeface="Calibri"/>
+                <a:latin typeface="Calibri" panose="020F0502020204030204"/>
+                <a:ea typeface="Calibri" panose="020F0502020204030204"/>
+                <a:cs typeface="Calibri" panose="020F0502020204030204"/>
+                <a:sym typeface="Calibri" panose="020F0502020204030204"/>
               </a:rPr>
             </a:br>
             <a:r>
-              <a:rPr b="0" i="0" lang="en-US" u="none" cap="none" strike="noStrike">
+              <a:rPr lang="en-US" b="0" i="0" u="none" strike="noStrike" cap="none">
                 <a:solidFill>
                   <a:schemeClr val="dk1"/>
                 </a:solidFill>
-                <a:latin typeface="Calibri"/>
-                <a:ea typeface="Calibri"/>
-                <a:cs typeface="Calibri"/>
-                <a:sym typeface="Calibri"/>
+                <a:latin typeface="Calibri" panose="020F0502020204030204"/>
+                <a:ea typeface="Calibri" panose="020F0502020204030204"/>
+                <a:cs typeface="Calibri" panose="020F0502020204030204"/>
+                <a:sym typeface="Calibri" panose="020F0502020204030204"/>
               </a:rPr>
               <a:t>1. </a:t>
             </a:r>
             <a:r>
-              <a:rPr b="1" i="0" lang="en-US" u="none" cap="none" strike="noStrike">
+              <a:rPr lang="en-US" b="1" i="0" u="none" strike="noStrike" cap="none">
                 <a:solidFill>
                   <a:schemeClr val="dk1"/>
                 </a:solidFill>
-                <a:latin typeface="Calibri"/>
-                <a:ea typeface="Calibri"/>
-                <a:cs typeface="Calibri"/>
-                <a:sym typeface="Calibri"/>
+                <a:latin typeface="Calibri" panose="020F0502020204030204"/>
+                <a:ea typeface="Calibri" panose="020F0502020204030204"/>
+                <a:cs typeface="Calibri" panose="020F0502020204030204"/>
+                <a:sym typeface="Calibri" panose="020F0502020204030204"/>
               </a:rPr>
               <a:t>Risk-Neutral Objective Function</a:t>
             </a:r>
             <a:br>
-              <a:rPr b="0" i="0" lang="en-US" u="none" cap="none" strike="noStrike">
+              <a:rPr lang="en-US" b="0" i="0" u="none" strike="noStrike" cap="none">
                 <a:solidFill>
                   <a:schemeClr val="dk1"/>
                 </a:solidFill>
-                <a:latin typeface="Calibri"/>
-                <a:ea typeface="Calibri"/>
-                <a:cs typeface="Calibri"/>
-                <a:sym typeface="Calibri"/>
+                <a:latin typeface="Calibri" panose="020F0502020204030204"/>
+                <a:ea typeface="Calibri" panose="020F0502020204030204"/>
+                <a:cs typeface="Calibri" panose="020F0502020204030204"/>
+                <a:sym typeface="Calibri" panose="020F0502020204030204"/>
               </a:rPr>
             </a:br>
             <a:r>
-              <a:rPr b="0" i="0" lang="en-US" u="none" cap="none" strike="noStrike">
+              <a:rPr lang="en-US" b="0" i="0" u="none" strike="noStrike" cap="none">
                 <a:solidFill>
                   <a:schemeClr val="dk1"/>
                 </a:solidFill>
-                <a:latin typeface="Calibri"/>
-                <a:ea typeface="Calibri"/>
-                <a:cs typeface="Calibri"/>
-                <a:sym typeface="Calibri"/>
+                <a:latin typeface="Calibri" panose="020F0502020204030204"/>
+                <a:ea typeface="Calibri" panose="020F0502020204030204"/>
+                <a:cs typeface="Calibri" panose="020F0502020204030204"/>
+                <a:sym typeface="Calibri" panose="020F0502020204030204"/>
               </a:rPr>
               <a:t>   • Paper maximizes E[Σ Rt] (linear utility, risk-neutral)</a:t>
             </a:r>
             <a:br>
-              <a:rPr b="0" i="0" lang="en-US" u="none" cap="none" strike="noStrike">
+              <a:rPr lang="en-US" b="0" i="0" u="none" strike="noStrike" cap="none">
                 <a:solidFill>
                   <a:schemeClr val="dk1"/>
                 </a:solidFill>
-                <a:latin typeface="Calibri"/>
-                <a:ea typeface="Calibri"/>
-                <a:cs typeface="Calibri"/>
-                <a:sym typeface="Calibri"/>
+                <a:latin typeface="Calibri" panose="020F0502020204030204"/>
+                <a:ea typeface="Calibri" panose="020F0502020204030204"/>
+                <a:cs typeface="Calibri" panose="020F0502020204030204"/>
+                <a:sym typeface="Calibri" panose="020F0502020204030204"/>
               </a:rPr>
             </a:br>
             <a:r>
-              <a:rPr b="0" i="0" lang="en-US" u="none" cap="none" strike="noStrike">
+              <a:rPr lang="en-US" b="0" i="0" u="none" strike="noStrike" cap="none">
                 <a:solidFill>
                   <a:schemeClr val="dk1"/>
                 </a:solidFill>
-                <a:latin typeface="Calibri"/>
-                <a:ea typeface="Calibri"/>
-                <a:cs typeface="Calibri"/>
-                <a:sym typeface="Calibri"/>
+                <a:latin typeface="Calibri" panose="020F0502020204030204"/>
+                <a:ea typeface="Calibri" panose="020F0502020204030204"/>
+                <a:cs typeface="Calibri" panose="020F0502020204030204"/>
+                <a:sym typeface="Calibri" panose="020F0502020204030204"/>
               </a:rPr>
               <a:t>   • Problem: Ignores downside risk → large drawdowns possible</a:t>
             </a:r>
             <a:br>
-              <a:rPr b="0" i="0" lang="en-US" sz="1200" u="none" cap="none" strike="noStrike">
+              <a:rPr lang="en-US" sz="1200" b="0" i="0" u="none" strike="noStrike" cap="none">
                 <a:solidFill>
                   <a:schemeClr val="dk1"/>
                 </a:solidFill>
-                <a:latin typeface="Calibri"/>
-                <a:ea typeface="Calibri"/>
-                <a:cs typeface="Calibri"/>
-                <a:sym typeface="Calibri"/>
+                <a:latin typeface="Calibri" panose="020F0502020204030204"/>
+                <a:ea typeface="Calibri" panose="020F0502020204030204"/>
+                <a:cs typeface="Calibri" panose="020F0502020204030204"/>
+                <a:sym typeface="Calibri" panose="020F0502020204030204"/>
               </a:rPr>
             </a:br>
             <a:br>
-              <a:rPr b="0" i="0" lang="en-US" sz="1200" u="none" cap="none" strike="noStrike">
+              <a:rPr lang="en-US" sz="1200" b="0" i="0" u="none" strike="noStrike" cap="none">
                 <a:solidFill>
                   <a:schemeClr val="dk1"/>
                 </a:solidFill>
-                <a:latin typeface="Calibri"/>
-                <a:ea typeface="Calibri"/>
-                <a:cs typeface="Calibri"/>
-                <a:sym typeface="Calibri"/>
+                <a:latin typeface="Calibri" panose="020F0502020204030204"/>
+                <a:ea typeface="Calibri" panose="020F0502020204030204"/>
+                <a:cs typeface="Calibri" panose="020F0502020204030204"/>
+                <a:sym typeface="Calibri" panose="020F0502020204030204"/>
               </a:rPr>
             </a:br>
             <a:r>
-              <a:rPr b="0" i="0" lang="en-US" u="none" cap="none" strike="noStrike">
+              <a:rPr lang="en-US" b="0" i="0" u="none" strike="noStrike" cap="none">
                 <a:solidFill>
                   <a:schemeClr val="dk1"/>
                 </a:solidFill>
-                <a:latin typeface="Calibri"/>
-                <a:ea typeface="Calibri"/>
-                <a:cs typeface="Calibri"/>
-                <a:sym typeface="Calibri"/>
+                <a:latin typeface="Calibri" panose="020F0502020204030204"/>
+                <a:ea typeface="Calibri" panose="020F0502020204030204"/>
+                <a:cs typeface="Calibri" panose="020F0502020204030204"/>
+                <a:sym typeface="Calibri" panose="020F0502020204030204"/>
               </a:rPr>
               <a:t>2. </a:t>
             </a:r>
             <a:r>
-              <a:rPr b="1" i="0" lang="en-US" u="none" cap="none" strike="noStrike">
+              <a:rPr lang="en-US" b="1" i="0" u="none" strike="noStrike" cap="none">
                 <a:solidFill>
                   <a:schemeClr val="dk1"/>
                 </a:solidFill>
-                <a:latin typeface="Calibri"/>
-                <a:ea typeface="Calibri"/>
-                <a:cs typeface="Calibri"/>
-                <a:sym typeface="Calibri"/>
+                <a:latin typeface="Calibri" panose="020F0502020204030204"/>
+                <a:ea typeface="Calibri" panose="020F0502020204030204"/>
+                <a:cs typeface="Calibri" panose="020F0502020204030204"/>
+                <a:sym typeface="Calibri" panose="020F0502020204030204"/>
               </a:rPr>
               <a:t>No Regime Awareness</a:t>
             </a:r>
             <a:br>
-              <a:rPr b="0" i="0" lang="en-US" u="none" cap="none" strike="noStrike">
+              <a:rPr lang="en-US" b="0" i="0" u="none" strike="noStrike" cap="none">
                 <a:solidFill>
                   <a:schemeClr val="dk1"/>
                 </a:solidFill>
-                <a:latin typeface="Calibri"/>
-                <a:ea typeface="Calibri"/>
-                <a:cs typeface="Calibri"/>
-                <a:sym typeface="Calibri"/>
+                <a:latin typeface="Calibri" panose="020F0502020204030204"/>
+                <a:ea typeface="Calibri" panose="020F0502020204030204"/>
+                <a:cs typeface="Calibri" panose="020F0502020204030204"/>
+                <a:sym typeface="Calibri" panose="020F0502020204030204"/>
               </a:rPr>
             </a:br>
             <a:r>
-              <a:rPr b="0" i="0" lang="en-US" u="none" cap="none" strike="noStrike">
+              <a:rPr lang="en-US" b="0" i="0" u="none" strike="noStrike" cap="none">
                 <a:solidFill>
                   <a:schemeClr val="dk1"/>
                 </a:solidFill>
-                <a:latin typeface="Calibri"/>
-                <a:ea typeface="Calibri"/>
-                <a:cs typeface="Calibri"/>
-                <a:sym typeface="Calibri"/>
+                <a:latin typeface="Calibri" panose="020F0502020204030204"/>
+                <a:ea typeface="Calibri" panose="020F0502020204030204"/>
+                <a:cs typeface="Calibri" panose="020F0502020204030204"/>
+                <a:sym typeface="Calibri" panose="020F0502020204030204"/>
               </a:rPr>
               <a:t>   • Same policy for all market conditions (bull/bear/sideways)</a:t>
             </a:r>
             <a:br>
-              <a:rPr b="0" i="0" lang="en-US" u="none" cap="none" strike="noStrike">
+              <a:rPr lang="en-US" b="0" i="0" u="none" strike="noStrike" cap="none">
                 <a:solidFill>
                   <a:schemeClr val="dk1"/>
                 </a:solidFill>
-                <a:latin typeface="Calibri"/>
-                <a:ea typeface="Calibri"/>
-                <a:cs typeface="Calibri"/>
-                <a:sym typeface="Calibri"/>
+                <a:latin typeface="Calibri" panose="020F0502020204030204"/>
+                <a:ea typeface="Calibri" panose="020F0502020204030204"/>
+                <a:cs typeface="Calibri" panose="020F0502020204030204"/>
+                <a:sym typeface="Calibri" panose="020F0502020204030204"/>
               </a:rPr>
             </a:br>
             <a:r>
-              <a:rPr b="0" i="0" lang="en-US" u="none" cap="none" strike="noStrike">
+              <a:rPr lang="en-US" b="0" i="0" u="none" strike="noStrike" cap="none">
                 <a:solidFill>
                   <a:schemeClr val="dk1"/>
                 </a:solidFill>
-                <a:latin typeface="Calibri"/>
-                <a:ea typeface="Calibri"/>
-                <a:cs typeface="Calibri"/>
-                <a:sym typeface="Calibri"/>
+                <a:latin typeface="Calibri" panose="020F0502020204030204"/>
+                <a:ea typeface="Calibri" panose="020F0502020204030204"/>
+                <a:cs typeface="Calibri" panose="020F0502020204030204"/>
+                <a:sym typeface="Calibri" panose="020F0502020204030204"/>
               </a:rPr>
               <a:t>   • Paper notes: 'Long-only better in trending equity markets'</a:t>
             </a:r>
             <a:br>
-              <a:rPr b="0" i="0" lang="en-US" sz="1200" u="none" cap="none" strike="noStrike">
+              <a:rPr lang="en-US" sz="1200" b="0" i="0" u="none" strike="noStrike" cap="none">
                 <a:solidFill>
                   <a:schemeClr val="dk1"/>
                 </a:solidFill>
-                <a:latin typeface="Calibri"/>
-                <a:ea typeface="Calibri"/>
-                <a:cs typeface="Calibri"/>
-                <a:sym typeface="Calibri"/>
+                <a:latin typeface="Calibri" panose="020F0502020204030204"/>
+                <a:ea typeface="Calibri" panose="020F0502020204030204"/>
+                <a:cs typeface="Calibri" panose="020F0502020204030204"/>
+                <a:sym typeface="Calibri" panose="020F0502020204030204"/>
               </a:rPr>
             </a:br>
             <a:br>
-              <a:rPr b="0" i="0" lang="en-US" sz="1200" u="none" cap="none" strike="noStrike">
+              <a:rPr lang="en-US" sz="1200" b="0" i="0" u="none" strike="noStrike" cap="none">
                 <a:solidFill>
                   <a:schemeClr val="dk1"/>
                 </a:solidFill>
-                <a:latin typeface="Calibri"/>
-                <a:ea typeface="Calibri"/>
-                <a:cs typeface="Calibri"/>
-                <a:sym typeface="Calibri"/>
+                <a:latin typeface="Calibri" panose="020F0502020204030204"/>
+                <a:ea typeface="Calibri" panose="020F0502020204030204"/>
+                <a:cs typeface="Calibri" panose="020F0502020204030204"/>
+                <a:sym typeface="Calibri" panose="020F0502020204030204"/>
               </a:rPr>
             </a:br>
             <a:r>
-              <a:rPr b="0" i="0" lang="en-US" u="none" cap="none" strike="noStrike">
+              <a:rPr lang="en-US" b="0" i="0" u="none" strike="noStrike" cap="none">
                 <a:solidFill>
                   <a:schemeClr val="dk1"/>
                 </a:solidFill>
-                <a:latin typeface="Calibri"/>
-                <a:ea typeface="Calibri"/>
-                <a:cs typeface="Calibri"/>
-                <a:sym typeface="Calibri"/>
+                <a:latin typeface="Calibri" panose="020F0502020204030204"/>
+                <a:ea typeface="Calibri" panose="020F0502020204030204"/>
+                <a:cs typeface="Calibri" panose="020F0502020204030204"/>
+                <a:sym typeface="Calibri" panose="020F0502020204030204"/>
               </a:rPr>
               <a:t>3. </a:t>
             </a:r>
             <a:r>
-              <a:rPr b="1" i="0" lang="en-US" u="none" cap="none" strike="noStrike">
+              <a:rPr lang="en-US" b="1" i="0" u="none" strike="noStrike" cap="none">
                 <a:solidFill>
                   <a:schemeClr val="dk1"/>
                 </a:solidFill>
-                <a:latin typeface="Calibri"/>
-                <a:ea typeface="Calibri"/>
-                <a:cs typeface="Calibri"/>
-                <a:sym typeface="Calibri"/>
+                <a:latin typeface="Calibri" panose="020F0502020204030204"/>
+                <a:ea typeface="Calibri" panose="020F0502020204030204"/>
+                <a:cs typeface="Calibri" panose="020F0502020204030204"/>
+                <a:sym typeface="Calibri" panose="020F0502020204030204"/>
               </a:rPr>
               <a:t>Fixed Transaction Costs</a:t>
             </a:r>
             <a:br>
-              <a:rPr b="0" i="0" lang="en-US" u="none" cap="none" strike="noStrike">
+              <a:rPr lang="en-US" b="0" i="0" u="none" strike="noStrike" cap="none">
                 <a:solidFill>
                   <a:schemeClr val="dk1"/>
                 </a:solidFill>
-                <a:latin typeface="Calibri"/>
-                <a:ea typeface="Calibri"/>
-                <a:cs typeface="Calibri"/>
-                <a:sym typeface="Calibri"/>
+                <a:latin typeface="Calibri" panose="020F0502020204030204"/>
+                <a:ea typeface="Calibri" panose="020F0502020204030204"/>
+                <a:cs typeface="Calibri" panose="020F0502020204030204"/>
+                <a:sym typeface="Calibri" panose="020F0502020204030204"/>
               </a:rPr>
             </a:br>
             <a:r>
-              <a:rPr b="0" i="0" lang="en-US" u="none" cap="none" strike="noStrike">
+              <a:rPr lang="en-US" b="0" i="0" u="none" strike="noStrike" cap="none">
                 <a:solidFill>
                   <a:schemeClr val="dk1"/>
                 </a:solidFill>
-                <a:latin typeface="Calibri"/>
-                <a:ea typeface="Calibri"/>
-                <a:cs typeface="Calibri"/>
-                <a:sym typeface="Calibri"/>
+                <a:latin typeface="Calibri" panose="020F0502020204030204"/>
+                <a:ea typeface="Calibri" panose="020F0502020204030204"/>
+                <a:cs typeface="Calibri" panose="020F0502020204030204"/>
+                <a:sym typeface="Calibri" panose="020F0502020204030204"/>
               </a:rPr>
               <a:t>   • Constant bp = 0.0020 (20 bps) used throughout</a:t>
             </a:r>
             <a:br>
-              <a:rPr b="0" i="0" lang="en-US" u="none" cap="none" strike="noStrike">
+              <a:rPr lang="en-US" b="0" i="0" u="none" strike="noStrike" cap="none">
                 <a:solidFill>
                   <a:schemeClr val="dk1"/>
                 </a:solidFill>
-                <a:latin typeface="Calibri"/>
-                <a:ea typeface="Calibri"/>
-                <a:cs typeface="Calibri"/>
-                <a:sym typeface="Calibri"/>
+                <a:latin typeface="Calibri" panose="020F0502020204030204"/>
+                <a:ea typeface="Calibri" panose="020F0502020204030204"/>
+                <a:cs typeface="Calibri" panose="020F0502020204030204"/>
+                <a:sym typeface="Calibri" panose="020F0502020204030204"/>
               </a:rPr>
             </a:br>
             <a:r>
-              <a:rPr b="0" i="0" lang="en-US" u="none" cap="none" strike="noStrike">
+              <a:rPr lang="en-US" b="0" i="0" u="none" strike="noStrike" cap="none">
                 <a:solidFill>
                   <a:schemeClr val="dk1"/>
                 </a:solidFill>
-                <a:latin typeface="Calibri"/>
-                <a:ea typeface="Calibri"/>
-                <a:cs typeface="Calibri"/>
-                <a:sym typeface="Calibri"/>
+                <a:latin typeface="Calibri" panose="020F0502020204030204"/>
+                <a:ea typeface="Calibri" panose="020F0502020204030204"/>
+                <a:cs typeface="Calibri" panose="020F0502020204030204"/>
+                <a:sym typeface="Calibri" panose="020F0502020204030204"/>
               </a:rPr>
               <a:t>   • Real costs vary with volatility and liquidity</a:t>
             </a:r>
-            <a:endParaRPr b="0" i="0" u="none" cap="none" strike="noStrike">
+            <a:endParaRPr lang="en-US" b="0" i="0" u="none" strike="noStrike" cap="none">
               <a:solidFill>
                 <a:schemeClr val="dk1"/>
               </a:solidFill>
-              <a:latin typeface="Calibri"/>
-              <a:ea typeface="Calibri"/>
-              <a:cs typeface="Calibri"/>
-              <a:sym typeface="Calibri"/>
+              <a:latin typeface="Calibri" panose="020F0502020204030204"/>
+              <a:ea typeface="Calibri" panose="020F0502020204030204"/>
+              <a:cs typeface="Calibri" panose="020F0502020204030204"/>
+              <a:sym typeface="Calibri" panose="020F0502020204030204"/>
             </a:endParaRPr>
           </a:p>
           <a:p>
-            <a:pPr indent="0" lvl="0" marL="0" marR="0" rtl="0" algn="l">
+            <a:pPr marL="0" marR="0" lvl="0" indent="0" algn="l" rtl="0">
+              <a:spcBef>
+                <a:spcPts val="0"/>
+              </a:spcBef>
+              <a:spcAft>
+                <a:spcPts val="0"/>
+              </a:spcAft>
+              <a:buNone/>
+            </a:pPr>
+            <a:endParaRPr>
+              <a:solidFill>
+                <a:schemeClr val="dk1"/>
+              </a:solidFill>
+              <a:latin typeface="Calibri" panose="020F0502020204030204"/>
+              <a:ea typeface="Calibri" panose="020F0502020204030204"/>
+              <a:cs typeface="Calibri" panose="020F0502020204030204"/>
+              <a:sym typeface="Calibri" panose="020F0502020204030204"/>
+            </a:endParaRPr>
+          </a:p>
+          <a:p>
+            <a:pPr marL="0" marR="0" lvl="0" indent="0" algn="l" rtl="0">
               <a:spcBef>
                 <a:spcPts val="0"/>
               </a:spcBef>
@@ -9107,66 +9140,123 @@
               <a:buNone/>
             </a:pPr>
             <a:r>
-              <a:t/>
+              <a:rPr lang="en-US">
+                <a:solidFill>
+                  <a:schemeClr val="dk1"/>
+                </a:solidFill>
+                <a:latin typeface="Calibri" panose="020F0502020204030204"/>
+                <a:ea typeface="Calibri" panose="020F0502020204030204"/>
+                <a:cs typeface="Calibri" panose="020F0502020204030204"/>
+                <a:sym typeface="Calibri" panose="020F0502020204030204"/>
+              </a:rPr>
+              <a:t>4. </a:t>
+            </a:r>
+            <a:r>
+              <a:rPr lang="en-US" b="1">
+                <a:solidFill>
+                  <a:schemeClr val="dk1"/>
+                </a:solidFill>
+                <a:latin typeface="Calibri" panose="020F0502020204030204"/>
+                <a:ea typeface="Calibri" panose="020F0502020204030204"/>
+                <a:cs typeface="Calibri" panose="020F0502020204030204"/>
+                <a:sym typeface="Calibri" panose="020F0502020204030204"/>
+              </a:rPr>
+              <a:t>Lack of considering </a:t>
+            </a:r>
+            <a:r>
+              <a:rPr lang="en-US" altLang="en-US" b="1">
+                <a:solidFill>
+                  <a:schemeClr val="dk1"/>
+                </a:solidFill>
+                <a:latin typeface="Calibri" panose="020F0502020204030204"/>
+                <a:ea typeface="Calibri" panose="020F0502020204030204"/>
+                <a:cs typeface="Calibri" panose="020F0502020204030204"/>
+                <a:sym typeface="Calibri" panose="020F0502020204030204"/>
+              </a:rPr>
+              <a:t>cross-class correlation</a:t>
+            </a:r>
+            <a:r>
+              <a:rPr lang="en-US" b="1">
+                <a:solidFill>
+                  <a:schemeClr val="dk1"/>
+                </a:solidFill>
+                <a:latin typeface="Calibri" panose="020F0502020204030204"/>
+                <a:ea typeface="Calibri" panose="020F0502020204030204"/>
+                <a:cs typeface="Calibri" panose="020F0502020204030204"/>
+                <a:sym typeface="Calibri" panose="020F0502020204030204"/>
+              </a:rPr>
+              <a:t> </a:t>
+            </a:r>
+            <a:endParaRPr lang="en-US" b="1">
+              <a:solidFill>
+                <a:schemeClr val="dk1"/>
+              </a:solidFill>
+              <a:latin typeface="Calibri" panose="020F0502020204030204"/>
+              <a:ea typeface="Calibri" panose="020F0502020204030204"/>
+              <a:cs typeface="Calibri" panose="020F0502020204030204"/>
+              <a:sym typeface="Calibri" panose="020F0502020204030204"/>
+            </a:endParaRPr>
+          </a:p>
+          <a:p>
+            <a:pPr marL="0" marR="0" lvl="0" indent="0" algn="l" rtl="0">
+              <a:spcBef>
+                <a:spcPts val="0"/>
+              </a:spcBef>
+              <a:spcAft>
+                <a:spcPts val="0"/>
+              </a:spcAft>
+              <a:buNone/>
+            </a:pPr>
+            <a:r>
+              <a:rPr lang="en-US">
+                <a:solidFill>
+                  <a:schemeClr val="dk1"/>
+                </a:solidFill>
+                <a:latin typeface="Calibri" panose="020F0502020204030204"/>
+                <a:ea typeface="Calibri" panose="020F0502020204030204"/>
+                <a:cs typeface="Calibri" panose="020F0502020204030204"/>
+                <a:sym typeface="Calibri" panose="020F0502020204030204"/>
+              </a:rPr>
+              <a:t>   •</a:t>
+            </a:r>
+            <a:r>
+              <a:rPr lang="en-US" b="1">
+                <a:solidFill>
+                  <a:schemeClr val="dk1"/>
+                </a:solidFill>
+                <a:latin typeface="Calibri" panose="020F0502020204030204"/>
+                <a:ea typeface="Calibri" panose="020F0502020204030204"/>
+                <a:cs typeface="Calibri" panose="020F0502020204030204"/>
+                <a:sym typeface="Calibri" panose="020F0502020204030204"/>
+              </a:rPr>
+              <a:t> </a:t>
+            </a:r>
+            <a:r>
+              <a:rPr lang="en-US">
+                <a:latin typeface="Calibri" panose="020F0502020204030204"/>
+                <a:ea typeface="Calibri" panose="020F0502020204030204"/>
+                <a:cs typeface="Calibri" panose="020F0502020204030204"/>
+                <a:sym typeface="Calibri" panose="020F0502020204030204"/>
+              </a:rPr>
+              <a:t>The paper </a:t>
+            </a:r>
+            <a:r>
+              <a:rPr lang="en-US">
+                <a:latin typeface="Calibri" panose="020F0502020204030204"/>
+                <a:ea typeface="Calibri" panose="020F0502020204030204"/>
+                <a:cs typeface="Calibri" panose="020F0502020204030204"/>
+                <a:sym typeface="Calibri" panose="020F0502020204030204"/>
+              </a:rPr>
+              <a:t>grouped contracts according to asset classes then trained a model for each asset class, failing to capture strong coupling between different asset classes.</a:t>
             </a:r>
             <a:endParaRPr>
               <a:solidFill>
                 <a:schemeClr val="dk1"/>
               </a:solidFill>
-              <a:latin typeface="Calibri"/>
-              <a:ea typeface="Calibri"/>
-              <a:cs typeface="Calibri"/>
-              <a:sym typeface="Calibri"/>
-            </a:endParaRPr>
-          </a:p>
-          <a:p>
-            <a:pPr indent="0" lvl="0" marL="0" marR="0" rtl="0" algn="l">
-              <a:spcBef>
-                <a:spcPts val="0"/>
-              </a:spcBef>
-              <a:spcAft>
-                <a:spcPts val="0"/>
-              </a:spcAft>
-              <a:buNone/>
-            </a:pPr>
-            <a:r>
-              <a:rPr lang="en-US">
-                <a:solidFill>
-                  <a:schemeClr val="dk1"/>
-                </a:solidFill>
-                <a:latin typeface="Calibri"/>
-                <a:ea typeface="Calibri"/>
-                <a:cs typeface="Calibri"/>
-                <a:sym typeface="Calibri"/>
-              </a:rPr>
-              <a:t>4.</a:t>
-            </a:r>
-            <a:r>
-              <a:rPr b="1" lang="en-US">
-                <a:latin typeface="Calibri"/>
-                <a:ea typeface="Calibri"/>
-                <a:cs typeface="Calibri"/>
-                <a:sym typeface="Calibri"/>
-              </a:rPr>
-              <a:t>The paper treats each of the 50 futures contracts as </a:t>
-            </a:r>
-            <a:r>
-              <a:rPr lang="en-US">
-                <a:latin typeface="Calibri"/>
-                <a:ea typeface="Calibri"/>
-                <a:cs typeface="Calibri"/>
-                <a:sym typeface="Calibri"/>
-              </a:rPr>
-              <a:t>independent entities, failing to capture the cross-correlations and strong coupling between different asset classes.</a:t>
-            </a:r>
-            <a:endParaRPr>
-              <a:solidFill>
-                <a:schemeClr val="dk1"/>
-              </a:solidFill>
-              <a:latin typeface="Calibri"/>
-              <a:ea typeface="Calibri"/>
-              <a:cs typeface="Calibri"/>
-              <a:sym typeface="Calibri"/>
+              <a:latin typeface="Calibri" panose="020F0502020204030204"/>
+              <a:ea typeface="Calibri" panose="020F0502020204030204"/>
+              <a:cs typeface="Calibri" panose="020F0502020204030204"/>
+              <a:sym typeface="Calibri" panose="020F0502020204030204"/>
             </a:endParaRPr>
           </a:p>
         </p:txBody>
@@ -9180,7 +9270,7 @@
         <p:spPr>
           <a:xfrm>
             <a:off x="5265975" y="608525"/>
-            <a:ext cx="3658200" cy="3078300"/>
+            <a:ext cx="3658200" cy="3290570"/>
           </a:xfrm>
           <a:prstGeom prst="rect">
             <a:avLst/>
@@ -9191,12 +9281,12 @@
           </a:ln>
         </p:spPr>
         <p:txBody>
-          <a:bodyPr anchorCtr="0" anchor="t" bIns="45700" lIns="91425" spcFirstLastPara="1" rIns="91425" wrap="square" tIns="45700">
+          <a:bodyPr spcFirstLastPara="1" wrap="square" lIns="91425" tIns="45700" rIns="91425" bIns="45700" anchor="t" anchorCtr="0">
             <a:spAutoFit/>
           </a:bodyPr>
           <a:lstStyle/>
           <a:p>
-            <a:pPr indent="0" lvl="0" marL="0" marR="0" rtl="0" algn="l">
+            <a:pPr marL="0" marR="0" lvl="0" indent="0" algn="l" rtl="0">
               <a:spcBef>
                 <a:spcPts val="0"/>
               </a:spcBef>
@@ -9206,294 +9296,294 @@
               <a:buNone/>
             </a:pPr>
             <a:r>
-              <a:rPr b="1" i="0" lang="en-US" sz="1800" u="none" cap="none" strike="noStrike">
+              <a:rPr lang="en-US" sz="1800" b="1" i="0" u="none" strike="noStrike" cap="none">
                 <a:solidFill>
                   <a:schemeClr val="dk1"/>
                 </a:solidFill>
-                <a:latin typeface="Calibri"/>
-                <a:ea typeface="Calibri"/>
-                <a:cs typeface="Calibri"/>
-                <a:sym typeface="Calibri"/>
+                <a:latin typeface="Calibri" panose="020F0502020204030204"/>
+                <a:ea typeface="Calibri" panose="020F0502020204030204"/>
+                <a:cs typeface="Calibri" panose="020F0502020204030204"/>
+                <a:sym typeface="Calibri" panose="020F0502020204030204"/>
               </a:rPr>
               <a:t>Proposed Extensions:</a:t>
             </a:r>
             <a:br>
-              <a:rPr b="0" i="0" lang="en-US" sz="1100" u="none" cap="none" strike="noStrike">
+              <a:rPr lang="en-US" sz="1100" b="0" i="0" u="none" strike="noStrike" cap="none">
                 <a:solidFill>
                   <a:schemeClr val="dk1"/>
                 </a:solidFill>
-                <a:latin typeface="Calibri"/>
-                <a:ea typeface="Calibri"/>
-                <a:cs typeface="Calibri"/>
-                <a:sym typeface="Calibri"/>
+                <a:latin typeface="Calibri" panose="020F0502020204030204"/>
+                <a:ea typeface="Calibri" panose="020F0502020204030204"/>
+                <a:cs typeface="Calibri" panose="020F0502020204030204"/>
+                <a:sym typeface="Calibri" panose="020F0502020204030204"/>
               </a:rPr>
             </a:br>
             <a:r>
-              <a:rPr b="0" i="0" lang="en-US" u="none" cap="none" strike="noStrike">
+              <a:rPr lang="en-US" b="0" i="0" u="none" strike="noStrike" cap="none">
                 <a:solidFill>
                   <a:schemeClr val="dk1"/>
                 </a:solidFill>
-                <a:latin typeface="Calibri"/>
-                <a:ea typeface="Calibri"/>
-                <a:cs typeface="Calibri"/>
-                <a:sym typeface="Calibri"/>
+                <a:latin typeface="Calibri" panose="020F0502020204030204"/>
+                <a:ea typeface="Calibri" panose="020F0502020204030204"/>
+                <a:cs typeface="Calibri" panose="020F0502020204030204"/>
+                <a:sym typeface="Calibri" panose="020F0502020204030204"/>
               </a:rPr>
               <a:t>(A) </a:t>
             </a:r>
             <a:r>
-              <a:rPr b="1" i="0" lang="en-US" u="none" cap="none" strike="noStrike">
+              <a:rPr lang="en-US" b="1" i="0" u="none" strike="noStrike" cap="none">
                 <a:solidFill>
                   <a:schemeClr val="dk1"/>
                 </a:solidFill>
-                <a:latin typeface="Calibri"/>
-                <a:ea typeface="Calibri"/>
-                <a:cs typeface="Calibri"/>
-                <a:sym typeface="Calibri"/>
+                <a:latin typeface="Calibri" panose="020F0502020204030204"/>
+                <a:ea typeface="Calibri" panose="020F0502020204030204"/>
+                <a:cs typeface="Calibri" panose="020F0502020204030204"/>
+                <a:sym typeface="Calibri" panose="020F0502020204030204"/>
               </a:rPr>
               <a:t>Alpha Decay Analysis</a:t>
             </a:r>
             <a:br>
-              <a:rPr b="0" i="0" lang="en-US" u="none" cap="none" strike="noStrike">
+              <a:rPr lang="en-US" b="0" i="0" u="none" strike="noStrike" cap="none">
                 <a:solidFill>
                   <a:schemeClr val="dk1"/>
                 </a:solidFill>
-                <a:latin typeface="Calibri"/>
-                <a:ea typeface="Calibri"/>
-                <a:cs typeface="Calibri"/>
-                <a:sym typeface="Calibri"/>
+                <a:latin typeface="Calibri" panose="020F0502020204030204"/>
+                <a:ea typeface="Calibri" panose="020F0502020204030204"/>
+                <a:cs typeface="Calibri" panose="020F0502020204030204"/>
+                <a:sym typeface="Calibri" panose="020F0502020204030204"/>
               </a:rPr>
             </a:br>
             <a:r>
-              <a:rPr b="0" i="0" lang="en-US" u="none" cap="none" strike="noStrike">
+              <a:rPr lang="en-US" b="0" i="0" u="none" strike="noStrike" cap="none">
                 <a:solidFill>
                   <a:schemeClr val="dk1"/>
                 </a:solidFill>
-                <a:latin typeface="Calibri"/>
-                <a:ea typeface="Calibri"/>
-                <a:cs typeface="Calibri"/>
-                <a:sym typeface="Calibri"/>
+                <a:latin typeface="Calibri" panose="020F0502020204030204"/>
+                <a:ea typeface="Calibri" panose="020F0502020204030204"/>
+                <a:cs typeface="Calibri" panose="020F0502020204030204"/>
+                <a:sym typeface="Calibri" panose="020F0502020204030204"/>
               </a:rPr>
               <a:t>    • Replicate on 2019-2024 data</a:t>
             </a:r>
             <a:br>
-              <a:rPr b="0" i="0" lang="en-US" u="none" cap="none" strike="noStrike">
+              <a:rPr lang="en-US" b="0" i="0" u="none" strike="noStrike" cap="none">
                 <a:solidFill>
                   <a:schemeClr val="dk1"/>
                 </a:solidFill>
-                <a:latin typeface="Calibri"/>
-                <a:ea typeface="Calibri"/>
-                <a:cs typeface="Calibri"/>
-                <a:sym typeface="Calibri"/>
+                <a:latin typeface="Calibri" panose="020F0502020204030204"/>
+                <a:ea typeface="Calibri" panose="020F0502020204030204"/>
+                <a:cs typeface="Calibri" panose="020F0502020204030204"/>
+                <a:sym typeface="Calibri" panose="020F0502020204030204"/>
               </a:rPr>
             </a:br>
             <a:r>
-              <a:rPr b="0" i="0" lang="en-US" u="none" cap="none" strike="noStrike">
+              <a:rPr lang="en-US" b="0" i="0" u="none" strike="noStrike" cap="none">
                 <a:solidFill>
                   <a:schemeClr val="dk1"/>
                 </a:solidFill>
-                <a:latin typeface="Calibri"/>
-                <a:ea typeface="Calibri"/>
-                <a:cs typeface="Calibri"/>
-                <a:sym typeface="Calibri"/>
+                <a:latin typeface="Calibri" panose="020F0502020204030204"/>
+                <a:ea typeface="Calibri" panose="020F0502020204030204"/>
+                <a:cs typeface="Calibri" panose="020F0502020204030204"/>
+                <a:sym typeface="Calibri" panose="020F0502020204030204"/>
               </a:rPr>
               <a:t>    • Test if DRL advantage persists</a:t>
             </a:r>
             <a:br>
-              <a:rPr b="0" i="0" lang="en-US" sz="1100" u="none" cap="none" strike="noStrike">
+              <a:rPr lang="en-US" sz="1100" b="0" i="0" u="none" strike="noStrike" cap="none">
                 <a:solidFill>
                   <a:schemeClr val="dk1"/>
                 </a:solidFill>
-                <a:latin typeface="Calibri"/>
-                <a:ea typeface="Calibri"/>
-                <a:cs typeface="Calibri"/>
-                <a:sym typeface="Calibri"/>
+                <a:latin typeface="Calibri" panose="020F0502020204030204"/>
+                <a:ea typeface="Calibri" panose="020F0502020204030204"/>
+                <a:cs typeface="Calibri" panose="020F0502020204030204"/>
+                <a:sym typeface="Calibri" panose="020F0502020204030204"/>
               </a:rPr>
             </a:br>
             <a:br>
-              <a:rPr b="0" i="0" lang="en-US" sz="1100" u="none" cap="none" strike="noStrike">
+              <a:rPr lang="en-US" sz="1100" b="0" i="0" u="none" strike="noStrike" cap="none">
                 <a:solidFill>
                   <a:schemeClr val="dk1"/>
                 </a:solidFill>
-                <a:latin typeface="Calibri"/>
-                <a:ea typeface="Calibri"/>
-                <a:cs typeface="Calibri"/>
-                <a:sym typeface="Calibri"/>
+                <a:latin typeface="Calibri" panose="020F0502020204030204"/>
+                <a:ea typeface="Calibri" panose="020F0502020204030204"/>
+                <a:cs typeface="Calibri" panose="020F0502020204030204"/>
+                <a:sym typeface="Calibri" panose="020F0502020204030204"/>
               </a:rPr>
             </a:br>
             <a:r>
-              <a:rPr b="0" i="0" lang="en-US" u="none" cap="none" strike="noStrike">
+              <a:rPr lang="en-US" b="0" i="0" u="none" strike="noStrike" cap="none">
                 <a:solidFill>
                   <a:schemeClr val="dk1"/>
                 </a:solidFill>
-                <a:latin typeface="Calibri"/>
-                <a:ea typeface="Calibri"/>
-                <a:cs typeface="Calibri"/>
-                <a:sym typeface="Calibri"/>
+                <a:latin typeface="Calibri" panose="020F0502020204030204"/>
+                <a:ea typeface="Calibri" panose="020F0502020204030204"/>
+                <a:cs typeface="Calibri" panose="020F0502020204030204"/>
+                <a:sym typeface="Calibri" panose="020F0502020204030204"/>
               </a:rPr>
               <a:t>(B) </a:t>
             </a:r>
             <a:r>
-              <a:rPr b="1" i="0" lang="en-US" u="none" cap="none" strike="noStrike">
+              <a:rPr lang="en-US" b="1" i="0" u="none" strike="noStrike" cap="none">
                 <a:solidFill>
                   <a:schemeClr val="dk1"/>
                 </a:solidFill>
-                <a:latin typeface="Calibri"/>
-                <a:ea typeface="Calibri"/>
-                <a:cs typeface="Calibri"/>
-                <a:sym typeface="Calibri"/>
+                <a:latin typeface="Calibri" panose="020F0502020204030204"/>
+                <a:ea typeface="Calibri" panose="020F0502020204030204"/>
+                <a:cs typeface="Calibri" panose="020F0502020204030204"/>
+                <a:sym typeface="Calibri" panose="020F0502020204030204"/>
               </a:rPr>
               <a:t>Risk-Averse Objective</a:t>
             </a:r>
             <a:br>
-              <a:rPr b="0" i="0" lang="en-US" u="none" cap="none" strike="noStrike">
+              <a:rPr lang="en-US" b="0" i="0" u="none" strike="noStrike" cap="none">
                 <a:solidFill>
                   <a:schemeClr val="dk1"/>
                 </a:solidFill>
-                <a:latin typeface="Calibri"/>
-                <a:ea typeface="Calibri"/>
-                <a:cs typeface="Calibri"/>
-                <a:sym typeface="Calibri"/>
+                <a:latin typeface="Calibri" panose="020F0502020204030204"/>
+                <a:ea typeface="Calibri" panose="020F0502020204030204"/>
+                <a:cs typeface="Calibri" panose="020F0502020204030204"/>
+                <a:sym typeface="Calibri" panose="020F0502020204030204"/>
               </a:rPr>
             </a:br>
             <a:r>
-              <a:rPr b="0" i="0" lang="en-US" u="none" cap="none" strike="noStrike">
+              <a:rPr lang="en-US" b="0" i="0" u="none" strike="noStrike" cap="none">
                 <a:solidFill>
                   <a:schemeClr val="dk1"/>
                 </a:solidFill>
-                <a:latin typeface="Calibri"/>
-                <a:ea typeface="Calibri"/>
-                <a:cs typeface="Calibri"/>
-                <a:sym typeface="Calibri"/>
+                <a:latin typeface="Calibri" panose="020F0502020204030204"/>
+                <a:ea typeface="Calibri" panose="020F0502020204030204"/>
+                <a:cs typeface="Calibri" panose="020F0502020204030204"/>
+                <a:sym typeface="Calibri" panose="020F0502020204030204"/>
               </a:rPr>
               <a:t>    • Change: max E[ΣRt] → max Sharpe Ratio</a:t>
             </a:r>
             <a:br>
-              <a:rPr b="0" i="0" lang="en-US" u="none" cap="none" strike="noStrike">
+              <a:rPr lang="en-US" b="0" i="0" u="none" strike="noStrike" cap="none">
                 <a:solidFill>
                   <a:schemeClr val="dk1"/>
                 </a:solidFill>
-                <a:latin typeface="Calibri"/>
-                <a:ea typeface="Calibri"/>
-                <a:cs typeface="Calibri"/>
-                <a:sym typeface="Calibri"/>
+                <a:latin typeface="Calibri" panose="020F0502020204030204"/>
+                <a:ea typeface="Calibri" panose="020F0502020204030204"/>
+                <a:cs typeface="Calibri" panose="020F0502020204030204"/>
+                <a:sym typeface="Calibri" panose="020F0502020204030204"/>
               </a:rPr>
             </a:br>
             <a:r>
-              <a:rPr b="0" i="0" lang="en-US" u="none" cap="none" strike="noStrike">
+              <a:rPr lang="en-US" b="0" i="0" u="none" strike="noStrike" cap="none">
                 <a:solidFill>
                   <a:schemeClr val="dk1"/>
                 </a:solidFill>
-                <a:latin typeface="Calibri"/>
-                <a:ea typeface="Calibri"/>
-                <a:cs typeface="Calibri"/>
-                <a:sym typeface="Calibri"/>
+                <a:latin typeface="Calibri" panose="020F0502020204030204"/>
+                <a:ea typeface="Calibri" panose="020F0502020204030204"/>
+                <a:cs typeface="Calibri" panose="020F0502020204030204"/>
+                <a:sym typeface="Calibri" panose="020F0502020204030204"/>
               </a:rPr>
               <a:t>    • Expected: Lower MDD, higher Sortino</a:t>
             </a:r>
             <a:br>
-              <a:rPr b="0" i="0" lang="en-US" sz="1100" u="none" cap="none" strike="noStrike">
+              <a:rPr lang="en-US" sz="1100" b="0" i="0" u="none" strike="noStrike" cap="none">
                 <a:solidFill>
                   <a:schemeClr val="dk1"/>
                 </a:solidFill>
-                <a:latin typeface="Calibri"/>
-                <a:ea typeface="Calibri"/>
-                <a:cs typeface="Calibri"/>
-                <a:sym typeface="Calibri"/>
+                <a:latin typeface="Calibri" panose="020F0502020204030204"/>
+                <a:ea typeface="Calibri" panose="020F0502020204030204"/>
+                <a:cs typeface="Calibri" panose="020F0502020204030204"/>
+                <a:sym typeface="Calibri" panose="020F0502020204030204"/>
               </a:rPr>
             </a:br>
             <a:br>
-              <a:rPr b="0" i="0" lang="en-US" sz="1100" u="none" cap="none" strike="noStrike">
+              <a:rPr lang="en-US" sz="1100" b="0" i="0" u="none" strike="noStrike" cap="none">
                 <a:solidFill>
                   <a:schemeClr val="dk1"/>
                 </a:solidFill>
-                <a:latin typeface="Calibri"/>
-                <a:ea typeface="Calibri"/>
-                <a:cs typeface="Calibri"/>
-                <a:sym typeface="Calibri"/>
+                <a:latin typeface="Calibri" panose="020F0502020204030204"/>
+                <a:ea typeface="Calibri" panose="020F0502020204030204"/>
+                <a:cs typeface="Calibri" panose="020F0502020204030204"/>
+                <a:sym typeface="Calibri" panose="020F0502020204030204"/>
               </a:rPr>
             </a:br>
             <a:r>
-              <a:rPr b="0" i="0" lang="en-US" u="none" cap="none" strike="noStrike">
+              <a:rPr lang="en-US" b="0" i="0" u="none" strike="noStrike" cap="none">
                 <a:solidFill>
                   <a:schemeClr val="dk1"/>
                 </a:solidFill>
-                <a:latin typeface="Calibri"/>
-                <a:ea typeface="Calibri"/>
-                <a:cs typeface="Calibri"/>
-                <a:sym typeface="Calibri"/>
+                <a:latin typeface="Calibri" panose="020F0502020204030204"/>
+                <a:ea typeface="Calibri" panose="020F0502020204030204"/>
+                <a:cs typeface="Calibri" panose="020F0502020204030204"/>
+                <a:sym typeface="Calibri" panose="020F0502020204030204"/>
               </a:rPr>
               <a:t>(C) </a:t>
             </a:r>
             <a:r>
-              <a:rPr b="1" i="0" lang="en-US" u="none" cap="none" strike="noStrike">
+              <a:rPr lang="en-US" b="1" i="0" u="none" strike="noStrike" cap="none">
                 <a:solidFill>
                   <a:schemeClr val="dk1"/>
                 </a:solidFill>
-                <a:latin typeface="Calibri"/>
-                <a:ea typeface="Calibri"/>
-                <a:cs typeface="Calibri"/>
-                <a:sym typeface="Calibri"/>
+                <a:latin typeface="Calibri" panose="020F0502020204030204"/>
+                <a:ea typeface="Calibri" panose="020F0502020204030204"/>
+                <a:cs typeface="Calibri" panose="020F0502020204030204"/>
+                <a:sym typeface="Calibri" panose="020F0502020204030204"/>
               </a:rPr>
               <a:t>Regime-Aware Policy</a:t>
             </a:r>
             <a:br>
-              <a:rPr b="0" i="0" lang="en-US" u="none" cap="none" strike="noStrike">
+              <a:rPr lang="en-US" b="0" i="0" u="none" strike="noStrike" cap="none">
                 <a:solidFill>
                   <a:schemeClr val="dk1"/>
                 </a:solidFill>
-                <a:latin typeface="Calibri"/>
-                <a:ea typeface="Calibri"/>
-                <a:cs typeface="Calibri"/>
-                <a:sym typeface="Calibri"/>
+                <a:latin typeface="Calibri" panose="020F0502020204030204"/>
+                <a:ea typeface="Calibri" panose="020F0502020204030204"/>
+                <a:cs typeface="Calibri" panose="020F0502020204030204"/>
+                <a:sym typeface="Calibri" panose="020F0502020204030204"/>
               </a:rPr>
             </a:br>
             <a:r>
-              <a:rPr b="0" i="0" lang="en-US" u="none" cap="none" strike="noStrike">
+              <a:rPr lang="en-US" b="0" i="0" u="none" strike="noStrike" cap="none">
                 <a:solidFill>
                   <a:schemeClr val="dk1"/>
                 </a:solidFill>
-                <a:latin typeface="Calibri"/>
-                <a:ea typeface="Calibri"/>
-                <a:cs typeface="Calibri"/>
-                <a:sym typeface="Calibri"/>
+                <a:latin typeface="Calibri" panose="020F0502020204030204"/>
+                <a:ea typeface="Calibri" panose="020F0502020204030204"/>
+                <a:cs typeface="Calibri" panose="020F0502020204030204"/>
+                <a:sym typeface="Calibri" panose="020F0502020204030204"/>
               </a:rPr>
               <a:t>    • Detect regime (VIX/HMM)</a:t>
             </a:r>
             <a:br>
-              <a:rPr b="0" i="0" lang="en-US" u="none" cap="none" strike="noStrike">
+              <a:rPr lang="en-US" b="0" i="0" u="none" strike="noStrike" cap="none">
                 <a:solidFill>
                   <a:schemeClr val="dk1"/>
                 </a:solidFill>
-                <a:latin typeface="Calibri"/>
-                <a:ea typeface="Calibri"/>
-                <a:cs typeface="Calibri"/>
-                <a:sym typeface="Calibri"/>
+                <a:latin typeface="Calibri" panose="020F0502020204030204"/>
+                <a:ea typeface="Calibri" panose="020F0502020204030204"/>
+                <a:cs typeface="Calibri" panose="020F0502020204030204"/>
+                <a:sym typeface="Calibri" panose="020F0502020204030204"/>
               </a:rPr>
             </a:br>
             <a:r>
-              <a:rPr b="0" i="0" lang="en-US" u="none" cap="none" strike="noStrike">
+              <a:rPr lang="en-US" b="0" i="0" u="none" strike="noStrike" cap="none">
                 <a:solidFill>
                   <a:schemeClr val="dk1"/>
                 </a:solidFill>
-                <a:latin typeface="Calibri"/>
-                <a:ea typeface="Calibri"/>
-                <a:cs typeface="Calibri"/>
-                <a:sym typeface="Calibri"/>
+                <a:latin typeface="Calibri" panose="020F0502020204030204"/>
+                <a:ea typeface="Calibri" panose="020F0502020204030204"/>
+                <a:cs typeface="Calibri" panose="020F0502020204030204"/>
+                <a:sym typeface="Calibri" panose="020F0502020204030204"/>
               </a:rPr>
               <a:t>    • Train separate policies per regime</a:t>
             </a:r>
-            <a:endParaRPr b="0" i="0" u="none" cap="none" strike="noStrike">
+            <a:endParaRPr b="0" i="0" u="none" strike="noStrike" cap="none">
               <a:solidFill>
                 <a:schemeClr val="dk1"/>
               </a:solidFill>
-              <a:latin typeface="Calibri"/>
-              <a:ea typeface="Calibri"/>
-              <a:cs typeface="Calibri"/>
-              <a:sym typeface="Calibri"/>
+              <a:latin typeface="Calibri" panose="020F0502020204030204"/>
+              <a:ea typeface="Calibri" panose="020F0502020204030204"/>
+              <a:cs typeface="Calibri" panose="020F0502020204030204"/>
+              <a:sym typeface="Calibri" panose="020F0502020204030204"/>
             </a:endParaRPr>
           </a:p>
           <a:p>
-            <a:pPr indent="0" lvl="0" marL="0" marR="0" rtl="0" algn="l">
+            <a:pPr marL="0" marR="0" lvl="0" indent="0" algn="l" rtl="0">
               <a:spcBef>
                 <a:spcPts val="0"/>
               </a:spcBef>
@@ -9502,21 +9592,18 @@
               </a:spcAft>
               <a:buNone/>
             </a:pPr>
-            <a:r>
-              <a:t/>
-            </a:r>
             <a:endParaRPr>
               <a:solidFill>
                 <a:schemeClr val="dk1"/>
               </a:solidFill>
-              <a:latin typeface="Calibri"/>
-              <a:ea typeface="Calibri"/>
-              <a:cs typeface="Calibri"/>
-              <a:sym typeface="Calibri"/>
+              <a:latin typeface="Calibri" panose="020F0502020204030204"/>
+              <a:ea typeface="Calibri" panose="020F0502020204030204"/>
+              <a:cs typeface="Calibri" panose="020F0502020204030204"/>
+              <a:sym typeface="Calibri" panose="020F0502020204030204"/>
             </a:endParaRPr>
           </a:p>
           <a:p>
-            <a:pPr indent="0" lvl="0" marL="0" marR="0" rtl="0" algn="l">
+            <a:pPr marL="0" marR="0" lvl="0" indent="0" algn="l" rtl="0">
               <a:spcBef>
                 <a:spcPts val="0"/>
               </a:spcBef>
@@ -9530,64 +9617,323 @@
                 <a:solidFill>
                   <a:schemeClr val="dk1"/>
                 </a:solidFill>
-                <a:latin typeface="Calibri"/>
-                <a:ea typeface="Calibri"/>
-                <a:cs typeface="Calibri"/>
-                <a:sym typeface="Calibri"/>
+                <a:latin typeface="Calibri" panose="020F0502020204030204"/>
+                <a:ea typeface="Calibri" panose="020F0502020204030204"/>
+                <a:cs typeface="Calibri" panose="020F0502020204030204"/>
+                <a:sym typeface="Calibri" panose="020F0502020204030204"/>
               </a:rPr>
               <a:t>(D) </a:t>
             </a:r>
             <a:r>
-              <a:rPr b="1" lang="en-US">
+              <a:rPr lang="en-US" b="1">
                 <a:solidFill>
                   <a:schemeClr val="dk1"/>
                 </a:solidFill>
-                <a:latin typeface="Calibri"/>
-                <a:ea typeface="Calibri"/>
-                <a:cs typeface="Calibri"/>
-                <a:sym typeface="Calibri"/>
+                <a:latin typeface="Calibri" panose="020F0502020204030204"/>
+                <a:ea typeface="Calibri" panose="020F0502020204030204"/>
+                <a:cs typeface="Calibri" panose="020F0502020204030204"/>
+                <a:sym typeface="Calibri" panose="020F0502020204030204"/>
               </a:rPr>
               <a:t>Add Correlation into the objective function</a:t>
             </a:r>
-            <a:endParaRPr b="1">
+            <a:endParaRPr lang="en-US" b="1">
               <a:solidFill>
                 <a:schemeClr val="dk1"/>
               </a:solidFill>
-              <a:latin typeface="Calibri"/>
-              <a:ea typeface="Calibri"/>
-              <a:cs typeface="Calibri"/>
-              <a:sym typeface="Calibri"/>
+              <a:latin typeface="Calibri" panose="020F0502020204030204"/>
+              <a:ea typeface="Calibri" panose="020F0502020204030204"/>
+              <a:cs typeface="Calibri" panose="020F0502020204030204"/>
+              <a:sym typeface="Calibri" panose="020F0502020204030204"/>
+            </a:endParaRPr>
+          </a:p>
+          <a:p>
+            <a:pPr marL="0" marR="0" lvl="0" indent="0" algn="l" rtl="0">
+              <a:spcBef>
+                <a:spcPts val="0"/>
+              </a:spcBef>
+              <a:spcAft>
+                <a:spcPts val="0"/>
+              </a:spcAft>
+              <a:buNone/>
+            </a:pPr>
+            <a:endParaRPr lang="en-US" altLang="en-US" b="1">
+              <a:solidFill>
+                <a:schemeClr val="dk1"/>
+              </a:solidFill>
+              <a:latin typeface="Calibri" panose="020F0502020204030204"/>
+              <a:ea typeface="Calibri" panose="020F0502020204030204"/>
+              <a:cs typeface="Calibri" panose="020F0502020204030204"/>
+              <a:sym typeface="Calibri" panose="020F0502020204030204"/>
             </a:endParaRPr>
           </a:p>
         </p:txBody>
       </p:sp>
-      <p:pic>
-        <p:nvPicPr>
-          <p:cNvPr descr="timeline_v2.png" id="98" name="Google Shape;98;p4"/>
-          <p:cNvPicPr preferRelativeResize="0"/>
+      <p:sp>
+        <p:nvSpPr>
+          <p:cNvPr id="2" name="Text Box 1"/>
+          <p:cNvSpPr txBox="1"/>
           <p:nvPr/>
-        </p:nvPicPr>
-        <p:blipFill rotWithShape="1">
-          <a:blip r:embed="rId3">
-            <a:alphaModFix/>
-          </a:blip>
-          <a:srcRect b="0" l="0" r="0" t="0"/>
-          <a:stretch/>
-        </p:blipFill>
+        </p:nvSpPr>
         <p:spPr>
           <a:xfrm>
-            <a:off x="649050" y="4172674"/>
-            <a:ext cx="7315199" cy="2685326"/>
+            <a:off x="311785" y="4509770"/>
+            <a:ext cx="4572000" cy="1814830"/>
           </a:xfrm>
           <a:prstGeom prst="rect">
             <a:avLst/>
           </a:prstGeom>
           <a:noFill/>
-          <a:ln>
-            <a:noFill/>
-          </a:ln>
         </p:spPr>
-      </p:pic>
+        <p:txBody>
+          <a:bodyPr wrap="square" rtlCol="0" anchor="t">
+            <a:spAutoFit/>
+          </a:bodyPr>
+          <a:p>
+            <a:pPr marL="0" marR="0" lvl="0" indent="0" algn="l" rtl="0">
+              <a:spcBef>
+                <a:spcPts val="0"/>
+              </a:spcBef>
+              <a:spcAft>
+                <a:spcPts val="0"/>
+              </a:spcAft>
+              <a:buNone/>
+            </a:pPr>
+            <a:r>
+              <a:rPr lang="en-US" altLang="en-US" b="1">
+                <a:solidFill>
+                  <a:schemeClr val="dk1"/>
+                </a:solidFill>
+                <a:latin typeface="Calibri" panose="020F0502020204030204"/>
+                <a:ea typeface="Calibri" panose="020F0502020204030204"/>
+                <a:cs typeface="Calibri" panose="020F0502020204030204"/>
+                <a:sym typeface="Calibri" panose="020F0502020204030204"/>
+              </a:rPr>
+              <a:t>Project Timeline</a:t>
+            </a:r>
+            <a:endParaRPr lang="en-US" altLang="en-US" b="1">
+              <a:solidFill>
+                <a:schemeClr val="dk1"/>
+              </a:solidFill>
+              <a:latin typeface="Calibri" panose="020F0502020204030204"/>
+              <a:ea typeface="Calibri" panose="020F0502020204030204"/>
+              <a:cs typeface="Calibri" panose="020F0502020204030204"/>
+              <a:sym typeface="Calibri" panose="020F0502020204030204"/>
+            </a:endParaRPr>
+          </a:p>
+          <a:p>
+            <a:pPr marL="0" marR="0" lvl="0" indent="0" algn="l" rtl="0">
+              <a:spcBef>
+                <a:spcPts val="0"/>
+              </a:spcBef>
+              <a:spcAft>
+                <a:spcPts val="0"/>
+              </a:spcAft>
+              <a:buNone/>
+            </a:pPr>
+            <a:endParaRPr lang="en-US" altLang="en-US" b="1">
+              <a:solidFill>
+                <a:schemeClr val="dk1"/>
+              </a:solidFill>
+              <a:latin typeface="Calibri" panose="020F0502020204030204"/>
+              <a:ea typeface="Calibri" panose="020F0502020204030204"/>
+              <a:cs typeface="Calibri" panose="020F0502020204030204"/>
+              <a:sym typeface="Calibri" panose="020F0502020204030204"/>
+            </a:endParaRPr>
+          </a:p>
+          <a:p>
+            <a:pPr marL="0" marR="0" lvl="0" indent="0" algn="l" rtl="0">
+              <a:spcBef>
+                <a:spcPts val="0"/>
+              </a:spcBef>
+              <a:spcAft>
+                <a:spcPts val="0"/>
+              </a:spcAft>
+              <a:buNone/>
+            </a:pPr>
+            <a:r>
+              <a:rPr lang="en-US" altLang="en-US">
+                <a:solidFill>
+                  <a:schemeClr val="dk1"/>
+                </a:solidFill>
+                <a:latin typeface="Calibri" panose="020F0502020204030204"/>
+                <a:ea typeface="Calibri" panose="020F0502020204030204"/>
+                <a:cs typeface="Calibri" panose="020F0502020204030204"/>
+                <a:sym typeface="Calibri" panose="020F0502020204030204"/>
+              </a:rPr>
+              <a:t>Data Pipeline &amp; Features 3.16-3.22</a:t>
+            </a:r>
+            <a:endParaRPr lang="en-US" altLang="en-US">
+              <a:solidFill>
+                <a:schemeClr val="dk1"/>
+              </a:solidFill>
+              <a:latin typeface="Calibri" panose="020F0502020204030204"/>
+              <a:ea typeface="Calibri" panose="020F0502020204030204"/>
+              <a:cs typeface="Calibri" panose="020F0502020204030204"/>
+              <a:sym typeface="Calibri" panose="020F0502020204030204"/>
+            </a:endParaRPr>
+          </a:p>
+          <a:p>
+            <a:pPr marL="0" marR="0" lvl="0" indent="0" algn="l" rtl="0">
+              <a:spcBef>
+                <a:spcPts val="0"/>
+              </a:spcBef>
+              <a:spcAft>
+                <a:spcPts val="0"/>
+              </a:spcAft>
+              <a:buNone/>
+            </a:pPr>
+            <a:r>
+              <a:rPr lang="en-US" altLang="en-US">
+                <a:solidFill>
+                  <a:schemeClr val="dk1"/>
+                </a:solidFill>
+                <a:latin typeface="Calibri" panose="020F0502020204030204"/>
+                <a:ea typeface="Calibri" panose="020F0502020204030204"/>
+                <a:cs typeface="Calibri" panose="020F0502020204030204"/>
+                <a:sym typeface="Calibri" panose="020F0502020204030204"/>
+              </a:rPr>
+              <a:t>Implement DQN/PG/A2C 3.23-3.29</a:t>
+            </a:r>
+            <a:endParaRPr lang="en-US" altLang="en-US">
+              <a:solidFill>
+                <a:schemeClr val="dk1"/>
+              </a:solidFill>
+              <a:latin typeface="Calibri" panose="020F0502020204030204"/>
+              <a:ea typeface="Calibri" panose="020F0502020204030204"/>
+              <a:cs typeface="Calibri" panose="020F0502020204030204"/>
+              <a:sym typeface="Calibri" panose="020F0502020204030204"/>
+            </a:endParaRPr>
+          </a:p>
+          <a:p>
+            <a:pPr marL="0" marR="0" lvl="0" indent="0" algn="l" rtl="0">
+              <a:spcBef>
+                <a:spcPts val="0"/>
+              </a:spcBef>
+              <a:spcAft>
+                <a:spcPts val="0"/>
+              </a:spcAft>
+              <a:buNone/>
+            </a:pPr>
+            <a:r>
+              <a:rPr lang="en-US" altLang="en-US">
+                <a:solidFill>
+                  <a:schemeClr val="dk1"/>
+                </a:solidFill>
+                <a:latin typeface="Calibri" panose="020F0502020204030204"/>
+                <a:ea typeface="Calibri" panose="020F0502020204030204"/>
+                <a:cs typeface="Calibri" panose="020F0502020204030204"/>
+                <a:sym typeface="Calibri" panose="020F0502020204030204"/>
+              </a:rPr>
+              <a:t>Replicate Paper Results 3.30-4.5</a:t>
+            </a:r>
+            <a:endParaRPr lang="en-US" altLang="en-US">
+              <a:solidFill>
+                <a:schemeClr val="dk1"/>
+              </a:solidFill>
+              <a:latin typeface="Calibri" panose="020F0502020204030204"/>
+              <a:ea typeface="Calibri" panose="020F0502020204030204"/>
+              <a:cs typeface="Calibri" panose="020F0502020204030204"/>
+              <a:sym typeface="Calibri" panose="020F0502020204030204"/>
+            </a:endParaRPr>
+          </a:p>
+          <a:p>
+            <a:pPr marL="0" marR="0" lvl="0" indent="0" algn="l" rtl="0">
+              <a:spcBef>
+                <a:spcPts val="0"/>
+              </a:spcBef>
+              <a:spcAft>
+                <a:spcPts val="0"/>
+              </a:spcAft>
+              <a:buNone/>
+            </a:pPr>
+            <a:r>
+              <a:rPr lang="en-US" altLang="en-US">
+                <a:solidFill>
+                  <a:schemeClr val="dk1"/>
+                </a:solidFill>
+                <a:latin typeface="Calibri" panose="020F0502020204030204"/>
+                <a:ea typeface="Calibri" panose="020F0502020204030204"/>
+                <a:cs typeface="Calibri" panose="020F0502020204030204"/>
+                <a:sym typeface="Calibri" panose="020F0502020204030204"/>
+              </a:rPr>
+              <a:t>Alpha Decay Test (2019-2024) 4.6-4.12</a:t>
+            </a:r>
+            <a:endParaRPr lang="en-US" altLang="en-US">
+              <a:solidFill>
+                <a:schemeClr val="dk1"/>
+              </a:solidFill>
+              <a:latin typeface="Calibri" panose="020F0502020204030204"/>
+              <a:ea typeface="Calibri" panose="020F0502020204030204"/>
+              <a:cs typeface="Calibri" panose="020F0502020204030204"/>
+              <a:sym typeface="Calibri" panose="020F0502020204030204"/>
+            </a:endParaRPr>
+          </a:p>
+          <a:p>
+            <a:pPr marL="0" marR="0" lvl="0" indent="0" algn="l" rtl="0">
+              <a:spcBef>
+                <a:spcPts val="0"/>
+              </a:spcBef>
+              <a:spcAft>
+                <a:spcPts val="0"/>
+              </a:spcAft>
+              <a:buNone/>
+            </a:pPr>
+            <a:r>
+              <a:rPr lang="en-US" altLang="en-US">
+                <a:solidFill>
+                  <a:schemeClr val="dk1"/>
+                </a:solidFill>
+                <a:latin typeface="Calibri" panose="020F0502020204030204"/>
+                <a:ea typeface="Calibri" panose="020F0502020204030204"/>
+                <a:cs typeface="Calibri" panose="020F0502020204030204"/>
+                <a:sym typeface="Calibri" panose="020F0502020204030204"/>
+              </a:rPr>
+              <a:t>Risk – Aversion Extension 4.13-4.19</a:t>
+            </a:r>
+            <a:endParaRPr lang="en-US" altLang="en-US">
+              <a:solidFill>
+                <a:schemeClr val="dk1"/>
+              </a:solidFill>
+              <a:latin typeface="Calibri" panose="020F0502020204030204"/>
+              <a:ea typeface="Calibri" panose="020F0502020204030204"/>
+              <a:cs typeface="Calibri" panose="020F0502020204030204"/>
+              <a:sym typeface="Calibri" panose="020F0502020204030204"/>
+            </a:endParaRPr>
+          </a:p>
+          <a:p>
+            <a:pPr marL="0" marR="0" lvl="0" indent="0" algn="l" rtl="0">
+              <a:spcBef>
+                <a:spcPts val="0"/>
+              </a:spcBef>
+              <a:spcAft>
+                <a:spcPts val="0"/>
+              </a:spcAft>
+              <a:buNone/>
+            </a:pPr>
+            <a:r>
+              <a:rPr lang="en-US" altLang="en-US">
+                <a:solidFill>
+                  <a:schemeClr val="dk1"/>
+                </a:solidFill>
+                <a:latin typeface="Calibri" panose="020F0502020204030204"/>
+                <a:ea typeface="Calibri" panose="020F0502020204030204"/>
+                <a:cs typeface="Calibri" panose="020F0502020204030204"/>
+                <a:sym typeface="Calibri" panose="020F0502020204030204"/>
+              </a:rPr>
+              <a:t>Dashboard &amp; Final Deck 4.20-4.26</a:t>
+            </a:r>
+            <a:endParaRPr lang="en-US" altLang="en-US">
+              <a:solidFill>
+                <a:schemeClr val="dk1"/>
+              </a:solidFill>
+              <a:latin typeface="Calibri" panose="020F0502020204030204"/>
+              <a:ea typeface="Calibri" panose="020F0502020204030204"/>
+              <a:cs typeface="Calibri" panose="020F0502020204030204"/>
+              <a:sym typeface="Calibri" panose="020F0502020204030204"/>
+            </a:endParaRPr>
+          </a:p>
+        </p:txBody>
+      </p:sp>
     </p:spTree>
   </p:cSld>
   <p:clrMapOvr>
@@ -9597,7 +9943,7 @@
 </file>
 
 <file path=ppt/theme/theme1.xml><?xml version="1.0" encoding="utf-8"?>
-<a:theme xmlns:a="http://schemas.openxmlformats.org/drawingml/2006/main" xmlns:r="http://schemas.openxmlformats.org/officeDocument/2006/relationships" name="Spearmint">
+<a:theme xmlns:a="http://schemas.openxmlformats.org/drawingml/2006/main" name="Spearmint">
   <a:themeElements>
     <a:clrScheme name="Spearmint">
       <a:dk1>
@@ -9872,11 +10218,16 @@
       </a:bgFillStyleLst>
     </a:fmtScheme>
   </a:themeElements>
+  <a:extLst>
+    <a:ext uri="{05A4C25C-085E-4340-85A3-A5531E510DB2}">
+      <thm15:themeFamily xmlns:thm15="http://schemas.microsoft.com/office/thememl/2012/main" name="Office Theme" id="{62F939B6-93AF-4DB8-9C6B-D6C7DFDC589F}" vid="{4A3C46E8-61CC-4603-A589-7422A47A8E4A}"/>
+    </a:ext>
+  </a:extLst>
 </a:theme>
 </file>
 
 <file path=ppt/theme/theme2.xml><?xml version="1.0" encoding="utf-8"?>
-<a:theme xmlns:a="http://schemas.openxmlformats.org/drawingml/2006/main" xmlns:r="http://schemas.openxmlformats.org/officeDocument/2006/relationships">
+<a:theme xmlns:a="http://schemas.openxmlformats.org/drawingml/2006/main">
   <a:themeElements>
     <a:clrScheme name="Default">
       <a:dk1>
@@ -10151,5 +10502,10 @@
       </a:bgFillStyleLst>
     </a:fmtScheme>
   </a:themeElements>
+  <a:extLst>
+    <a:ext uri="{05A4C25C-085E-4340-85A3-A5531E510DB2}">
+      <thm15:themeFamily xmlns:thm15="http://schemas.microsoft.com/office/thememl/2012/main" name="Office Theme" id="{62F939B6-93AF-4DB8-9C6B-D6C7DFDC589F}" vid="{4A3C46E8-61CC-4603-A589-7422A47A8E4A}"/>
+    </a:ext>
+  </a:extLst>
 </a:theme>
 </file>